--- a/萬物讚之聲.pptx
+++ b/萬物讚之聲.pptx
@@ -2,17 +2,32 @@
 <file path=ppt/presentation.xml><?xml version="1.0" encoding="utf-8"?>
 <p:presentation xmlns:a="http://schemas.openxmlformats.org/drawingml/2006/main" xmlns:r="http://schemas.openxmlformats.org/officeDocument/2006/relationships" xmlns:p="http://schemas.openxmlformats.org/presentationml/2006/main" saveSubsetFonts="1">
   <p:sldMasterIdLst>
-    <p:sldMasterId id="2147483672" r:id="rId1"/>
+    <p:sldMasterId id="2147483660" r:id="rId1"/>
   </p:sldMasterIdLst>
   <p:sldIdLst>
-    <p:sldId id="256" r:id="rId2"/>
-    <p:sldId id="257" r:id="rId3"/>
+    <p:sldId id="257" r:id="rId2"/>
+    <p:sldId id="258" r:id="rId3"/>
+    <p:sldId id="259" r:id="rId4"/>
+    <p:sldId id="260" r:id="rId5"/>
+    <p:sldId id="261" r:id="rId6"/>
+    <p:sldId id="262" r:id="rId7"/>
+    <p:sldId id="263" r:id="rId8"/>
+    <p:sldId id="264" r:id="rId9"/>
+    <p:sldId id="265" r:id="rId10"/>
+    <p:sldId id="266" r:id="rId11"/>
+    <p:sldId id="267" r:id="rId12"/>
+    <p:sldId id="268" r:id="rId13"/>
+    <p:sldId id="269" r:id="rId14"/>
+    <p:sldId id="270" r:id="rId15"/>
+    <p:sldId id="271" r:id="rId16"/>
+    <p:sldId id="272" r:id="rId17"/>
+    <p:sldId id="273" r:id="rId18"/>
   </p:sldIdLst>
   <p:sldSz cx="12192000" cy="6858000"/>
   <p:notesSz cx="6858000" cy="9144000"/>
   <p:defaultTextStyle>
     <a:defPPr>
-      <a:defRPr lang="zh-TW"/>
+      <a:defRPr lang="en-US"/>
     </a:defPPr>
     <a:lvl1pPr marL="0" algn="l" defTabSz="914400" rtl="0" eaLnBrk="1" latinLnBrk="0" hangingPunct="1">
       <a:defRPr sz="1800" kern="1200">
@@ -107,18 +122,7 @@
   </p:defaultTextStyle>
   <p:extLst>
     <p:ext uri="{EFAFB233-063F-42B5-8137-9DF3F51BA10A}">
-      <p15:sldGuideLst xmlns:p15="http://schemas.microsoft.com/office/powerpoint/2012/main">
-        <p15:guide id="1" orient="horz" pos="2160" userDrawn="1">
-          <p15:clr>
-            <a:srgbClr val="A4A3A4"/>
-          </p15:clr>
-        </p15:guide>
-        <p15:guide id="2" pos="3840" userDrawn="1">
-          <p15:clr>
-            <a:srgbClr val="A4A3A4"/>
-          </p15:clr>
-        </p15:guide>
-      </p15:sldGuideLst>
+      <p15:sldGuideLst xmlns:p15="http://schemas.microsoft.com/office/powerpoint/2012/main"/>
     </p:ext>
   </p:extLst>
 </p:presentation>
@@ -153,7 +157,7 @@
         </p:nvSpPr>
         <p:spPr>
           <a:xfrm>
-            <a:off x="914400" y="2130429"/>
+            <a:off x="914400" y="2130428"/>
             <a:ext cx="10363200" cy="1470025"/>
           </a:xfrm>
         </p:spPr>
@@ -162,7 +166,7 @@
           <a:lstStyle/>
           <a:p>
             <a:r>
-              <a:rPr lang="en-US" altLang="zh-TW" smtClean="0"/>
+              <a:rPr lang="en-US" altLang="zh-TW"/>
               <a:t>Click to edit Master title style</a:t>
             </a:r>
             <a:endParaRPr lang="zh-TW" altLang="en-US"/>
@@ -198,7 +202,7 @@
                 </a:solidFill>
               </a:defRPr>
             </a:lvl1pPr>
-            <a:lvl2pPr marL="457200" indent="0" algn="ctr">
+            <a:lvl2pPr marL="609585" indent="0" algn="ctr">
               <a:buNone/>
               <a:defRPr>
                 <a:solidFill>
@@ -208,7 +212,7 @@
                 </a:solidFill>
               </a:defRPr>
             </a:lvl2pPr>
-            <a:lvl3pPr marL="914400" indent="0" algn="ctr">
+            <a:lvl3pPr marL="1219170" indent="0" algn="ctr">
               <a:buNone/>
               <a:defRPr>
                 <a:solidFill>
@@ -218,7 +222,7 @@
                 </a:solidFill>
               </a:defRPr>
             </a:lvl3pPr>
-            <a:lvl4pPr marL="1371600" indent="0" algn="ctr">
+            <a:lvl4pPr marL="1828754" indent="0" algn="ctr">
               <a:buNone/>
               <a:defRPr>
                 <a:solidFill>
@@ -228,7 +232,7 @@
                 </a:solidFill>
               </a:defRPr>
             </a:lvl4pPr>
-            <a:lvl5pPr marL="1828800" indent="0" algn="ctr">
+            <a:lvl5pPr marL="2438339" indent="0" algn="ctr">
               <a:buNone/>
               <a:defRPr>
                 <a:solidFill>
@@ -238,7 +242,7 @@
                 </a:solidFill>
               </a:defRPr>
             </a:lvl5pPr>
-            <a:lvl6pPr marL="2286000" indent="0" algn="ctr">
+            <a:lvl6pPr marL="3047924" indent="0" algn="ctr">
               <a:buNone/>
               <a:defRPr>
                 <a:solidFill>
@@ -248,7 +252,7 @@
                 </a:solidFill>
               </a:defRPr>
             </a:lvl6pPr>
-            <a:lvl7pPr marL="2743200" indent="0" algn="ctr">
+            <a:lvl7pPr marL="3657509" indent="0" algn="ctr">
               <a:buNone/>
               <a:defRPr>
                 <a:solidFill>
@@ -258,7 +262,7 @@
                 </a:solidFill>
               </a:defRPr>
             </a:lvl7pPr>
-            <a:lvl8pPr marL="3200400" indent="0" algn="ctr">
+            <a:lvl8pPr marL="4267093" indent="0" algn="ctr">
               <a:buNone/>
               <a:defRPr>
                 <a:solidFill>
@@ -268,7 +272,7 @@
                 </a:solidFill>
               </a:defRPr>
             </a:lvl8pPr>
-            <a:lvl9pPr marL="3657600" indent="0" algn="ctr">
+            <a:lvl9pPr marL="4876678" indent="0" algn="ctr">
               <a:buNone/>
               <a:defRPr>
                 <a:solidFill>
@@ -281,7 +285,7 @@
           </a:lstStyle>
           <a:p>
             <a:r>
-              <a:rPr lang="en-US" altLang="zh-TW" smtClean="0"/>
+              <a:rPr lang="en-US" altLang="zh-TW"/>
               <a:t>Click to edit Master subtitle style</a:t>
             </a:r>
             <a:endParaRPr lang="zh-TW" altLang="en-US"/>
@@ -303,11 +307,11 @@
           <a:bodyPr/>
           <a:lstStyle/>
           <a:p>
-            <a:fld id="{299965B1-26E6-4ED8-AF94-A287FCD7512A}" type="datetimeFigureOut">
-              <a:rPr lang="zh-TW" altLang="en-US" smtClean="0"/>
-              <a:t>2023/7/8</a:t>
+            <a:fld id="{18796ABB-A8F6-4FF0-B464-9BB49CF65F95}" type="datetimeFigureOut">
+              <a:rPr lang="en-US" smtClean="0"/>
+              <a:t>10/15/2026</a:t>
             </a:fld>
-            <a:endParaRPr lang="zh-TW" altLang="en-US"/>
+            <a:endParaRPr lang="en-US"/>
           </a:p>
         </p:txBody>
       </p:sp>
@@ -326,7 +330,7 @@
           <a:bodyPr/>
           <a:lstStyle/>
           <a:p>
-            <a:endParaRPr lang="zh-TW" altLang="en-US"/>
+            <a:endParaRPr lang="en-US"/>
           </a:p>
         </p:txBody>
       </p:sp>
@@ -345,18 +349,18 @@
           <a:bodyPr/>
           <a:lstStyle/>
           <a:p>
-            <a:fld id="{1F48CDF5-753B-4569-BFE2-DBE5D822F48C}" type="slidenum">
-              <a:rPr lang="zh-TW" altLang="en-US" smtClean="0"/>
+            <a:fld id="{4EEEE1B6-4C45-472A-8335-E1C61007D849}" type="slidenum">
+              <a:rPr lang="en-US" smtClean="0"/>
               <a:t>‹#›</a:t>
             </a:fld>
-            <a:endParaRPr lang="zh-TW" altLang="en-US"/>
+            <a:endParaRPr lang="en-US"/>
           </a:p>
         </p:txBody>
       </p:sp>
     </p:spTree>
     <p:extLst>
       <p:ext uri="{BB962C8B-B14F-4D97-AF65-F5344CB8AC3E}">
-        <p14:creationId xmlns:p14="http://schemas.microsoft.com/office/powerpoint/2010/main" val="1424691152"/>
+        <p14:creationId xmlns:p14="http://schemas.microsoft.com/office/powerpoint/2010/main" val="3301728061"/>
       </p:ext>
     </p:extLst>
   </p:cSld>
@@ -399,7 +403,7 @@
           <a:lstStyle/>
           <a:p>
             <a:r>
-              <a:rPr lang="en-US" altLang="zh-TW" smtClean="0"/>
+              <a:rPr lang="en-US" altLang="zh-TW"/>
               <a:t>Click to edit Master title style</a:t>
             </a:r>
             <a:endParaRPr lang="zh-TW" altLang="en-US"/>
@@ -423,35 +427,35 @@
           <a:p>
             <a:pPr lvl="0"/>
             <a:r>
-              <a:rPr lang="en-US" altLang="zh-TW" smtClean="0"/>
+              <a:rPr lang="en-US" altLang="zh-TW"/>
               <a:t>Edit Master text styles</a:t>
             </a:r>
           </a:p>
           <a:p>
             <a:pPr lvl="1"/>
             <a:r>
-              <a:rPr lang="en-US" altLang="zh-TW" smtClean="0"/>
+              <a:rPr lang="en-US" altLang="zh-TW"/>
               <a:t>Second level</a:t>
             </a:r>
           </a:p>
           <a:p>
             <a:pPr lvl="2"/>
             <a:r>
-              <a:rPr lang="en-US" altLang="zh-TW" smtClean="0"/>
+              <a:rPr lang="en-US" altLang="zh-TW"/>
               <a:t>Third level</a:t>
             </a:r>
           </a:p>
           <a:p>
             <a:pPr lvl="3"/>
             <a:r>
-              <a:rPr lang="en-US" altLang="zh-TW" smtClean="0"/>
+              <a:rPr lang="en-US" altLang="zh-TW"/>
               <a:t>Fourth level</a:t>
             </a:r>
           </a:p>
           <a:p>
             <a:pPr lvl="4"/>
             <a:r>
-              <a:rPr lang="en-US" altLang="zh-TW" smtClean="0"/>
+              <a:rPr lang="en-US" altLang="zh-TW"/>
               <a:t>Fifth level</a:t>
             </a:r>
             <a:endParaRPr lang="zh-TW" altLang="en-US"/>
@@ -473,11 +477,11 @@
           <a:bodyPr/>
           <a:lstStyle/>
           <a:p>
-            <a:fld id="{299965B1-26E6-4ED8-AF94-A287FCD7512A}" type="datetimeFigureOut">
-              <a:rPr lang="zh-TW" altLang="en-US" smtClean="0"/>
-              <a:t>2023/7/8</a:t>
+            <a:fld id="{18796ABB-A8F6-4FF0-B464-9BB49CF65F95}" type="datetimeFigureOut">
+              <a:rPr lang="en-US" smtClean="0"/>
+              <a:t>10/15/2026</a:t>
             </a:fld>
-            <a:endParaRPr lang="zh-TW" altLang="en-US"/>
+            <a:endParaRPr lang="en-US"/>
           </a:p>
         </p:txBody>
       </p:sp>
@@ -496,7 +500,7 @@
           <a:bodyPr/>
           <a:lstStyle/>
           <a:p>
-            <a:endParaRPr lang="zh-TW" altLang="en-US"/>
+            <a:endParaRPr lang="en-US"/>
           </a:p>
         </p:txBody>
       </p:sp>
@@ -515,18 +519,18 @@
           <a:bodyPr/>
           <a:lstStyle/>
           <a:p>
-            <a:fld id="{1F48CDF5-753B-4569-BFE2-DBE5D822F48C}" type="slidenum">
-              <a:rPr lang="zh-TW" altLang="en-US" smtClean="0"/>
+            <a:fld id="{4EEEE1B6-4C45-472A-8335-E1C61007D849}" type="slidenum">
+              <a:rPr lang="en-US" smtClean="0"/>
               <a:t>‹#›</a:t>
             </a:fld>
-            <a:endParaRPr lang="zh-TW" altLang="en-US"/>
+            <a:endParaRPr lang="en-US"/>
           </a:p>
         </p:txBody>
       </p:sp>
     </p:spTree>
     <p:extLst>
       <p:ext uri="{BB962C8B-B14F-4D97-AF65-F5344CB8AC3E}">
-        <p14:creationId xmlns:p14="http://schemas.microsoft.com/office/powerpoint/2010/main" val="1524769981"/>
+        <p14:creationId xmlns:p14="http://schemas.microsoft.com/office/powerpoint/2010/main" val="3508829537"/>
       </p:ext>
     </p:extLst>
   </p:cSld>
@@ -565,7 +569,7 @@
         </p:nvSpPr>
         <p:spPr>
           <a:xfrm>
-            <a:off x="8839200" y="274640"/>
+            <a:off x="8839200" y="274639"/>
             <a:ext cx="2743200" cy="5851525"/>
           </a:xfrm>
         </p:spPr>
@@ -574,7 +578,7 @@
           <a:lstStyle/>
           <a:p>
             <a:r>
-              <a:rPr lang="en-US" altLang="zh-TW" smtClean="0"/>
+              <a:rPr lang="en-US" altLang="zh-TW"/>
               <a:t>Click to edit Master title style</a:t>
             </a:r>
             <a:endParaRPr lang="zh-TW" altLang="en-US"/>
@@ -593,7 +597,7 @@
         </p:nvSpPr>
         <p:spPr>
           <a:xfrm>
-            <a:off x="609600" y="274640"/>
+            <a:off x="609600" y="274639"/>
             <a:ext cx="8026400" cy="5851525"/>
           </a:xfrm>
         </p:spPr>
@@ -603,35 +607,35 @@
           <a:p>
             <a:pPr lvl="0"/>
             <a:r>
-              <a:rPr lang="en-US" altLang="zh-TW" smtClean="0"/>
+              <a:rPr lang="en-US" altLang="zh-TW"/>
               <a:t>Edit Master text styles</a:t>
             </a:r>
           </a:p>
           <a:p>
             <a:pPr lvl="1"/>
             <a:r>
-              <a:rPr lang="en-US" altLang="zh-TW" smtClean="0"/>
+              <a:rPr lang="en-US" altLang="zh-TW"/>
               <a:t>Second level</a:t>
             </a:r>
           </a:p>
           <a:p>
             <a:pPr lvl="2"/>
             <a:r>
-              <a:rPr lang="en-US" altLang="zh-TW" smtClean="0"/>
+              <a:rPr lang="en-US" altLang="zh-TW"/>
               <a:t>Third level</a:t>
             </a:r>
           </a:p>
           <a:p>
             <a:pPr lvl="3"/>
             <a:r>
-              <a:rPr lang="en-US" altLang="zh-TW" smtClean="0"/>
+              <a:rPr lang="en-US" altLang="zh-TW"/>
               <a:t>Fourth level</a:t>
             </a:r>
           </a:p>
           <a:p>
             <a:pPr lvl="4"/>
             <a:r>
-              <a:rPr lang="en-US" altLang="zh-TW" smtClean="0"/>
+              <a:rPr lang="en-US" altLang="zh-TW"/>
               <a:t>Fifth level</a:t>
             </a:r>
             <a:endParaRPr lang="zh-TW" altLang="en-US"/>
@@ -653,11 +657,11 @@
           <a:bodyPr/>
           <a:lstStyle/>
           <a:p>
-            <a:fld id="{299965B1-26E6-4ED8-AF94-A287FCD7512A}" type="datetimeFigureOut">
-              <a:rPr lang="zh-TW" altLang="en-US" smtClean="0"/>
-              <a:t>2023/7/8</a:t>
+            <a:fld id="{18796ABB-A8F6-4FF0-B464-9BB49CF65F95}" type="datetimeFigureOut">
+              <a:rPr lang="en-US" smtClean="0"/>
+              <a:t>10/15/2026</a:t>
             </a:fld>
-            <a:endParaRPr lang="zh-TW" altLang="en-US"/>
+            <a:endParaRPr lang="en-US"/>
           </a:p>
         </p:txBody>
       </p:sp>
@@ -676,7 +680,7 @@
           <a:bodyPr/>
           <a:lstStyle/>
           <a:p>
-            <a:endParaRPr lang="zh-TW" altLang="en-US"/>
+            <a:endParaRPr lang="en-US"/>
           </a:p>
         </p:txBody>
       </p:sp>
@@ -695,18 +699,18 @@
           <a:bodyPr/>
           <a:lstStyle/>
           <a:p>
-            <a:fld id="{1F48CDF5-753B-4569-BFE2-DBE5D822F48C}" type="slidenum">
-              <a:rPr lang="zh-TW" altLang="en-US" smtClean="0"/>
+            <a:fld id="{4EEEE1B6-4C45-472A-8335-E1C61007D849}" type="slidenum">
+              <a:rPr lang="en-US" smtClean="0"/>
               <a:t>‹#›</a:t>
             </a:fld>
-            <a:endParaRPr lang="zh-TW" altLang="en-US"/>
+            <a:endParaRPr lang="en-US"/>
           </a:p>
         </p:txBody>
       </p:sp>
     </p:spTree>
     <p:extLst>
       <p:ext uri="{BB962C8B-B14F-4D97-AF65-F5344CB8AC3E}">
-        <p14:creationId xmlns:p14="http://schemas.microsoft.com/office/powerpoint/2010/main" val="3836737078"/>
+        <p14:creationId xmlns:p14="http://schemas.microsoft.com/office/powerpoint/2010/main" val="2623091084"/>
       </p:ext>
     </p:extLst>
   </p:cSld>
@@ -749,7 +753,7 @@
           <a:lstStyle/>
           <a:p>
             <a:r>
-              <a:rPr lang="en-US" altLang="zh-TW" smtClean="0"/>
+              <a:rPr lang="en-US" altLang="zh-TW"/>
               <a:t>Click to edit Master title style</a:t>
             </a:r>
             <a:endParaRPr lang="zh-TW" altLang="en-US"/>
@@ -773,35 +777,35 @@
           <a:p>
             <a:pPr lvl="0"/>
             <a:r>
-              <a:rPr lang="en-US" altLang="zh-TW" smtClean="0"/>
+              <a:rPr lang="en-US" altLang="zh-TW"/>
               <a:t>Edit Master text styles</a:t>
             </a:r>
           </a:p>
           <a:p>
             <a:pPr lvl="1"/>
             <a:r>
-              <a:rPr lang="en-US" altLang="zh-TW" smtClean="0"/>
+              <a:rPr lang="en-US" altLang="zh-TW"/>
               <a:t>Second level</a:t>
             </a:r>
           </a:p>
           <a:p>
             <a:pPr lvl="2"/>
             <a:r>
-              <a:rPr lang="en-US" altLang="zh-TW" smtClean="0"/>
+              <a:rPr lang="en-US" altLang="zh-TW"/>
               <a:t>Third level</a:t>
             </a:r>
           </a:p>
           <a:p>
             <a:pPr lvl="3"/>
             <a:r>
-              <a:rPr lang="en-US" altLang="zh-TW" smtClean="0"/>
+              <a:rPr lang="en-US" altLang="zh-TW"/>
               <a:t>Fourth level</a:t>
             </a:r>
           </a:p>
           <a:p>
             <a:pPr lvl="4"/>
             <a:r>
-              <a:rPr lang="en-US" altLang="zh-TW" smtClean="0"/>
+              <a:rPr lang="en-US" altLang="zh-TW"/>
               <a:t>Fifth level</a:t>
             </a:r>
             <a:endParaRPr lang="zh-TW" altLang="en-US"/>
@@ -823,11 +827,11 @@
           <a:bodyPr/>
           <a:lstStyle/>
           <a:p>
-            <a:fld id="{299965B1-26E6-4ED8-AF94-A287FCD7512A}" type="datetimeFigureOut">
-              <a:rPr lang="zh-TW" altLang="en-US" smtClean="0"/>
-              <a:t>2023/7/8</a:t>
+            <a:fld id="{18796ABB-A8F6-4FF0-B464-9BB49CF65F95}" type="datetimeFigureOut">
+              <a:rPr lang="en-US" smtClean="0"/>
+              <a:t>10/15/2026</a:t>
             </a:fld>
-            <a:endParaRPr lang="zh-TW" altLang="en-US"/>
+            <a:endParaRPr lang="en-US"/>
           </a:p>
         </p:txBody>
       </p:sp>
@@ -846,7 +850,7 @@
           <a:bodyPr/>
           <a:lstStyle/>
           <a:p>
-            <a:endParaRPr lang="zh-TW" altLang="en-US"/>
+            <a:endParaRPr lang="en-US"/>
           </a:p>
         </p:txBody>
       </p:sp>
@@ -865,18 +869,18 @@
           <a:bodyPr/>
           <a:lstStyle/>
           <a:p>
-            <a:fld id="{1F48CDF5-753B-4569-BFE2-DBE5D822F48C}" type="slidenum">
-              <a:rPr lang="zh-TW" altLang="en-US" smtClean="0"/>
+            <a:fld id="{4EEEE1B6-4C45-472A-8335-E1C61007D849}" type="slidenum">
+              <a:rPr lang="en-US" smtClean="0"/>
               <a:t>‹#›</a:t>
             </a:fld>
-            <a:endParaRPr lang="zh-TW" altLang="en-US"/>
+            <a:endParaRPr lang="en-US"/>
           </a:p>
         </p:txBody>
       </p:sp>
     </p:spTree>
     <p:extLst>
       <p:ext uri="{BB962C8B-B14F-4D97-AF65-F5344CB8AC3E}">
-        <p14:creationId xmlns:p14="http://schemas.microsoft.com/office/powerpoint/2010/main" val="1205993730"/>
+        <p14:creationId xmlns:p14="http://schemas.microsoft.com/office/powerpoint/2010/main" val="3719697052"/>
       </p:ext>
     </p:extLst>
   </p:cSld>
@@ -915,7 +919,7 @@
         </p:nvSpPr>
         <p:spPr>
           <a:xfrm>
-            <a:off x="963084" y="4406902"/>
+            <a:off x="963084" y="4406901"/>
             <a:ext cx="10363200" cy="1362075"/>
           </a:xfrm>
         </p:spPr>
@@ -923,12 +927,12 @@
           <a:bodyPr anchor="t"/>
           <a:lstStyle>
             <a:lvl1pPr algn="l">
-              <a:defRPr sz="4000" b="1" cap="all"/>
+              <a:defRPr sz="5333" b="1" cap="all"/>
             </a:lvl1pPr>
           </a:lstStyle>
           <a:p>
             <a:r>
-              <a:rPr lang="en-US" altLang="zh-TW" smtClean="0"/>
+              <a:rPr lang="en-US" altLang="zh-TW"/>
               <a:t>Click to edit Master title style</a:t>
             </a:r>
             <a:endParaRPr lang="zh-TW" altLang="en-US"/>
@@ -956,7 +960,7 @@
           <a:lstStyle>
             <a:lvl1pPr marL="0" indent="0">
               <a:buNone/>
-              <a:defRPr sz="2000">
+              <a:defRPr sz="2667">
                 <a:solidFill>
                   <a:schemeClr val="tx1">
                     <a:tint val="75000"/>
@@ -964,9 +968,9 @@
                 </a:solidFill>
               </a:defRPr>
             </a:lvl1pPr>
-            <a:lvl2pPr marL="457200" indent="0">
-              <a:buNone/>
-              <a:defRPr sz="1800">
+            <a:lvl2pPr marL="609585" indent="0">
+              <a:buNone/>
+              <a:defRPr sz="2400">
                 <a:solidFill>
                   <a:schemeClr val="tx1">
                     <a:tint val="75000"/>
@@ -974,9 +978,9 @@
                 </a:solidFill>
               </a:defRPr>
             </a:lvl2pPr>
-            <a:lvl3pPr marL="914400" indent="0">
-              <a:buNone/>
-              <a:defRPr sz="1600">
+            <a:lvl3pPr marL="1219170" indent="0">
+              <a:buNone/>
+              <a:defRPr sz="2133">
                 <a:solidFill>
                   <a:schemeClr val="tx1">
                     <a:tint val="75000"/>
@@ -984,9 +988,9 @@
                 </a:solidFill>
               </a:defRPr>
             </a:lvl3pPr>
-            <a:lvl4pPr marL="1371600" indent="0">
-              <a:buNone/>
-              <a:defRPr sz="1400">
+            <a:lvl4pPr marL="1828754" indent="0">
+              <a:buNone/>
+              <a:defRPr sz="1867">
                 <a:solidFill>
                   <a:schemeClr val="tx1">
                     <a:tint val="75000"/>
@@ -994,9 +998,9 @@
                 </a:solidFill>
               </a:defRPr>
             </a:lvl4pPr>
-            <a:lvl5pPr marL="1828800" indent="0">
-              <a:buNone/>
-              <a:defRPr sz="1400">
+            <a:lvl5pPr marL="2438339" indent="0">
+              <a:buNone/>
+              <a:defRPr sz="1867">
                 <a:solidFill>
                   <a:schemeClr val="tx1">
                     <a:tint val="75000"/>
@@ -1004,9 +1008,9 @@
                 </a:solidFill>
               </a:defRPr>
             </a:lvl5pPr>
-            <a:lvl6pPr marL="2286000" indent="0">
-              <a:buNone/>
-              <a:defRPr sz="1400">
+            <a:lvl6pPr marL="3047924" indent="0">
+              <a:buNone/>
+              <a:defRPr sz="1867">
                 <a:solidFill>
                   <a:schemeClr val="tx1">
                     <a:tint val="75000"/>
@@ -1014,9 +1018,9 @@
                 </a:solidFill>
               </a:defRPr>
             </a:lvl6pPr>
-            <a:lvl7pPr marL="2743200" indent="0">
-              <a:buNone/>
-              <a:defRPr sz="1400">
+            <a:lvl7pPr marL="3657509" indent="0">
+              <a:buNone/>
+              <a:defRPr sz="1867">
                 <a:solidFill>
                   <a:schemeClr val="tx1">
                     <a:tint val="75000"/>
@@ -1024,9 +1028,9 @@
                 </a:solidFill>
               </a:defRPr>
             </a:lvl7pPr>
-            <a:lvl8pPr marL="3200400" indent="0">
-              <a:buNone/>
-              <a:defRPr sz="1400">
+            <a:lvl8pPr marL="4267093" indent="0">
+              <a:buNone/>
+              <a:defRPr sz="1867">
                 <a:solidFill>
                   <a:schemeClr val="tx1">
                     <a:tint val="75000"/>
@@ -1034,9 +1038,9 @@
                 </a:solidFill>
               </a:defRPr>
             </a:lvl8pPr>
-            <a:lvl9pPr marL="3657600" indent="0">
-              <a:buNone/>
-              <a:defRPr sz="1400">
+            <a:lvl9pPr marL="4876678" indent="0">
+              <a:buNone/>
+              <a:defRPr sz="1867">
                 <a:solidFill>
                   <a:schemeClr val="tx1">
                     <a:tint val="75000"/>
@@ -1048,7 +1052,7 @@
           <a:p>
             <a:pPr lvl="0"/>
             <a:r>
-              <a:rPr lang="en-US" altLang="zh-TW" smtClean="0"/>
+              <a:rPr lang="en-US" altLang="zh-TW"/>
               <a:t>Edit Master text styles</a:t>
             </a:r>
           </a:p>
@@ -1069,11 +1073,11 @@
           <a:bodyPr/>
           <a:lstStyle/>
           <a:p>
-            <a:fld id="{299965B1-26E6-4ED8-AF94-A287FCD7512A}" type="datetimeFigureOut">
-              <a:rPr lang="zh-TW" altLang="en-US" smtClean="0"/>
-              <a:t>2023/7/8</a:t>
+            <a:fld id="{18796ABB-A8F6-4FF0-B464-9BB49CF65F95}" type="datetimeFigureOut">
+              <a:rPr lang="en-US" smtClean="0"/>
+              <a:t>10/15/2026</a:t>
             </a:fld>
-            <a:endParaRPr lang="zh-TW" altLang="en-US"/>
+            <a:endParaRPr lang="en-US"/>
           </a:p>
         </p:txBody>
       </p:sp>
@@ -1092,7 +1096,7 @@
           <a:bodyPr/>
           <a:lstStyle/>
           <a:p>
-            <a:endParaRPr lang="zh-TW" altLang="en-US"/>
+            <a:endParaRPr lang="en-US"/>
           </a:p>
         </p:txBody>
       </p:sp>
@@ -1111,18 +1115,18 @@
           <a:bodyPr/>
           <a:lstStyle/>
           <a:p>
-            <a:fld id="{1F48CDF5-753B-4569-BFE2-DBE5D822F48C}" type="slidenum">
-              <a:rPr lang="zh-TW" altLang="en-US" smtClean="0"/>
+            <a:fld id="{4EEEE1B6-4C45-472A-8335-E1C61007D849}" type="slidenum">
+              <a:rPr lang="en-US" smtClean="0"/>
               <a:t>‹#›</a:t>
             </a:fld>
-            <a:endParaRPr lang="zh-TW" altLang="en-US"/>
+            <a:endParaRPr lang="en-US"/>
           </a:p>
         </p:txBody>
       </p:sp>
     </p:spTree>
     <p:extLst>
       <p:ext uri="{BB962C8B-B14F-4D97-AF65-F5344CB8AC3E}">
-        <p14:creationId xmlns:p14="http://schemas.microsoft.com/office/powerpoint/2010/main" val="3124476511"/>
+        <p14:creationId xmlns:p14="http://schemas.microsoft.com/office/powerpoint/2010/main" val="149666865"/>
       </p:ext>
     </p:extLst>
   </p:cSld>
@@ -1165,7 +1169,7 @@
           <a:lstStyle/>
           <a:p>
             <a:r>
-              <a:rPr lang="en-US" altLang="zh-TW" smtClean="0"/>
+              <a:rPr lang="en-US" altLang="zh-TW"/>
               <a:t>Click to edit Master title style</a:t>
             </a:r>
             <a:endParaRPr lang="zh-TW" altLang="en-US"/>
@@ -1184,7 +1188,7 @@
         </p:nvSpPr>
         <p:spPr>
           <a:xfrm>
-            <a:off x="609600" y="1600202"/>
+            <a:off x="609600" y="1600201"/>
             <a:ext cx="5384800" cy="4525963"/>
           </a:xfrm>
         </p:spPr>
@@ -1192,65 +1196,65 @@
           <a:bodyPr/>
           <a:lstStyle>
             <a:lvl1pPr>
-              <a:defRPr sz="2800"/>
+              <a:defRPr sz="3733"/>
             </a:lvl1pPr>
             <a:lvl2pPr>
-              <a:defRPr sz="2400"/>
+              <a:defRPr sz="3200"/>
             </a:lvl2pPr>
             <a:lvl3pPr>
-              <a:defRPr sz="2000"/>
+              <a:defRPr sz="2667"/>
             </a:lvl3pPr>
             <a:lvl4pPr>
-              <a:defRPr sz="1800"/>
+              <a:defRPr sz="2400"/>
             </a:lvl4pPr>
             <a:lvl5pPr>
-              <a:defRPr sz="1800"/>
+              <a:defRPr sz="2400"/>
             </a:lvl5pPr>
             <a:lvl6pPr>
-              <a:defRPr sz="1800"/>
+              <a:defRPr sz="2400"/>
             </a:lvl6pPr>
             <a:lvl7pPr>
-              <a:defRPr sz="1800"/>
+              <a:defRPr sz="2400"/>
             </a:lvl7pPr>
             <a:lvl8pPr>
-              <a:defRPr sz="1800"/>
+              <a:defRPr sz="2400"/>
             </a:lvl8pPr>
             <a:lvl9pPr>
-              <a:defRPr sz="1800"/>
+              <a:defRPr sz="2400"/>
             </a:lvl9pPr>
           </a:lstStyle>
           <a:p>
             <a:pPr lvl="0"/>
             <a:r>
-              <a:rPr lang="en-US" altLang="zh-TW" smtClean="0"/>
+              <a:rPr lang="en-US" altLang="zh-TW"/>
               <a:t>Edit Master text styles</a:t>
             </a:r>
           </a:p>
           <a:p>
             <a:pPr lvl="1"/>
             <a:r>
-              <a:rPr lang="en-US" altLang="zh-TW" smtClean="0"/>
+              <a:rPr lang="en-US" altLang="zh-TW"/>
               <a:t>Second level</a:t>
             </a:r>
           </a:p>
           <a:p>
             <a:pPr lvl="2"/>
             <a:r>
-              <a:rPr lang="en-US" altLang="zh-TW" smtClean="0"/>
+              <a:rPr lang="en-US" altLang="zh-TW"/>
               <a:t>Third level</a:t>
             </a:r>
           </a:p>
           <a:p>
             <a:pPr lvl="3"/>
             <a:r>
-              <a:rPr lang="en-US" altLang="zh-TW" smtClean="0"/>
+              <a:rPr lang="en-US" altLang="zh-TW"/>
               <a:t>Fourth level</a:t>
             </a:r>
           </a:p>
           <a:p>
             <a:pPr lvl="4"/>
             <a:r>
-              <a:rPr lang="en-US" altLang="zh-TW" smtClean="0"/>
+              <a:rPr lang="en-US" altLang="zh-TW"/>
               <a:t>Fifth level</a:t>
             </a:r>
             <a:endParaRPr lang="zh-TW" altLang="en-US"/>
@@ -1269,7 +1273,7 @@
         </p:nvSpPr>
         <p:spPr>
           <a:xfrm>
-            <a:off x="6197600" y="1600202"/>
+            <a:off x="6197600" y="1600201"/>
             <a:ext cx="5384800" cy="4525963"/>
           </a:xfrm>
         </p:spPr>
@@ -1277,65 +1281,65 @@
           <a:bodyPr/>
           <a:lstStyle>
             <a:lvl1pPr>
-              <a:defRPr sz="2800"/>
+              <a:defRPr sz="3733"/>
             </a:lvl1pPr>
             <a:lvl2pPr>
-              <a:defRPr sz="2400"/>
+              <a:defRPr sz="3200"/>
             </a:lvl2pPr>
             <a:lvl3pPr>
-              <a:defRPr sz="2000"/>
+              <a:defRPr sz="2667"/>
             </a:lvl3pPr>
             <a:lvl4pPr>
-              <a:defRPr sz="1800"/>
+              <a:defRPr sz="2400"/>
             </a:lvl4pPr>
             <a:lvl5pPr>
-              <a:defRPr sz="1800"/>
+              <a:defRPr sz="2400"/>
             </a:lvl5pPr>
             <a:lvl6pPr>
-              <a:defRPr sz="1800"/>
+              <a:defRPr sz="2400"/>
             </a:lvl6pPr>
             <a:lvl7pPr>
-              <a:defRPr sz="1800"/>
+              <a:defRPr sz="2400"/>
             </a:lvl7pPr>
             <a:lvl8pPr>
-              <a:defRPr sz="1800"/>
+              <a:defRPr sz="2400"/>
             </a:lvl8pPr>
             <a:lvl9pPr>
-              <a:defRPr sz="1800"/>
+              <a:defRPr sz="2400"/>
             </a:lvl9pPr>
           </a:lstStyle>
           <a:p>
             <a:pPr lvl="0"/>
             <a:r>
-              <a:rPr lang="en-US" altLang="zh-TW" smtClean="0"/>
+              <a:rPr lang="en-US" altLang="zh-TW"/>
               <a:t>Edit Master text styles</a:t>
             </a:r>
           </a:p>
           <a:p>
             <a:pPr lvl="1"/>
             <a:r>
-              <a:rPr lang="en-US" altLang="zh-TW" smtClean="0"/>
+              <a:rPr lang="en-US" altLang="zh-TW"/>
               <a:t>Second level</a:t>
             </a:r>
           </a:p>
           <a:p>
             <a:pPr lvl="2"/>
             <a:r>
-              <a:rPr lang="en-US" altLang="zh-TW" smtClean="0"/>
+              <a:rPr lang="en-US" altLang="zh-TW"/>
               <a:t>Third level</a:t>
             </a:r>
           </a:p>
           <a:p>
             <a:pPr lvl="3"/>
             <a:r>
-              <a:rPr lang="en-US" altLang="zh-TW" smtClean="0"/>
+              <a:rPr lang="en-US" altLang="zh-TW"/>
               <a:t>Fourth level</a:t>
             </a:r>
           </a:p>
           <a:p>
             <a:pPr lvl="4"/>
             <a:r>
-              <a:rPr lang="en-US" altLang="zh-TW" smtClean="0"/>
+              <a:rPr lang="en-US" altLang="zh-TW"/>
               <a:t>Fifth level</a:t>
             </a:r>
             <a:endParaRPr lang="zh-TW" altLang="en-US"/>
@@ -1357,11 +1361,11 @@
           <a:bodyPr/>
           <a:lstStyle/>
           <a:p>
-            <a:fld id="{299965B1-26E6-4ED8-AF94-A287FCD7512A}" type="datetimeFigureOut">
-              <a:rPr lang="zh-TW" altLang="en-US" smtClean="0"/>
-              <a:t>2023/7/8</a:t>
+            <a:fld id="{18796ABB-A8F6-4FF0-B464-9BB49CF65F95}" type="datetimeFigureOut">
+              <a:rPr lang="en-US" smtClean="0"/>
+              <a:t>10/15/2026</a:t>
             </a:fld>
-            <a:endParaRPr lang="zh-TW" altLang="en-US"/>
+            <a:endParaRPr lang="en-US"/>
           </a:p>
         </p:txBody>
       </p:sp>
@@ -1380,7 +1384,7 @@
           <a:bodyPr/>
           <a:lstStyle/>
           <a:p>
-            <a:endParaRPr lang="zh-TW" altLang="en-US"/>
+            <a:endParaRPr lang="en-US"/>
           </a:p>
         </p:txBody>
       </p:sp>
@@ -1399,18 +1403,18 @@
           <a:bodyPr/>
           <a:lstStyle/>
           <a:p>
-            <a:fld id="{1F48CDF5-753B-4569-BFE2-DBE5D822F48C}" type="slidenum">
-              <a:rPr lang="zh-TW" altLang="en-US" smtClean="0"/>
+            <a:fld id="{4EEEE1B6-4C45-472A-8335-E1C61007D849}" type="slidenum">
+              <a:rPr lang="en-US" smtClean="0"/>
               <a:t>‹#›</a:t>
             </a:fld>
-            <a:endParaRPr lang="zh-TW" altLang="en-US"/>
+            <a:endParaRPr lang="en-US"/>
           </a:p>
         </p:txBody>
       </p:sp>
     </p:spTree>
     <p:extLst>
       <p:ext uri="{BB962C8B-B14F-4D97-AF65-F5344CB8AC3E}">
-        <p14:creationId xmlns:p14="http://schemas.microsoft.com/office/powerpoint/2010/main" val="2797418132"/>
+        <p14:creationId xmlns:p14="http://schemas.microsoft.com/office/powerpoint/2010/main" val="1652323519"/>
       </p:ext>
     </p:extLst>
   </p:cSld>
@@ -1457,7 +1461,7 @@
           </a:lstStyle>
           <a:p>
             <a:r>
-              <a:rPr lang="en-US" altLang="zh-TW" smtClean="0"/>
+              <a:rPr lang="en-US" altLang="zh-TW"/>
               <a:t>Click to edit Master title style</a:t>
             </a:r>
             <a:endParaRPr lang="zh-TW" altLang="en-US"/>
@@ -1476,7 +1480,7 @@
         </p:nvSpPr>
         <p:spPr>
           <a:xfrm>
-            <a:off x="609600" y="1535114"/>
+            <a:off x="609600" y="1535113"/>
             <a:ext cx="5386917" cy="639763"/>
           </a:xfrm>
         </p:spPr>
@@ -1485,45 +1489,45 @@
           <a:lstStyle>
             <a:lvl1pPr marL="0" indent="0">
               <a:buNone/>
+              <a:defRPr sz="3200" b="1"/>
+            </a:lvl1pPr>
+            <a:lvl2pPr marL="609585" indent="0">
+              <a:buNone/>
+              <a:defRPr sz="2667" b="1"/>
+            </a:lvl2pPr>
+            <a:lvl3pPr marL="1219170" indent="0">
+              <a:buNone/>
               <a:defRPr sz="2400" b="1"/>
-            </a:lvl1pPr>
-            <a:lvl2pPr marL="457200" indent="0">
-              <a:buNone/>
-              <a:defRPr sz="2000" b="1"/>
-            </a:lvl2pPr>
-            <a:lvl3pPr marL="914400" indent="0">
-              <a:buNone/>
-              <a:defRPr sz="1800" b="1"/>
             </a:lvl3pPr>
-            <a:lvl4pPr marL="1371600" indent="0">
-              <a:buNone/>
-              <a:defRPr sz="1600" b="1"/>
+            <a:lvl4pPr marL="1828754" indent="0">
+              <a:buNone/>
+              <a:defRPr sz="2133" b="1"/>
             </a:lvl4pPr>
-            <a:lvl5pPr marL="1828800" indent="0">
-              <a:buNone/>
-              <a:defRPr sz="1600" b="1"/>
+            <a:lvl5pPr marL="2438339" indent="0">
+              <a:buNone/>
+              <a:defRPr sz="2133" b="1"/>
             </a:lvl5pPr>
-            <a:lvl6pPr marL="2286000" indent="0">
-              <a:buNone/>
-              <a:defRPr sz="1600" b="1"/>
+            <a:lvl6pPr marL="3047924" indent="0">
+              <a:buNone/>
+              <a:defRPr sz="2133" b="1"/>
             </a:lvl6pPr>
-            <a:lvl7pPr marL="2743200" indent="0">
-              <a:buNone/>
-              <a:defRPr sz="1600" b="1"/>
+            <a:lvl7pPr marL="3657509" indent="0">
+              <a:buNone/>
+              <a:defRPr sz="2133" b="1"/>
             </a:lvl7pPr>
-            <a:lvl8pPr marL="3200400" indent="0">
-              <a:buNone/>
-              <a:defRPr sz="1600" b="1"/>
+            <a:lvl8pPr marL="4267093" indent="0">
+              <a:buNone/>
+              <a:defRPr sz="2133" b="1"/>
             </a:lvl8pPr>
-            <a:lvl9pPr marL="3657600" indent="0">
-              <a:buNone/>
-              <a:defRPr sz="1600" b="1"/>
+            <a:lvl9pPr marL="4876678" indent="0">
+              <a:buNone/>
+              <a:defRPr sz="2133" b="1"/>
             </a:lvl9pPr>
           </a:lstStyle>
           <a:p>
             <a:pPr lvl="0"/>
             <a:r>
-              <a:rPr lang="en-US" altLang="zh-TW" smtClean="0"/>
+              <a:rPr lang="en-US" altLang="zh-TW"/>
               <a:t>Edit Master text styles</a:t>
             </a:r>
           </a:p>
@@ -1549,65 +1553,65 @@
           <a:bodyPr/>
           <a:lstStyle>
             <a:lvl1pPr>
-              <a:defRPr sz="2400"/>
+              <a:defRPr sz="3200"/>
             </a:lvl1pPr>
             <a:lvl2pPr>
-              <a:defRPr sz="2000"/>
+              <a:defRPr sz="2667"/>
             </a:lvl2pPr>
             <a:lvl3pPr>
-              <a:defRPr sz="1800"/>
+              <a:defRPr sz="2400"/>
             </a:lvl3pPr>
             <a:lvl4pPr>
-              <a:defRPr sz="1600"/>
+              <a:defRPr sz="2133"/>
             </a:lvl4pPr>
             <a:lvl5pPr>
-              <a:defRPr sz="1600"/>
+              <a:defRPr sz="2133"/>
             </a:lvl5pPr>
             <a:lvl6pPr>
-              <a:defRPr sz="1600"/>
+              <a:defRPr sz="2133"/>
             </a:lvl6pPr>
             <a:lvl7pPr>
-              <a:defRPr sz="1600"/>
+              <a:defRPr sz="2133"/>
             </a:lvl7pPr>
             <a:lvl8pPr>
-              <a:defRPr sz="1600"/>
+              <a:defRPr sz="2133"/>
             </a:lvl8pPr>
             <a:lvl9pPr>
-              <a:defRPr sz="1600"/>
+              <a:defRPr sz="2133"/>
             </a:lvl9pPr>
           </a:lstStyle>
           <a:p>
             <a:pPr lvl="0"/>
             <a:r>
-              <a:rPr lang="en-US" altLang="zh-TW" smtClean="0"/>
+              <a:rPr lang="en-US" altLang="zh-TW"/>
               <a:t>Edit Master text styles</a:t>
             </a:r>
           </a:p>
           <a:p>
             <a:pPr lvl="1"/>
             <a:r>
-              <a:rPr lang="en-US" altLang="zh-TW" smtClean="0"/>
+              <a:rPr lang="en-US" altLang="zh-TW"/>
               <a:t>Second level</a:t>
             </a:r>
           </a:p>
           <a:p>
             <a:pPr lvl="2"/>
             <a:r>
-              <a:rPr lang="en-US" altLang="zh-TW" smtClean="0"/>
+              <a:rPr lang="en-US" altLang="zh-TW"/>
               <a:t>Third level</a:t>
             </a:r>
           </a:p>
           <a:p>
             <a:pPr lvl="3"/>
             <a:r>
-              <a:rPr lang="en-US" altLang="zh-TW" smtClean="0"/>
+              <a:rPr lang="en-US" altLang="zh-TW"/>
               <a:t>Fourth level</a:t>
             </a:r>
           </a:p>
           <a:p>
             <a:pPr lvl="4"/>
             <a:r>
-              <a:rPr lang="en-US" altLang="zh-TW" smtClean="0"/>
+              <a:rPr lang="en-US" altLang="zh-TW"/>
               <a:t>Fifth level</a:t>
             </a:r>
             <a:endParaRPr lang="zh-TW" altLang="en-US"/>
@@ -1626,7 +1630,7 @@
         </p:nvSpPr>
         <p:spPr>
           <a:xfrm>
-            <a:off x="6193373" y="1535114"/>
+            <a:off x="6193372" y="1535113"/>
             <a:ext cx="5389033" cy="639763"/>
           </a:xfrm>
         </p:spPr>
@@ -1635,45 +1639,45 @@
           <a:lstStyle>
             <a:lvl1pPr marL="0" indent="0">
               <a:buNone/>
+              <a:defRPr sz="3200" b="1"/>
+            </a:lvl1pPr>
+            <a:lvl2pPr marL="609585" indent="0">
+              <a:buNone/>
+              <a:defRPr sz="2667" b="1"/>
+            </a:lvl2pPr>
+            <a:lvl3pPr marL="1219170" indent="0">
+              <a:buNone/>
               <a:defRPr sz="2400" b="1"/>
-            </a:lvl1pPr>
-            <a:lvl2pPr marL="457200" indent="0">
-              <a:buNone/>
-              <a:defRPr sz="2000" b="1"/>
-            </a:lvl2pPr>
-            <a:lvl3pPr marL="914400" indent="0">
-              <a:buNone/>
-              <a:defRPr sz="1800" b="1"/>
             </a:lvl3pPr>
-            <a:lvl4pPr marL="1371600" indent="0">
-              <a:buNone/>
-              <a:defRPr sz="1600" b="1"/>
+            <a:lvl4pPr marL="1828754" indent="0">
+              <a:buNone/>
+              <a:defRPr sz="2133" b="1"/>
             </a:lvl4pPr>
-            <a:lvl5pPr marL="1828800" indent="0">
-              <a:buNone/>
-              <a:defRPr sz="1600" b="1"/>
+            <a:lvl5pPr marL="2438339" indent="0">
+              <a:buNone/>
+              <a:defRPr sz="2133" b="1"/>
             </a:lvl5pPr>
-            <a:lvl6pPr marL="2286000" indent="0">
-              <a:buNone/>
-              <a:defRPr sz="1600" b="1"/>
+            <a:lvl6pPr marL="3047924" indent="0">
+              <a:buNone/>
+              <a:defRPr sz="2133" b="1"/>
             </a:lvl6pPr>
-            <a:lvl7pPr marL="2743200" indent="0">
-              <a:buNone/>
-              <a:defRPr sz="1600" b="1"/>
+            <a:lvl7pPr marL="3657509" indent="0">
+              <a:buNone/>
+              <a:defRPr sz="2133" b="1"/>
             </a:lvl7pPr>
-            <a:lvl8pPr marL="3200400" indent="0">
-              <a:buNone/>
-              <a:defRPr sz="1600" b="1"/>
+            <a:lvl8pPr marL="4267093" indent="0">
+              <a:buNone/>
+              <a:defRPr sz="2133" b="1"/>
             </a:lvl8pPr>
-            <a:lvl9pPr marL="3657600" indent="0">
-              <a:buNone/>
-              <a:defRPr sz="1600" b="1"/>
+            <a:lvl9pPr marL="4876678" indent="0">
+              <a:buNone/>
+              <a:defRPr sz="2133" b="1"/>
             </a:lvl9pPr>
           </a:lstStyle>
           <a:p>
             <a:pPr lvl="0"/>
             <a:r>
-              <a:rPr lang="en-US" altLang="zh-TW" smtClean="0"/>
+              <a:rPr lang="en-US" altLang="zh-TW"/>
               <a:t>Edit Master text styles</a:t>
             </a:r>
           </a:p>
@@ -1691,7 +1695,7 @@
         </p:nvSpPr>
         <p:spPr>
           <a:xfrm>
-            <a:off x="6193373" y="2174875"/>
+            <a:off x="6193372" y="2174875"/>
             <a:ext cx="5389033" cy="3951288"/>
           </a:xfrm>
         </p:spPr>
@@ -1699,65 +1703,65 @@
           <a:bodyPr/>
           <a:lstStyle>
             <a:lvl1pPr>
-              <a:defRPr sz="2400"/>
+              <a:defRPr sz="3200"/>
             </a:lvl1pPr>
             <a:lvl2pPr>
-              <a:defRPr sz="2000"/>
+              <a:defRPr sz="2667"/>
             </a:lvl2pPr>
             <a:lvl3pPr>
-              <a:defRPr sz="1800"/>
+              <a:defRPr sz="2400"/>
             </a:lvl3pPr>
             <a:lvl4pPr>
-              <a:defRPr sz="1600"/>
+              <a:defRPr sz="2133"/>
             </a:lvl4pPr>
             <a:lvl5pPr>
-              <a:defRPr sz="1600"/>
+              <a:defRPr sz="2133"/>
             </a:lvl5pPr>
             <a:lvl6pPr>
-              <a:defRPr sz="1600"/>
+              <a:defRPr sz="2133"/>
             </a:lvl6pPr>
             <a:lvl7pPr>
-              <a:defRPr sz="1600"/>
+              <a:defRPr sz="2133"/>
             </a:lvl7pPr>
             <a:lvl8pPr>
-              <a:defRPr sz="1600"/>
+              <a:defRPr sz="2133"/>
             </a:lvl8pPr>
             <a:lvl9pPr>
-              <a:defRPr sz="1600"/>
+              <a:defRPr sz="2133"/>
             </a:lvl9pPr>
           </a:lstStyle>
           <a:p>
             <a:pPr lvl="0"/>
             <a:r>
-              <a:rPr lang="en-US" altLang="zh-TW" smtClean="0"/>
+              <a:rPr lang="en-US" altLang="zh-TW"/>
               <a:t>Edit Master text styles</a:t>
             </a:r>
           </a:p>
           <a:p>
             <a:pPr lvl="1"/>
             <a:r>
-              <a:rPr lang="en-US" altLang="zh-TW" smtClean="0"/>
+              <a:rPr lang="en-US" altLang="zh-TW"/>
               <a:t>Second level</a:t>
             </a:r>
           </a:p>
           <a:p>
             <a:pPr lvl="2"/>
             <a:r>
-              <a:rPr lang="en-US" altLang="zh-TW" smtClean="0"/>
+              <a:rPr lang="en-US" altLang="zh-TW"/>
               <a:t>Third level</a:t>
             </a:r>
           </a:p>
           <a:p>
             <a:pPr lvl="3"/>
             <a:r>
-              <a:rPr lang="en-US" altLang="zh-TW" smtClean="0"/>
+              <a:rPr lang="en-US" altLang="zh-TW"/>
               <a:t>Fourth level</a:t>
             </a:r>
           </a:p>
           <a:p>
             <a:pPr lvl="4"/>
             <a:r>
-              <a:rPr lang="en-US" altLang="zh-TW" smtClean="0"/>
+              <a:rPr lang="en-US" altLang="zh-TW"/>
               <a:t>Fifth level</a:t>
             </a:r>
             <a:endParaRPr lang="zh-TW" altLang="en-US"/>
@@ -1779,11 +1783,11 @@
           <a:bodyPr/>
           <a:lstStyle/>
           <a:p>
-            <a:fld id="{299965B1-26E6-4ED8-AF94-A287FCD7512A}" type="datetimeFigureOut">
-              <a:rPr lang="zh-TW" altLang="en-US" smtClean="0"/>
-              <a:t>2023/7/8</a:t>
+            <a:fld id="{18796ABB-A8F6-4FF0-B464-9BB49CF65F95}" type="datetimeFigureOut">
+              <a:rPr lang="en-US" smtClean="0"/>
+              <a:t>10/15/2026</a:t>
             </a:fld>
-            <a:endParaRPr lang="zh-TW" altLang="en-US"/>
+            <a:endParaRPr lang="en-US"/>
           </a:p>
         </p:txBody>
       </p:sp>
@@ -1802,7 +1806,7 @@
           <a:bodyPr/>
           <a:lstStyle/>
           <a:p>
-            <a:endParaRPr lang="zh-TW" altLang="en-US"/>
+            <a:endParaRPr lang="en-US"/>
           </a:p>
         </p:txBody>
       </p:sp>
@@ -1821,18 +1825,18 @@
           <a:bodyPr/>
           <a:lstStyle/>
           <a:p>
-            <a:fld id="{1F48CDF5-753B-4569-BFE2-DBE5D822F48C}" type="slidenum">
-              <a:rPr lang="zh-TW" altLang="en-US" smtClean="0"/>
+            <a:fld id="{4EEEE1B6-4C45-472A-8335-E1C61007D849}" type="slidenum">
+              <a:rPr lang="en-US" smtClean="0"/>
               <a:t>‹#›</a:t>
             </a:fld>
-            <a:endParaRPr lang="zh-TW" altLang="en-US"/>
+            <a:endParaRPr lang="en-US"/>
           </a:p>
         </p:txBody>
       </p:sp>
     </p:spTree>
     <p:extLst>
       <p:ext uri="{BB962C8B-B14F-4D97-AF65-F5344CB8AC3E}">
-        <p14:creationId xmlns:p14="http://schemas.microsoft.com/office/powerpoint/2010/main" val="2916766629"/>
+        <p14:creationId xmlns:p14="http://schemas.microsoft.com/office/powerpoint/2010/main" val="530019921"/>
       </p:ext>
     </p:extLst>
   </p:cSld>
@@ -1875,7 +1879,7 @@
           <a:lstStyle/>
           <a:p>
             <a:r>
-              <a:rPr lang="en-US" altLang="zh-TW" smtClean="0"/>
+              <a:rPr lang="en-US" altLang="zh-TW"/>
               <a:t>Click to edit Master title style</a:t>
             </a:r>
             <a:endParaRPr lang="zh-TW" altLang="en-US"/>
@@ -1897,11 +1901,11 @@
           <a:bodyPr/>
           <a:lstStyle/>
           <a:p>
-            <a:fld id="{299965B1-26E6-4ED8-AF94-A287FCD7512A}" type="datetimeFigureOut">
-              <a:rPr lang="zh-TW" altLang="en-US" smtClean="0"/>
-              <a:t>2023/7/8</a:t>
+            <a:fld id="{18796ABB-A8F6-4FF0-B464-9BB49CF65F95}" type="datetimeFigureOut">
+              <a:rPr lang="en-US" smtClean="0"/>
+              <a:t>10/15/2026</a:t>
             </a:fld>
-            <a:endParaRPr lang="zh-TW" altLang="en-US"/>
+            <a:endParaRPr lang="en-US"/>
           </a:p>
         </p:txBody>
       </p:sp>
@@ -1920,7 +1924,7 @@
           <a:bodyPr/>
           <a:lstStyle/>
           <a:p>
-            <a:endParaRPr lang="zh-TW" altLang="en-US"/>
+            <a:endParaRPr lang="en-US"/>
           </a:p>
         </p:txBody>
       </p:sp>
@@ -1939,18 +1943,18 @@
           <a:bodyPr/>
           <a:lstStyle/>
           <a:p>
-            <a:fld id="{1F48CDF5-753B-4569-BFE2-DBE5D822F48C}" type="slidenum">
-              <a:rPr lang="zh-TW" altLang="en-US" smtClean="0"/>
+            <a:fld id="{4EEEE1B6-4C45-472A-8335-E1C61007D849}" type="slidenum">
+              <a:rPr lang="en-US" smtClean="0"/>
               <a:t>‹#›</a:t>
             </a:fld>
-            <a:endParaRPr lang="zh-TW" altLang="en-US"/>
+            <a:endParaRPr lang="en-US"/>
           </a:p>
         </p:txBody>
       </p:sp>
     </p:spTree>
     <p:extLst>
       <p:ext uri="{BB962C8B-B14F-4D97-AF65-F5344CB8AC3E}">
-        <p14:creationId xmlns:p14="http://schemas.microsoft.com/office/powerpoint/2010/main" val="1427453752"/>
+        <p14:creationId xmlns:p14="http://schemas.microsoft.com/office/powerpoint/2010/main" val="1564063937"/>
       </p:ext>
     </p:extLst>
   </p:cSld>
@@ -1992,11 +1996,11 @@
           <a:bodyPr/>
           <a:lstStyle/>
           <a:p>
-            <a:fld id="{299965B1-26E6-4ED8-AF94-A287FCD7512A}" type="datetimeFigureOut">
-              <a:rPr lang="zh-TW" altLang="en-US" smtClean="0"/>
-              <a:t>2023/7/8</a:t>
+            <a:fld id="{18796ABB-A8F6-4FF0-B464-9BB49CF65F95}" type="datetimeFigureOut">
+              <a:rPr lang="en-US" smtClean="0"/>
+              <a:t>10/15/2026</a:t>
             </a:fld>
-            <a:endParaRPr lang="zh-TW" altLang="en-US"/>
+            <a:endParaRPr lang="en-US"/>
           </a:p>
         </p:txBody>
       </p:sp>
@@ -2015,7 +2019,7 @@
           <a:bodyPr/>
           <a:lstStyle/>
           <a:p>
-            <a:endParaRPr lang="zh-TW" altLang="en-US"/>
+            <a:endParaRPr lang="en-US"/>
           </a:p>
         </p:txBody>
       </p:sp>
@@ -2034,18 +2038,18 @@
           <a:bodyPr/>
           <a:lstStyle/>
           <a:p>
-            <a:fld id="{1F48CDF5-753B-4569-BFE2-DBE5D822F48C}" type="slidenum">
-              <a:rPr lang="zh-TW" altLang="en-US" smtClean="0"/>
+            <a:fld id="{4EEEE1B6-4C45-472A-8335-E1C61007D849}" type="slidenum">
+              <a:rPr lang="en-US" smtClean="0"/>
               <a:t>‹#›</a:t>
             </a:fld>
-            <a:endParaRPr lang="zh-TW" altLang="en-US"/>
+            <a:endParaRPr lang="en-US"/>
           </a:p>
         </p:txBody>
       </p:sp>
     </p:spTree>
     <p:extLst>
       <p:ext uri="{BB962C8B-B14F-4D97-AF65-F5344CB8AC3E}">
-        <p14:creationId xmlns:p14="http://schemas.microsoft.com/office/powerpoint/2010/main" val="4057084081"/>
+        <p14:creationId xmlns:p14="http://schemas.microsoft.com/office/powerpoint/2010/main" val="2815904201"/>
       </p:ext>
     </p:extLst>
   </p:cSld>
@@ -2084,7 +2088,7 @@
         </p:nvSpPr>
         <p:spPr>
           <a:xfrm>
-            <a:off x="609605" y="273050"/>
+            <a:off x="609603" y="273049"/>
             <a:ext cx="4011084" cy="1162051"/>
           </a:xfrm>
         </p:spPr>
@@ -2092,12 +2096,12 @@
           <a:bodyPr anchor="b"/>
           <a:lstStyle>
             <a:lvl1pPr algn="l">
-              <a:defRPr sz="2000" b="1"/>
+              <a:defRPr sz="2667" b="1"/>
             </a:lvl1pPr>
           </a:lstStyle>
           <a:p>
             <a:r>
-              <a:rPr lang="en-US" altLang="zh-TW" smtClean="0"/>
+              <a:rPr lang="en-US" altLang="zh-TW"/>
               <a:t>Click to edit Master title style</a:t>
             </a:r>
             <a:endParaRPr lang="zh-TW" altLang="en-US"/>
@@ -2116,7 +2120,7 @@
         </p:nvSpPr>
         <p:spPr>
           <a:xfrm>
-            <a:off x="4766733" y="273054"/>
+            <a:off x="4766733" y="273053"/>
             <a:ext cx="6815667" cy="5853113"/>
           </a:xfrm>
         </p:spPr>
@@ -2124,65 +2128,65 @@
           <a:bodyPr/>
           <a:lstStyle>
             <a:lvl1pPr>
-              <a:defRPr sz="3200"/>
+              <a:defRPr sz="4267"/>
             </a:lvl1pPr>
             <a:lvl2pPr>
-              <a:defRPr sz="2800"/>
+              <a:defRPr sz="3733"/>
             </a:lvl2pPr>
             <a:lvl3pPr>
-              <a:defRPr sz="2400"/>
+              <a:defRPr sz="3200"/>
             </a:lvl3pPr>
             <a:lvl4pPr>
-              <a:defRPr sz="2000"/>
+              <a:defRPr sz="2667"/>
             </a:lvl4pPr>
             <a:lvl5pPr>
-              <a:defRPr sz="2000"/>
+              <a:defRPr sz="2667"/>
             </a:lvl5pPr>
             <a:lvl6pPr>
-              <a:defRPr sz="2000"/>
+              <a:defRPr sz="2667"/>
             </a:lvl6pPr>
             <a:lvl7pPr>
-              <a:defRPr sz="2000"/>
+              <a:defRPr sz="2667"/>
             </a:lvl7pPr>
             <a:lvl8pPr>
-              <a:defRPr sz="2000"/>
+              <a:defRPr sz="2667"/>
             </a:lvl8pPr>
             <a:lvl9pPr>
-              <a:defRPr sz="2000"/>
+              <a:defRPr sz="2667"/>
             </a:lvl9pPr>
           </a:lstStyle>
           <a:p>
             <a:pPr lvl="0"/>
             <a:r>
-              <a:rPr lang="en-US" altLang="zh-TW" smtClean="0"/>
+              <a:rPr lang="en-US" altLang="zh-TW"/>
               <a:t>Edit Master text styles</a:t>
             </a:r>
           </a:p>
           <a:p>
             <a:pPr lvl="1"/>
             <a:r>
-              <a:rPr lang="en-US" altLang="zh-TW" smtClean="0"/>
+              <a:rPr lang="en-US" altLang="zh-TW"/>
               <a:t>Second level</a:t>
             </a:r>
           </a:p>
           <a:p>
             <a:pPr lvl="2"/>
             <a:r>
-              <a:rPr lang="en-US" altLang="zh-TW" smtClean="0"/>
+              <a:rPr lang="en-US" altLang="zh-TW"/>
               <a:t>Third level</a:t>
             </a:r>
           </a:p>
           <a:p>
             <a:pPr lvl="3"/>
             <a:r>
-              <a:rPr lang="en-US" altLang="zh-TW" smtClean="0"/>
+              <a:rPr lang="en-US" altLang="zh-TW"/>
               <a:t>Fourth level</a:t>
             </a:r>
           </a:p>
           <a:p>
             <a:pPr lvl="4"/>
             <a:r>
-              <a:rPr lang="en-US" altLang="zh-TW" smtClean="0"/>
+              <a:rPr lang="en-US" altLang="zh-TW"/>
               <a:t>Fifth level</a:t>
             </a:r>
             <a:endParaRPr lang="zh-TW" altLang="en-US"/>
@@ -2201,7 +2205,7 @@
         </p:nvSpPr>
         <p:spPr>
           <a:xfrm>
-            <a:off x="609605" y="1435103"/>
+            <a:off x="609603" y="1435103"/>
             <a:ext cx="4011084" cy="4691063"/>
           </a:xfrm>
         </p:spPr>
@@ -2210,45 +2214,45 @@
           <a:lstStyle>
             <a:lvl1pPr marL="0" indent="0">
               <a:buNone/>
-              <a:defRPr sz="1400"/>
+              <a:defRPr sz="1867"/>
             </a:lvl1pPr>
-            <a:lvl2pPr marL="457200" indent="0">
+            <a:lvl2pPr marL="609585" indent="0">
+              <a:buNone/>
+              <a:defRPr sz="1600"/>
+            </a:lvl2pPr>
+            <a:lvl3pPr marL="1219170" indent="0">
+              <a:buNone/>
+              <a:defRPr sz="1333"/>
+            </a:lvl3pPr>
+            <a:lvl4pPr marL="1828754" indent="0">
               <a:buNone/>
               <a:defRPr sz="1200"/>
-            </a:lvl2pPr>
-            <a:lvl3pPr marL="914400" indent="0">
-              <a:buNone/>
-              <a:defRPr sz="1000"/>
-            </a:lvl3pPr>
-            <a:lvl4pPr marL="1371600" indent="0">
-              <a:buNone/>
-              <a:defRPr sz="900"/>
             </a:lvl4pPr>
-            <a:lvl5pPr marL="1828800" indent="0">
-              <a:buNone/>
-              <a:defRPr sz="900"/>
+            <a:lvl5pPr marL="2438339" indent="0">
+              <a:buNone/>
+              <a:defRPr sz="1200"/>
             </a:lvl5pPr>
-            <a:lvl6pPr marL="2286000" indent="0">
-              <a:buNone/>
-              <a:defRPr sz="900"/>
+            <a:lvl6pPr marL="3047924" indent="0">
+              <a:buNone/>
+              <a:defRPr sz="1200"/>
             </a:lvl6pPr>
-            <a:lvl7pPr marL="2743200" indent="0">
-              <a:buNone/>
-              <a:defRPr sz="900"/>
+            <a:lvl7pPr marL="3657509" indent="0">
+              <a:buNone/>
+              <a:defRPr sz="1200"/>
             </a:lvl7pPr>
-            <a:lvl8pPr marL="3200400" indent="0">
-              <a:buNone/>
-              <a:defRPr sz="900"/>
+            <a:lvl8pPr marL="4267093" indent="0">
+              <a:buNone/>
+              <a:defRPr sz="1200"/>
             </a:lvl8pPr>
-            <a:lvl9pPr marL="3657600" indent="0">
-              <a:buNone/>
-              <a:defRPr sz="900"/>
+            <a:lvl9pPr marL="4876678" indent="0">
+              <a:buNone/>
+              <a:defRPr sz="1200"/>
             </a:lvl9pPr>
           </a:lstStyle>
           <a:p>
             <a:pPr lvl="0"/>
             <a:r>
-              <a:rPr lang="en-US" altLang="zh-TW" smtClean="0"/>
+              <a:rPr lang="en-US" altLang="zh-TW"/>
               <a:t>Edit Master text styles</a:t>
             </a:r>
           </a:p>
@@ -2269,11 +2273,11 @@
           <a:bodyPr/>
           <a:lstStyle/>
           <a:p>
-            <a:fld id="{299965B1-26E6-4ED8-AF94-A287FCD7512A}" type="datetimeFigureOut">
-              <a:rPr lang="zh-TW" altLang="en-US" smtClean="0"/>
-              <a:t>2023/7/8</a:t>
+            <a:fld id="{18796ABB-A8F6-4FF0-B464-9BB49CF65F95}" type="datetimeFigureOut">
+              <a:rPr lang="en-US" smtClean="0"/>
+              <a:t>10/15/2026</a:t>
             </a:fld>
-            <a:endParaRPr lang="zh-TW" altLang="en-US"/>
+            <a:endParaRPr lang="en-US"/>
           </a:p>
         </p:txBody>
       </p:sp>
@@ -2292,7 +2296,7 @@
           <a:bodyPr/>
           <a:lstStyle/>
           <a:p>
-            <a:endParaRPr lang="zh-TW" altLang="en-US"/>
+            <a:endParaRPr lang="en-US"/>
           </a:p>
         </p:txBody>
       </p:sp>
@@ -2311,18 +2315,18 @@
           <a:bodyPr/>
           <a:lstStyle/>
           <a:p>
-            <a:fld id="{1F48CDF5-753B-4569-BFE2-DBE5D822F48C}" type="slidenum">
-              <a:rPr lang="zh-TW" altLang="en-US" smtClean="0"/>
+            <a:fld id="{4EEEE1B6-4C45-472A-8335-E1C61007D849}" type="slidenum">
+              <a:rPr lang="en-US" smtClean="0"/>
               <a:t>‹#›</a:t>
             </a:fld>
-            <a:endParaRPr lang="zh-TW" altLang="en-US"/>
+            <a:endParaRPr lang="en-US"/>
           </a:p>
         </p:txBody>
       </p:sp>
     </p:spTree>
     <p:extLst>
       <p:ext uri="{BB962C8B-B14F-4D97-AF65-F5344CB8AC3E}">
-        <p14:creationId xmlns:p14="http://schemas.microsoft.com/office/powerpoint/2010/main" val="2201425056"/>
+        <p14:creationId xmlns:p14="http://schemas.microsoft.com/office/powerpoint/2010/main" val="3355067258"/>
       </p:ext>
     </p:extLst>
   </p:cSld>
@@ -2361,7 +2365,7 @@
         </p:nvSpPr>
         <p:spPr>
           <a:xfrm>
-            <a:off x="2389717" y="4800602"/>
+            <a:off x="2389717" y="4800601"/>
             <a:ext cx="7315200" cy="566739"/>
           </a:xfrm>
         </p:spPr>
@@ -2369,12 +2373,12 @@
           <a:bodyPr anchor="b"/>
           <a:lstStyle>
             <a:lvl1pPr algn="l">
-              <a:defRPr sz="2000" b="1"/>
+              <a:defRPr sz="2667" b="1"/>
             </a:lvl1pPr>
           </a:lstStyle>
           <a:p>
             <a:r>
-              <a:rPr lang="en-US" altLang="zh-TW" smtClean="0"/>
+              <a:rPr lang="en-US" altLang="zh-TW"/>
               <a:t>Click to edit Master title style</a:t>
             </a:r>
             <a:endParaRPr lang="zh-TW" altLang="en-US"/>
@@ -2402,44 +2406,44 @@
           <a:lstStyle>
             <a:lvl1pPr marL="0" indent="0">
               <a:buNone/>
+              <a:defRPr sz="4267"/>
+            </a:lvl1pPr>
+            <a:lvl2pPr marL="609585" indent="0">
+              <a:buNone/>
+              <a:defRPr sz="3733"/>
+            </a:lvl2pPr>
+            <a:lvl3pPr marL="1219170" indent="0">
+              <a:buNone/>
               <a:defRPr sz="3200"/>
-            </a:lvl1pPr>
-            <a:lvl2pPr marL="457200" indent="0">
-              <a:buNone/>
-              <a:defRPr sz="2800"/>
-            </a:lvl2pPr>
-            <a:lvl3pPr marL="914400" indent="0">
-              <a:buNone/>
-              <a:defRPr sz="2400"/>
             </a:lvl3pPr>
-            <a:lvl4pPr marL="1371600" indent="0">
-              <a:buNone/>
-              <a:defRPr sz="2000"/>
+            <a:lvl4pPr marL="1828754" indent="0">
+              <a:buNone/>
+              <a:defRPr sz="2667"/>
             </a:lvl4pPr>
-            <a:lvl5pPr marL="1828800" indent="0">
-              <a:buNone/>
-              <a:defRPr sz="2000"/>
+            <a:lvl5pPr marL="2438339" indent="0">
+              <a:buNone/>
+              <a:defRPr sz="2667"/>
             </a:lvl5pPr>
-            <a:lvl6pPr marL="2286000" indent="0">
-              <a:buNone/>
-              <a:defRPr sz="2000"/>
+            <a:lvl6pPr marL="3047924" indent="0">
+              <a:buNone/>
+              <a:defRPr sz="2667"/>
             </a:lvl6pPr>
-            <a:lvl7pPr marL="2743200" indent="0">
-              <a:buNone/>
-              <a:defRPr sz="2000"/>
+            <a:lvl7pPr marL="3657509" indent="0">
+              <a:buNone/>
+              <a:defRPr sz="2667"/>
             </a:lvl7pPr>
-            <a:lvl8pPr marL="3200400" indent="0">
-              <a:buNone/>
-              <a:defRPr sz="2000"/>
+            <a:lvl8pPr marL="4267093" indent="0">
+              <a:buNone/>
+              <a:defRPr sz="2667"/>
             </a:lvl8pPr>
-            <a:lvl9pPr marL="3657600" indent="0">
-              <a:buNone/>
-              <a:defRPr sz="2000"/>
+            <a:lvl9pPr marL="4876678" indent="0">
+              <a:buNone/>
+              <a:defRPr sz="2667"/>
             </a:lvl9pPr>
           </a:lstStyle>
           <a:p>
             <a:r>
-              <a:rPr lang="en-US" altLang="zh-TW" smtClean="0"/>
+              <a:rPr lang="en-US" altLang="zh-TW"/>
               <a:t>Click icon to add picture</a:t>
             </a:r>
             <a:endParaRPr lang="zh-TW" altLang="en-US"/>
@@ -2458,7 +2462,7 @@
         </p:nvSpPr>
         <p:spPr>
           <a:xfrm>
-            <a:off x="2389717" y="5367340"/>
+            <a:off x="2389717" y="5367339"/>
             <a:ext cx="7315200" cy="804863"/>
           </a:xfrm>
         </p:spPr>
@@ -2467,45 +2471,45 @@
           <a:lstStyle>
             <a:lvl1pPr marL="0" indent="0">
               <a:buNone/>
-              <a:defRPr sz="1400"/>
+              <a:defRPr sz="1867"/>
             </a:lvl1pPr>
-            <a:lvl2pPr marL="457200" indent="0">
+            <a:lvl2pPr marL="609585" indent="0">
+              <a:buNone/>
+              <a:defRPr sz="1600"/>
+            </a:lvl2pPr>
+            <a:lvl3pPr marL="1219170" indent="0">
+              <a:buNone/>
+              <a:defRPr sz="1333"/>
+            </a:lvl3pPr>
+            <a:lvl4pPr marL="1828754" indent="0">
               <a:buNone/>
               <a:defRPr sz="1200"/>
-            </a:lvl2pPr>
-            <a:lvl3pPr marL="914400" indent="0">
-              <a:buNone/>
-              <a:defRPr sz="1000"/>
-            </a:lvl3pPr>
-            <a:lvl4pPr marL="1371600" indent="0">
-              <a:buNone/>
-              <a:defRPr sz="900"/>
             </a:lvl4pPr>
-            <a:lvl5pPr marL="1828800" indent="0">
-              <a:buNone/>
-              <a:defRPr sz="900"/>
+            <a:lvl5pPr marL="2438339" indent="0">
+              <a:buNone/>
+              <a:defRPr sz="1200"/>
             </a:lvl5pPr>
-            <a:lvl6pPr marL="2286000" indent="0">
-              <a:buNone/>
-              <a:defRPr sz="900"/>
+            <a:lvl6pPr marL="3047924" indent="0">
+              <a:buNone/>
+              <a:defRPr sz="1200"/>
             </a:lvl6pPr>
-            <a:lvl7pPr marL="2743200" indent="0">
-              <a:buNone/>
-              <a:defRPr sz="900"/>
+            <a:lvl7pPr marL="3657509" indent="0">
+              <a:buNone/>
+              <a:defRPr sz="1200"/>
             </a:lvl7pPr>
-            <a:lvl8pPr marL="3200400" indent="0">
-              <a:buNone/>
-              <a:defRPr sz="900"/>
+            <a:lvl8pPr marL="4267093" indent="0">
+              <a:buNone/>
+              <a:defRPr sz="1200"/>
             </a:lvl8pPr>
-            <a:lvl9pPr marL="3657600" indent="0">
-              <a:buNone/>
-              <a:defRPr sz="900"/>
+            <a:lvl9pPr marL="4876678" indent="0">
+              <a:buNone/>
+              <a:defRPr sz="1200"/>
             </a:lvl9pPr>
           </a:lstStyle>
           <a:p>
             <a:pPr lvl="0"/>
             <a:r>
-              <a:rPr lang="en-US" altLang="zh-TW" smtClean="0"/>
+              <a:rPr lang="en-US" altLang="zh-TW"/>
               <a:t>Edit Master text styles</a:t>
             </a:r>
           </a:p>
@@ -2526,11 +2530,11 @@
           <a:bodyPr/>
           <a:lstStyle/>
           <a:p>
-            <a:fld id="{299965B1-26E6-4ED8-AF94-A287FCD7512A}" type="datetimeFigureOut">
-              <a:rPr lang="zh-TW" altLang="en-US" smtClean="0"/>
-              <a:t>2023/7/8</a:t>
+            <a:fld id="{18796ABB-A8F6-4FF0-B464-9BB49CF65F95}" type="datetimeFigureOut">
+              <a:rPr lang="en-US" smtClean="0"/>
+              <a:t>10/15/2026</a:t>
             </a:fld>
-            <a:endParaRPr lang="zh-TW" altLang="en-US"/>
+            <a:endParaRPr lang="en-US"/>
           </a:p>
         </p:txBody>
       </p:sp>
@@ -2549,7 +2553,7 @@
           <a:bodyPr/>
           <a:lstStyle/>
           <a:p>
-            <a:endParaRPr lang="zh-TW" altLang="en-US"/>
+            <a:endParaRPr lang="en-US"/>
           </a:p>
         </p:txBody>
       </p:sp>
@@ -2568,18 +2572,18 @@
           <a:bodyPr/>
           <a:lstStyle/>
           <a:p>
-            <a:fld id="{1F48CDF5-753B-4569-BFE2-DBE5D822F48C}" type="slidenum">
-              <a:rPr lang="zh-TW" altLang="en-US" smtClean="0"/>
+            <a:fld id="{4EEEE1B6-4C45-472A-8335-E1C61007D849}" type="slidenum">
+              <a:rPr lang="en-US" smtClean="0"/>
               <a:t>‹#›</a:t>
             </a:fld>
-            <a:endParaRPr lang="zh-TW" altLang="en-US"/>
+            <a:endParaRPr lang="en-US"/>
           </a:p>
         </p:txBody>
       </p:sp>
     </p:spTree>
     <p:extLst>
       <p:ext uri="{BB962C8B-B14F-4D97-AF65-F5344CB8AC3E}">
-        <p14:creationId xmlns:p14="http://schemas.microsoft.com/office/powerpoint/2010/main" val="3134902396"/>
+        <p14:creationId xmlns:p14="http://schemas.microsoft.com/office/powerpoint/2010/main" val="3890812255"/>
       </p:ext>
     </p:extLst>
   </p:cSld>
@@ -2594,11 +2598,11 @@
   <p:cSld>
     <p:bg>
       <p:bgPr>
-        <a:blipFill dpi="0" rotWithShape="1">
-          <a:blip r:embed="rId13"/>
-          <a:srcRect/>
-          <a:tile tx="0" ty="0" sx="100000" sy="100000" flip="none" algn="tl"/>
-        </a:blipFill>
+        <a:solidFill>
+          <a:schemeClr val="accent3">
+            <a:lumMod val="50000"/>
+          </a:schemeClr>
+        </a:solidFill>
         <a:effectLst/>
       </p:bgPr>
     </p:bg>
@@ -2642,10 +2646,9 @@
           <a:lstStyle/>
           <a:p>
             <a:r>
-              <a:rPr lang="zh-TW" altLang="en-US" smtClean="0"/>
+              <a:rPr lang="zh-TW" altLang="en-US"/>
               <a:t>按一下以編輯母片標題樣式</a:t>
             </a:r>
-            <a:endParaRPr lang="zh-TW" altLang="en-US"/>
           </a:p>
         </p:txBody>
       </p:sp>
@@ -2661,7 +2664,7 @@
         </p:nvSpPr>
         <p:spPr>
           <a:xfrm>
-            <a:off x="609600" y="1600202"/>
+            <a:off x="609600" y="1600201"/>
             <a:ext cx="10972800" cy="4525963"/>
           </a:xfrm>
           <a:prstGeom prst="rect">
@@ -2676,38 +2679,37 @@
           <a:p>
             <a:pPr lvl="0"/>
             <a:r>
-              <a:rPr lang="zh-TW" altLang="en-US" smtClean="0"/>
+              <a:rPr lang="zh-TW" altLang="en-US"/>
               <a:t>按一下以編輯母片文字樣式</a:t>
             </a:r>
           </a:p>
           <a:p>
             <a:pPr lvl="1"/>
             <a:r>
-              <a:rPr lang="zh-TW" altLang="en-US" smtClean="0"/>
+              <a:rPr lang="zh-TW" altLang="en-US"/>
               <a:t>第二層</a:t>
             </a:r>
           </a:p>
           <a:p>
             <a:pPr lvl="2"/>
             <a:r>
-              <a:rPr lang="zh-TW" altLang="en-US" smtClean="0"/>
+              <a:rPr lang="zh-TW" altLang="en-US"/>
               <a:t>第三層</a:t>
             </a:r>
           </a:p>
           <a:p>
             <a:pPr lvl="3"/>
             <a:r>
-              <a:rPr lang="zh-TW" altLang="en-US" smtClean="0"/>
+              <a:rPr lang="zh-TW" altLang="en-US"/>
               <a:t>第四層</a:t>
             </a:r>
           </a:p>
           <a:p>
             <a:pPr lvl="4"/>
             <a:r>
-              <a:rPr lang="zh-TW" altLang="en-US" smtClean="0"/>
+              <a:rPr lang="zh-TW" altLang="en-US"/>
               <a:t>第五層</a:t>
             </a:r>
-            <a:endParaRPr lang="zh-TW" altLang="en-US"/>
           </a:p>
         </p:txBody>
       </p:sp>
@@ -2723,7 +2725,7 @@
         </p:nvSpPr>
         <p:spPr>
           <a:xfrm>
-            <a:off x="609600" y="6356353"/>
+            <a:off x="609600" y="6356352"/>
             <a:ext cx="2844800" cy="365125"/>
           </a:xfrm>
           <a:prstGeom prst="rect">
@@ -2734,7 +2736,7 @@
           <a:bodyPr vert="horz" lIns="91440" tIns="45720" rIns="91440" bIns="45720" rtlCol="0" anchor="ctr"/>
           <a:lstStyle>
             <a:lvl1pPr algn="l">
-              <a:defRPr sz="1200">
+              <a:defRPr sz="1600">
                 <a:solidFill>
                   <a:schemeClr val="tx1">
                     <a:tint val="75000"/>
@@ -2744,11 +2746,11 @@
             </a:lvl1pPr>
           </a:lstStyle>
           <a:p>
-            <a:fld id="{299965B1-26E6-4ED8-AF94-A287FCD7512A}" type="datetimeFigureOut">
-              <a:rPr lang="zh-TW" altLang="en-US" smtClean="0"/>
-              <a:t>2023/7/8</a:t>
+            <a:fld id="{18796ABB-A8F6-4FF0-B464-9BB49CF65F95}" type="datetimeFigureOut">
+              <a:rPr lang="en-US" smtClean="0"/>
+              <a:t>10/15/2026</a:t>
             </a:fld>
-            <a:endParaRPr lang="zh-TW" altLang="en-US"/>
+            <a:endParaRPr lang="en-US"/>
           </a:p>
         </p:txBody>
       </p:sp>
@@ -2764,7 +2766,7 @@
         </p:nvSpPr>
         <p:spPr>
           <a:xfrm>
-            <a:off x="4165600" y="6356353"/>
+            <a:off x="4165600" y="6356352"/>
             <a:ext cx="3860800" cy="365125"/>
           </a:xfrm>
           <a:prstGeom prst="rect">
@@ -2775,7 +2777,7 @@
           <a:bodyPr vert="horz" lIns="91440" tIns="45720" rIns="91440" bIns="45720" rtlCol="0" anchor="ctr"/>
           <a:lstStyle>
             <a:lvl1pPr algn="ctr">
-              <a:defRPr sz="1200">
+              <a:defRPr sz="1600">
                 <a:solidFill>
                   <a:schemeClr val="tx1">
                     <a:tint val="75000"/>
@@ -2785,7 +2787,7 @@
             </a:lvl1pPr>
           </a:lstStyle>
           <a:p>
-            <a:endParaRPr lang="zh-TW" altLang="en-US"/>
+            <a:endParaRPr lang="en-US"/>
           </a:p>
         </p:txBody>
       </p:sp>
@@ -2801,7 +2803,7 @@
         </p:nvSpPr>
         <p:spPr>
           <a:xfrm>
-            <a:off x="8737600" y="6356353"/>
+            <a:off x="8737600" y="6356352"/>
             <a:ext cx="2844800" cy="365125"/>
           </a:xfrm>
           <a:prstGeom prst="rect">
@@ -2812,7 +2814,7 @@
           <a:bodyPr vert="horz" lIns="91440" tIns="45720" rIns="91440" bIns="45720" rtlCol="0" anchor="ctr"/>
           <a:lstStyle>
             <a:lvl1pPr algn="r">
-              <a:defRPr sz="1200">
+              <a:defRPr sz="1600">
                 <a:solidFill>
                   <a:schemeClr val="tx1">
                     <a:tint val="75000"/>
@@ -2822,43 +2824,43 @@
             </a:lvl1pPr>
           </a:lstStyle>
           <a:p>
-            <a:fld id="{1F48CDF5-753B-4569-BFE2-DBE5D822F48C}" type="slidenum">
-              <a:rPr lang="zh-TW" altLang="en-US" smtClean="0"/>
+            <a:fld id="{4EEEE1B6-4C45-472A-8335-E1C61007D849}" type="slidenum">
+              <a:rPr lang="en-US" smtClean="0"/>
               <a:t>‹#›</a:t>
             </a:fld>
-            <a:endParaRPr lang="zh-TW" altLang="en-US"/>
+            <a:endParaRPr lang="en-US"/>
           </a:p>
         </p:txBody>
       </p:sp>
     </p:spTree>
     <p:extLst>
       <p:ext uri="{BB962C8B-B14F-4D97-AF65-F5344CB8AC3E}">
-        <p14:creationId xmlns:p14="http://schemas.microsoft.com/office/powerpoint/2010/main" val="896417456"/>
+        <p14:creationId xmlns:p14="http://schemas.microsoft.com/office/powerpoint/2010/main" val="1109409888"/>
       </p:ext>
     </p:extLst>
   </p:cSld>
   <p:clrMap bg1="lt1" tx1="dk1" bg2="lt2" tx2="dk2" accent1="accent1" accent2="accent2" accent3="accent3" accent4="accent4" accent5="accent5" accent6="accent6" hlink="hlink" folHlink="folHlink"/>
   <p:sldLayoutIdLst>
-    <p:sldLayoutId id="2147483673" r:id="rId1"/>
-    <p:sldLayoutId id="2147483674" r:id="rId2"/>
-    <p:sldLayoutId id="2147483675" r:id="rId3"/>
-    <p:sldLayoutId id="2147483676" r:id="rId4"/>
-    <p:sldLayoutId id="2147483677" r:id="rId5"/>
-    <p:sldLayoutId id="2147483678" r:id="rId6"/>
-    <p:sldLayoutId id="2147483679" r:id="rId7"/>
-    <p:sldLayoutId id="2147483680" r:id="rId8"/>
-    <p:sldLayoutId id="2147483681" r:id="rId9"/>
-    <p:sldLayoutId id="2147483682" r:id="rId10"/>
-    <p:sldLayoutId id="2147483683" r:id="rId11"/>
+    <p:sldLayoutId id="2147483661" r:id="rId1"/>
+    <p:sldLayoutId id="2147483662" r:id="rId2"/>
+    <p:sldLayoutId id="2147483663" r:id="rId3"/>
+    <p:sldLayoutId id="2147483664" r:id="rId4"/>
+    <p:sldLayoutId id="2147483665" r:id="rId5"/>
+    <p:sldLayoutId id="2147483666" r:id="rId6"/>
+    <p:sldLayoutId id="2147483667" r:id="rId7"/>
+    <p:sldLayoutId id="2147483668" r:id="rId8"/>
+    <p:sldLayoutId id="2147483669" r:id="rId9"/>
+    <p:sldLayoutId id="2147483670" r:id="rId10"/>
+    <p:sldLayoutId id="2147483671" r:id="rId11"/>
   </p:sldLayoutIdLst>
   <p:txStyles>
     <p:titleStyle>
-      <a:lvl1pPr algn="ctr" defTabSz="914400" rtl="0" eaLnBrk="1" latinLnBrk="0" hangingPunct="1">
+      <a:lvl1pPr algn="ctr" defTabSz="1219170" rtl="0" eaLnBrk="1" latinLnBrk="0" hangingPunct="1">
         <a:spcBef>
           <a:spcPct val="0"/>
         </a:spcBef>
         <a:buNone/>
-        <a:defRPr sz="4400" kern="1200">
+        <a:defRPr sz="5867" kern="1200">
           <a:solidFill>
             <a:schemeClr val="tx1"/>
           </a:solidFill>
@@ -2869,7 +2871,37 @@
       </a:lvl1pPr>
     </p:titleStyle>
     <p:bodyStyle>
-      <a:lvl1pPr marL="342900" indent="-342900" algn="l" defTabSz="914400" rtl="0" eaLnBrk="1" latinLnBrk="0" hangingPunct="1">
+      <a:lvl1pPr marL="457189" indent="-457189" algn="l" defTabSz="1219170" rtl="0" eaLnBrk="1" latinLnBrk="0" hangingPunct="1">
+        <a:spcBef>
+          <a:spcPct val="20000"/>
+        </a:spcBef>
+        <a:buFont typeface="Arial" panose="02080604020202020204" pitchFamily="34" charset="0"/>
+        <a:buChar char="•"/>
+        <a:defRPr sz="4267" kern="1200">
+          <a:solidFill>
+            <a:schemeClr val="tx1"/>
+          </a:solidFill>
+          <a:latin typeface="+mn-lt"/>
+          <a:ea typeface="+mn-ea"/>
+          <a:cs typeface="+mn-cs"/>
+        </a:defRPr>
+      </a:lvl1pPr>
+      <a:lvl2pPr marL="990575" indent="-380990" algn="l" defTabSz="1219170" rtl="0" eaLnBrk="1" latinLnBrk="0" hangingPunct="1">
+        <a:spcBef>
+          <a:spcPct val="20000"/>
+        </a:spcBef>
+        <a:buFont typeface="Arial" panose="02080604020202020204" pitchFamily="34" charset="0"/>
+        <a:buChar char="–"/>
+        <a:defRPr sz="3733" kern="1200">
+          <a:solidFill>
+            <a:schemeClr val="tx1"/>
+          </a:solidFill>
+          <a:latin typeface="+mn-lt"/>
+          <a:ea typeface="+mn-ea"/>
+          <a:cs typeface="+mn-cs"/>
+        </a:defRPr>
+      </a:lvl2pPr>
+      <a:lvl3pPr marL="1523962" indent="-304792" algn="l" defTabSz="1219170" rtl="0" eaLnBrk="1" latinLnBrk="0" hangingPunct="1">
         <a:spcBef>
           <a:spcPct val="20000"/>
         </a:spcBef>
@@ -2883,44 +2915,14 @@
           <a:ea typeface="+mn-ea"/>
           <a:cs typeface="+mn-cs"/>
         </a:defRPr>
-      </a:lvl1pPr>
-      <a:lvl2pPr marL="742950" indent="-285750" algn="l" defTabSz="914400" rtl="0" eaLnBrk="1" latinLnBrk="0" hangingPunct="1">
+      </a:lvl3pPr>
+      <a:lvl4pPr marL="2133547" indent="-304792" algn="l" defTabSz="1219170" rtl="0" eaLnBrk="1" latinLnBrk="0" hangingPunct="1">
         <a:spcBef>
           <a:spcPct val="20000"/>
         </a:spcBef>
         <a:buFont typeface="Arial" panose="02080604020202020204" pitchFamily="34" charset="0"/>
         <a:buChar char="–"/>
-        <a:defRPr sz="2800" kern="1200">
-          <a:solidFill>
-            <a:schemeClr val="tx1"/>
-          </a:solidFill>
-          <a:latin typeface="+mn-lt"/>
-          <a:ea typeface="+mn-ea"/>
-          <a:cs typeface="+mn-cs"/>
-        </a:defRPr>
-      </a:lvl2pPr>
-      <a:lvl3pPr marL="1143000" indent="-228600" algn="l" defTabSz="914400" rtl="0" eaLnBrk="1" latinLnBrk="0" hangingPunct="1">
-        <a:spcBef>
-          <a:spcPct val="20000"/>
-        </a:spcBef>
-        <a:buFont typeface="Arial" panose="02080604020202020204" pitchFamily="34" charset="0"/>
-        <a:buChar char="•"/>
-        <a:defRPr sz="2400" kern="1200">
-          <a:solidFill>
-            <a:schemeClr val="tx1"/>
-          </a:solidFill>
-          <a:latin typeface="+mn-lt"/>
-          <a:ea typeface="+mn-ea"/>
-          <a:cs typeface="+mn-cs"/>
-        </a:defRPr>
-      </a:lvl3pPr>
-      <a:lvl4pPr marL="1600200" indent="-228600" algn="l" defTabSz="914400" rtl="0" eaLnBrk="1" latinLnBrk="0" hangingPunct="1">
-        <a:spcBef>
-          <a:spcPct val="20000"/>
-        </a:spcBef>
-        <a:buFont typeface="Arial" panose="02080604020202020204" pitchFamily="34" charset="0"/>
-        <a:buChar char="–"/>
-        <a:defRPr sz="2000" kern="1200">
+        <a:defRPr sz="2667" kern="1200">
           <a:solidFill>
             <a:schemeClr val="tx1"/>
           </a:solidFill>
@@ -2929,13 +2931,13 @@
           <a:cs typeface="+mn-cs"/>
         </a:defRPr>
       </a:lvl4pPr>
-      <a:lvl5pPr marL="2057400" indent="-228600" algn="l" defTabSz="914400" rtl="0" eaLnBrk="1" latinLnBrk="0" hangingPunct="1">
+      <a:lvl5pPr marL="2743131" indent="-304792" algn="l" defTabSz="1219170" rtl="0" eaLnBrk="1" latinLnBrk="0" hangingPunct="1">
         <a:spcBef>
           <a:spcPct val="20000"/>
         </a:spcBef>
         <a:buFont typeface="Arial" panose="02080604020202020204" pitchFamily="34" charset="0"/>
         <a:buChar char="»"/>
-        <a:defRPr sz="2000" kern="1200">
+        <a:defRPr sz="2667" kern="1200">
           <a:solidFill>
             <a:schemeClr val="tx1"/>
           </a:solidFill>
@@ -2944,13 +2946,13 @@
           <a:cs typeface="+mn-cs"/>
         </a:defRPr>
       </a:lvl5pPr>
-      <a:lvl6pPr marL="2514600" indent="-228600" algn="l" defTabSz="914400" rtl="0" eaLnBrk="1" latinLnBrk="0" hangingPunct="1">
+      <a:lvl6pPr marL="3352716" indent="-304792" algn="l" defTabSz="1219170" rtl="0" eaLnBrk="1" latinLnBrk="0" hangingPunct="1">
         <a:spcBef>
           <a:spcPct val="20000"/>
         </a:spcBef>
         <a:buFont typeface="Arial" panose="02080604020202020204" pitchFamily="34" charset="0"/>
         <a:buChar char="•"/>
-        <a:defRPr sz="2000" kern="1200">
+        <a:defRPr sz="2667" kern="1200">
           <a:solidFill>
             <a:schemeClr val="tx1"/>
           </a:solidFill>
@@ -2959,13 +2961,13 @@
           <a:cs typeface="+mn-cs"/>
         </a:defRPr>
       </a:lvl6pPr>
-      <a:lvl7pPr marL="2971800" indent="-228600" algn="l" defTabSz="914400" rtl="0" eaLnBrk="1" latinLnBrk="0" hangingPunct="1">
+      <a:lvl7pPr marL="3962301" indent="-304792" algn="l" defTabSz="1219170" rtl="0" eaLnBrk="1" latinLnBrk="0" hangingPunct="1">
         <a:spcBef>
           <a:spcPct val="20000"/>
         </a:spcBef>
         <a:buFont typeface="Arial" panose="02080604020202020204" pitchFamily="34" charset="0"/>
         <a:buChar char="•"/>
-        <a:defRPr sz="2000" kern="1200">
+        <a:defRPr sz="2667" kern="1200">
           <a:solidFill>
             <a:schemeClr val="tx1"/>
           </a:solidFill>
@@ -2974,13 +2976,13 @@
           <a:cs typeface="+mn-cs"/>
         </a:defRPr>
       </a:lvl7pPr>
-      <a:lvl8pPr marL="3429000" indent="-228600" algn="l" defTabSz="914400" rtl="0" eaLnBrk="1" latinLnBrk="0" hangingPunct="1">
+      <a:lvl8pPr marL="4571886" indent="-304792" algn="l" defTabSz="1219170" rtl="0" eaLnBrk="1" latinLnBrk="0" hangingPunct="1">
         <a:spcBef>
           <a:spcPct val="20000"/>
         </a:spcBef>
         <a:buFont typeface="Arial" panose="02080604020202020204" pitchFamily="34" charset="0"/>
         <a:buChar char="•"/>
-        <a:defRPr sz="2000" kern="1200">
+        <a:defRPr sz="2667" kern="1200">
           <a:solidFill>
             <a:schemeClr val="tx1"/>
           </a:solidFill>
@@ -2989,13 +2991,13 @@
           <a:cs typeface="+mn-cs"/>
         </a:defRPr>
       </a:lvl8pPr>
-      <a:lvl9pPr marL="3886200" indent="-228600" algn="l" defTabSz="914400" rtl="0" eaLnBrk="1" latinLnBrk="0" hangingPunct="1">
+      <a:lvl9pPr marL="5181470" indent="-304792" algn="l" defTabSz="1219170" rtl="0" eaLnBrk="1" latinLnBrk="0" hangingPunct="1">
         <a:spcBef>
           <a:spcPct val="20000"/>
         </a:spcBef>
         <a:buFont typeface="Arial" panose="02080604020202020204" pitchFamily="34" charset="0"/>
         <a:buChar char="•"/>
-        <a:defRPr sz="2000" kern="1200">
+        <a:defRPr sz="2667" kern="1200">
           <a:solidFill>
             <a:schemeClr val="tx1"/>
           </a:solidFill>
@@ -3009,8 +3011,8 @@
       <a:defPPr>
         <a:defRPr lang="zh-TW"/>
       </a:defPPr>
-      <a:lvl1pPr marL="0" algn="l" defTabSz="914400" rtl="0" eaLnBrk="1" latinLnBrk="0" hangingPunct="1">
-        <a:defRPr sz="1800" kern="1200">
+      <a:lvl1pPr marL="0" algn="l" defTabSz="1219170" rtl="0" eaLnBrk="1" latinLnBrk="0" hangingPunct="1">
+        <a:defRPr sz="2400" kern="1200">
           <a:solidFill>
             <a:schemeClr val="tx1"/>
           </a:solidFill>
@@ -3019,8 +3021,8 @@
           <a:cs typeface="+mn-cs"/>
         </a:defRPr>
       </a:lvl1pPr>
-      <a:lvl2pPr marL="457200" algn="l" defTabSz="914400" rtl="0" eaLnBrk="1" latinLnBrk="0" hangingPunct="1">
-        <a:defRPr sz="1800" kern="1200">
+      <a:lvl2pPr marL="609585" algn="l" defTabSz="1219170" rtl="0" eaLnBrk="1" latinLnBrk="0" hangingPunct="1">
+        <a:defRPr sz="2400" kern="1200">
           <a:solidFill>
             <a:schemeClr val="tx1"/>
           </a:solidFill>
@@ -3029,8 +3031,8 @@
           <a:cs typeface="+mn-cs"/>
         </a:defRPr>
       </a:lvl2pPr>
-      <a:lvl3pPr marL="914400" algn="l" defTabSz="914400" rtl="0" eaLnBrk="1" latinLnBrk="0" hangingPunct="1">
-        <a:defRPr sz="1800" kern="1200">
+      <a:lvl3pPr marL="1219170" algn="l" defTabSz="1219170" rtl="0" eaLnBrk="1" latinLnBrk="0" hangingPunct="1">
+        <a:defRPr sz="2400" kern="1200">
           <a:solidFill>
             <a:schemeClr val="tx1"/>
           </a:solidFill>
@@ -3039,8 +3041,8 @@
           <a:cs typeface="+mn-cs"/>
         </a:defRPr>
       </a:lvl3pPr>
-      <a:lvl4pPr marL="1371600" algn="l" defTabSz="914400" rtl="0" eaLnBrk="1" latinLnBrk="0" hangingPunct="1">
-        <a:defRPr sz="1800" kern="1200">
+      <a:lvl4pPr marL="1828754" algn="l" defTabSz="1219170" rtl="0" eaLnBrk="1" latinLnBrk="0" hangingPunct="1">
+        <a:defRPr sz="2400" kern="1200">
           <a:solidFill>
             <a:schemeClr val="tx1"/>
           </a:solidFill>
@@ -3049,8 +3051,8 @@
           <a:cs typeface="+mn-cs"/>
         </a:defRPr>
       </a:lvl4pPr>
-      <a:lvl5pPr marL="1828800" algn="l" defTabSz="914400" rtl="0" eaLnBrk="1" latinLnBrk="0" hangingPunct="1">
-        <a:defRPr sz="1800" kern="1200">
+      <a:lvl5pPr marL="2438339" algn="l" defTabSz="1219170" rtl="0" eaLnBrk="1" latinLnBrk="0" hangingPunct="1">
+        <a:defRPr sz="2400" kern="1200">
           <a:solidFill>
             <a:schemeClr val="tx1"/>
           </a:solidFill>
@@ -3059,8 +3061,8 @@
           <a:cs typeface="+mn-cs"/>
         </a:defRPr>
       </a:lvl5pPr>
-      <a:lvl6pPr marL="2286000" algn="l" defTabSz="914400" rtl="0" eaLnBrk="1" latinLnBrk="0" hangingPunct="1">
-        <a:defRPr sz="1800" kern="1200">
+      <a:lvl6pPr marL="3047924" algn="l" defTabSz="1219170" rtl="0" eaLnBrk="1" latinLnBrk="0" hangingPunct="1">
+        <a:defRPr sz="2400" kern="1200">
           <a:solidFill>
             <a:schemeClr val="tx1"/>
           </a:solidFill>
@@ -3069,8 +3071,8 @@
           <a:cs typeface="+mn-cs"/>
         </a:defRPr>
       </a:lvl6pPr>
-      <a:lvl7pPr marL="2743200" algn="l" defTabSz="914400" rtl="0" eaLnBrk="1" latinLnBrk="0" hangingPunct="1">
-        <a:defRPr sz="1800" kern="1200">
+      <a:lvl7pPr marL="3657509" algn="l" defTabSz="1219170" rtl="0" eaLnBrk="1" latinLnBrk="0" hangingPunct="1">
+        <a:defRPr sz="2400" kern="1200">
           <a:solidFill>
             <a:schemeClr val="tx1"/>
           </a:solidFill>
@@ -3079,8 +3081,8 @@
           <a:cs typeface="+mn-cs"/>
         </a:defRPr>
       </a:lvl7pPr>
-      <a:lvl8pPr marL="3200400" algn="l" defTabSz="914400" rtl="0" eaLnBrk="1" latinLnBrk="0" hangingPunct="1">
-        <a:defRPr sz="1800" kern="1200">
+      <a:lvl8pPr marL="4267093" algn="l" defTabSz="1219170" rtl="0" eaLnBrk="1" latinLnBrk="0" hangingPunct="1">
+        <a:defRPr sz="2400" kern="1200">
           <a:solidFill>
             <a:schemeClr val="tx1"/>
           </a:solidFill>
@@ -3089,8 +3091,8 @@
           <a:cs typeface="+mn-cs"/>
         </a:defRPr>
       </a:lvl8pPr>
-      <a:lvl9pPr marL="3657600" algn="l" defTabSz="914400" rtl="0" eaLnBrk="1" latinLnBrk="0" hangingPunct="1">
-        <a:defRPr sz="1800" kern="1200">
+      <a:lvl9pPr marL="4876678" algn="l" defTabSz="1219170" rtl="0" eaLnBrk="1" latinLnBrk="0" hangingPunct="1">
+        <a:defRPr sz="2400" kern="1200">
           <a:solidFill>
             <a:schemeClr val="tx1"/>
           </a:solidFill>
@@ -3131,40 +3133,10 @@
             <p:ph type="title"/>
           </p:nvPr>
         </p:nvSpPr>
-        <p:spPr/>
-        <p:txBody>
-          <a:bodyPr>
-            <a:normAutofit/>
-          </a:bodyPr>
-          <a:lstStyle/>
-          <a:p>
-            <a:r>
-              <a:rPr lang="zh-TW" altLang="en-US" sz="4800" b="1" dirty="0">
-                <a:solidFill>
-                  <a:srgbClr val="000066"/>
-                </a:solidFill>
-                <a:latin typeface="Microsoft JhengHei" panose="020B0604030504040204" pitchFamily="34" charset="-120"/>
-                <a:ea typeface="Microsoft JhengHei" panose="020B0604030504040204" pitchFamily="34" charset="-120"/>
-              </a:rPr>
-              <a:t>萬物讚之聲</a:t>
-            </a:r>
-          </a:p>
-        </p:txBody>
-      </p:sp>
-      <p:sp>
-        <p:nvSpPr>
-          <p:cNvPr id="5" name="內容版面配置區 4"/>
-          <p:cNvSpPr>
-            <a:spLocks noGrp="1"/>
-          </p:cNvSpPr>
-          <p:nvPr>
-            <p:ph idx="1"/>
-          </p:nvPr>
-        </p:nvSpPr>
         <p:spPr>
           <a:xfrm>
-            <a:off x="0" y="1600201"/>
-            <a:ext cx="12192000" cy="4525963"/>
+            <a:off x="0" y="2756925"/>
+            <a:ext cx="12192000" cy="1143000"/>
           </a:xfrm>
         </p:spPr>
         <p:txBody>
@@ -3173,279 +3145,1609 @@
           </a:bodyPr>
           <a:lstStyle/>
           <a:p>
+            <a:r>
+              <a:rPr lang="zh-CN" altLang="en-US" sz="7200" b="1" i="1" dirty="0">
+                <a:solidFill>
+                  <a:schemeClr val="bg1"/>
+                </a:solidFill>
+                <a:effectLst>
+                  <a:glow rad="139700">
+                    <a:srgbClr val="339966"/>
+                  </a:glow>
+                  <a:outerShdw blurRad="38100" dist="38100" dir="2700000" algn="tl">
+                    <a:srgbClr val="000000">
+                      <a:alpha val="43137"/>
+                    </a:srgbClr>
+                  </a:outerShdw>
+                </a:effectLst>
+                <a:latin typeface="微軟正黑體" pitchFamily="34" charset="-120"/>
+                <a:ea typeface="微軟正黑體" pitchFamily="34" charset="-120"/>
+              </a:rPr>
+              <a:t>萬物讚之聲</a:t>
+            </a:r>
+            <a:endParaRPr lang="zh-TW" altLang="en-US" sz="7200" b="1" i="1" dirty="0">
+              <a:solidFill>
+                <a:schemeClr val="bg1"/>
+              </a:solidFill>
+              <a:effectLst>
+                <a:glow rad="139700">
+                  <a:srgbClr val="339966"/>
+                </a:glow>
+                <a:outerShdw blurRad="38100" dist="38100" dir="2700000" algn="tl">
+                  <a:srgbClr val="000000">
+                    <a:alpha val="43137"/>
+                  </a:srgbClr>
+                </a:outerShdw>
+              </a:effectLst>
+              <a:latin typeface="微軟正黑體" pitchFamily="34" charset="-120"/>
+              <a:ea typeface="微軟正黑體" pitchFamily="34" charset="-120"/>
+            </a:endParaRPr>
+          </a:p>
+        </p:txBody>
+      </p:sp>
+    </p:spTree>
+    <p:extLst>
+      <p:ext uri="{BB962C8B-B14F-4D97-AF65-F5344CB8AC3E}">
+        <p14:creationId xmlns:p14="http://schemas.microsoft.com/office/powerpoint/2010/main" val="881781680"/>
+      </p:ext>
+    </p:extLst>
+  </p:cSld>
+  <p:clrMapOvr>
+    <a:masterClrMapping/>
+  </p:clrMapOvr>
+</p:sld>
+</file>
+
+<file path=ppt/slides/slide10.xml><?xml version="1.0" encoding="utf-8"?>
+<p:sld xmlns:a="http://schemas.openxmlformats.org/drawingml/2006/main" xmlns:r="http://schemas.openxmlformats.org/officeDocument/2006/relationships" xmlns:p="http://schemas.openxmlformats.org/presentationml/2006/main">
+  <p:cSld>
+    <p:spTree>
+      <p:nvGrpSpPr>
+        <p:cNvPr id="1" name=""/>
+        <p:cNvGrpSpPr/>
+        <p:nvPr/>
+      </p:nvGrpSpPr>
+      <p:grpSpPr>
+        <a:xfrm>
+          <a:off x="0" y="0"/>
+          <a:ext cx="0" cy="0"/>
+          <a:chOff x="0" y="0"/>
+          <a:chExt cx="0" cy="0"/>
+        </a:xfrm>
+      </p:grpSpPr>
+      <p:sp>
+        <p:nvSpPr>
+          <p:cNvPr id="5" name="內容版面配置區 4"/>
+          <p:cNvSpPr>
+            <a:spLocks noGrp="1"/>
+          </p:cNvSpPr>
+          <p:nvPr>
+            <p:ph idx="1"/>
+          </p:nvPr>
+        </p:nvSpPr>
+        <p:spPr>
+          <a:xfrm>
+            <a:off x="0" y="2084854"/>
+            <a:ext cx="12192000" cy="2404863"/>
+          </a:xfrm>
+        </p:spPr>
+        <p:txBody>
+          <a:bodyPr anchor="ctr">
+            <a:normAutofit/>
+          </a:bodyPr>
+          <a:lstStyle/>
+          <a:p>
             <a:pPr algn="ctr">
               <a:buNone/>
             </a:pPr>
             <a:r>
-              <a:rPr lang="zh-TW" altLang="en-US" sz="6000" b="1" dirty="0">
-                <a:solidFill>
-                  <a:srgbClr val="000066"/>
-                </a:solidFill>
+              <a:rPr lang="zh-TW" altLang="en-US" sz="6400" b="1" dirty="0">
+                <a:solidFill>
+                  <a:schemeClr val="bg1"/>
+                </a:solidFill>
+                <a:effectLst>
+                  <a:glow rad="139700">
+                    <a:srgbClr val="339966"/>
+                  </a:glow>
+                </a:effectLst>
+                <a:latin typeface="微軟正黑體" pitchFamily="34" charset="-120"/>
+                <a:ea typeface="微軟正黑體" pitchFamily="34" charset="-120"/>
+              </a:rPr>
+              <a:t>遍地同慶  普世同聲</a:t>
+            </a:r>
+            <a:endParaRPr lang="en-US" altLang="zh-TW" sz="6400" b="1" dirty="0">
+              <a:solidFill>
+                <a:schemeClr val="bg1"/>
+              </a:solidFill>
+              <a:effectLst>
+                <a:glow rad="139700">
+                  <a:srgbClr val="339966"/>
+                </a:glow>
+              </a:effectLst>
+              <a:latin typeface="微軟正黑體" pitchFamily="34" charset="-120"/>
+              <a:ea typeface="微軟正黑體" pitchFamily="34" charset="-120"/>
+            </a:endParaRPr>
+          </a:p>
+          <a:p>
+            <a:pPr algn="ctr">
+              <a:buNone/>
+            </a:pPr>
+            <a:r>
+              <a:rPr lang="zh-TW" altLang="en-US" sz="6400" b="1" dirty="0">
+                <a:solidFill>
+                  <a:schemeClr val="bg1"/>
+                </a:solidFill>
+                <a:effectLst>
+                  <a:glow rad="139700">
+                    <a:srgbClr val="339966"/>
+                  </a:glow>
+                </a:effectLst>
+                <a:latin typeface="微軟正黑體" pitchFamily="34" charset="-120"/>
+                <a:ea typeface="微軟正黑體" pitchFamily="34" charset="-120"/>
+              </a:rPr>
+              <a:t>歌聲句句動聽</a:t>
+            </a:r>
+            <a:endParaRPr lang="en-US" altLang="zh-TW" sz="6400" b="1" dirty="0">
+              <a:solidFill>
+                <a:schemeClr val="bg1"/>
+              </a:solidFill>
+              <a:effectLst>
+                <a:glow rad="139700">
+                  <a:srgbClr val="339966"/>
+                </a:glow>
+              </a:effectLst>
+              <a:latin typeface="微軟正黑體" pitchFamily="34" charset="-120"/>
+              <a:ea typeface="微軟正黑體" pitchFamily="34" charset="-120"/>
+            </a:endParaRPr>
+          </a:p>
+        </p:txBody>
+      </p:sp>
+      <p:sp>
+        <p:nvSpPr>
+          <p:cNvPr id="2" name="TextBox 1">
+            <a:extLst>
+              <a:ext uri="{FF2B5EF4-FFF2-40B4-BE49-F238E27FC236}">
+                <a16:creationId xmlns:a16="http://schemas.microsoft.com/office/drawing/2014/main" id="{378725AE-D86F-D33A-D58F-984D35767F04}"/>
+              </a:ext>
+            </a:extLst>
+          </p:cNvPr>
+          <p:cNvSpPr txBox="1"/>
+          <p:nvPr/>
+        </p:nvSpPr>
+        <p:spPr>
+          <a:xfrm>
+            <a:off x="3639" y="5157194"/>
+            <a:ext cx="12192000" cy="584775"/>
+          </a:xfrm>
+          <a:prstGeom prst="rect">
+            <a:avLst/>
+          </a:prstGeom>
+          <a:noFill/>
+        </p:spPr>
+        <p:txBody>
+          <a:bodyPr wrap="square" rtlCol="0">
+            <a:spAutoFit/>
+          </a:bodyPr>
+          <a:lstStyle/>
+          <a:p>
+            <a:pPr algn="ctr"/>
+            <a:r>
+              <a:rPr lang="en-US" sz="3200" b="1" dirty="0">
+                <a:solidFill>
+                  <a:schemeClr val="bg1"/>
+                </a:solidFill>
+                <a:effectLst>
+                  <a:glow rad="139700">
+                    <a:srgbClr val="339966"/>
+                  </a:glow>
+                </a:effectLst>
                 <a:latin typeface="Microsoft JhengHei" panose="020B0604030504040204" pitchFamily="34" charset="-120"/>
                 <a:ea typeface="Microsoft JhengHei" panose="020B0604030504040204" pitchFamily="34" charset="-120"/>
               </a:rPr>
-              <a:t>山</a:t>
-            </a:r>
-            <a:r>
-              <a:rPr lang="zh-TW" altLang="en-US" sz="6000" b="1" dirty="0">
-                <a:solidFill>
-                  <a:srgbClr val="000066"/>
-                </a:solidFill>
+              <a:t>( </a:t>
+            </a:r>
+            <a:r>
+              <a:rPr lang="zh-CN" altLang="en-US" sz="3200" b="1" dirty="0">
+                <a:solidFill>
+                  <a:schemeClr val="bg1"/>
+                </a:solidFill>
+                <a:effectLst>
+                  <a:glow rad="139700">
+                    <a:srgbClr val="339966"/>
+                  </a:glow>
+                </a:effectLst>
                 <a:latin typeface="Microsoft JhengHei" panose="020B0604030504040204" pitchFamily="34" charset="-120"/>
                 <a:ea typeface="Microsoft JhengHei" panose="020B0604030504040204" pitchFamily="34" charset="-120"/>
               </a:rPr>
-              <a:t>擊掌  水高唱</a:t>
-            </a:r>
-            <a:r>
-              <a:rPr lang="en-US" altLang="zh-TW" sz="6000" b="1" dirty="0">
-                <a:solidFill>
-                  <a:srgbClr val="000066"/>
-                </a:solidFill>
+              <a:t>副歌</a:t>
+            </a:r>
+            <a:r>
+              <a:rPr lang="en-US" sz="3200" b="1" dirty="0">
+                <a:solidFill>
+                  <a:schemeClr val="bg1"/>
+                </a:solidFill>
+                <a:effectLst>
+                  <a:glow rad="139700">
+                    <a:srgbClr val="339966"/>
+                  </a:glow>
+                </a:effectLst>
                 <a:latin typeface="Microsoft JhengHei" panose="020B0604030504040204" pitchFamily="34" charset="-120"/>
                 <a:ea typeface="Microsoft JhengHei" panose="020B0604030504040204" pitchFamily="34" charset="-120"/>
               </a:rPr>
-              <a:t> </a:t>
-            </a:r>
-            <a:r>
-              <a:rPr lang="zh-TW" altLang="en-US" sz="6000" b="1" dirty="0">
-                <a:solidFill>
-                  <a:srgbClr val="000066"/>
-                </a:solidFill>
+              <a:t> )</a:t>
+            </a:r>
+            <a:endParaRPr lang="vi-VN" sz="3200" b="1" dirty="0">
+              <a:solidFill>
+                <a:schemeClr val="bg1"/>
+              </a:solidFill>
+              <a:effectLst>
+                <a:glow rad="139700">
+                  <a:srgbClr val="339966"/>
+                </a:glow>
+              </a:effectLst>
+              <a:ea typeface="Microsoft JhengHei" panose="020B0604030504040204" pitchFamily="34" charset="-120"/>
+            </a:endParaRPr>
+          </a:p>
+        </p:txBody>
+      </p:sp>
+    </p:spTree>
+    <p:extLst>
+      <p:ext uri="{BB962C8B-B14F-4D97-AF65-F5344CB8AC3E}">
+        <p14:creationId xmlns:p14="http://schemas.microsoft.com/office/powerpoint/2010/main" val="3237570431"/>
+      </p:ext>
+    </p:extLst>
+  </p:cSld>
+  <p:clrMapOvr>
+    <a:masterClrMapping/>
+  </p:clrMapOvr>
+</p:sld>
+</file>
+
+<file path=ppt/slides/slide11.xml><?xml version="1.0" encoding="utf-8"?>
+<p:sld xmlns:a="http://schemas.openxmlformats.org/drawingml/2006/main" xmlns:r="http://schemas.openxmlformats.org/officeDocument/2006/relationships" xmlns:p="http://schemas.openxmlformats.org/presentationml/2006/main">
+  <p:cSld>
+    <p:spTree>
+      <p:nvGrpSpPr>
+        <p:cNvPr id="1" name=""/>
+        <p:cNvGrpSpPr/>
+        <p:nvPr/>
+      </p:nvGrpSpPr>
+      <p:grpSpPr>
+        <a:xfrm>
+          <a:off x="0" y="0"/>
+          <a:ext cx="0" cy="0"/>
+          <a:chOff x="0" y="0"/>
+          <a:chExt cx="0" cy="0"/>
+        </a:xfrm>
+      </p:grpSpPr>
+      <p:sp>
+        <p:nvSpPr>
+          <p:cNvPr id="4" name="標題 3"/>
+          <p:cNvSpPr>
+            <a:spLocks noGrp="1"/>
+          </p:cNvSpPr>
+          <p:nvPr>
+            <p:ph type="title"/>
+          </p:nvPr>
+        </p:nvSpPr>
+        <p:spPr>
+          <a:xfrm>
+            <a:off x="0" y="2756925"/>
+            <a:ext cx="12192000" cy="1143000"/>
+          </a:xfrm>
+        </p:spPr>
+        <p:txBody>
+          <a:bodyPr>
+            <a:noAutofit/>
+          </a:bodyPr>
+          <a:lstStyle/>
+          <a:p>
+            <a:r>
+              <a:rPr lang="zh-CN" altLang="en-US" sz="7200" b="1" i="1" dirty="0">
+                <a:solidFill>
+                  <a:schemeClr val="bg1"/>
+                </a:solidFill>
+                <a:effectLst>
+                  <a:glow rad="139700">
+                    <a:srgbClr val="339966"/>
+                  </a:glow>
+                  <a:outerShdw blurRad="38100" dist="38100" dir="2700000" algn="tl">
+                    <a:srgbClr val="000000">
+                      <a:alpha val="43137"/>
+                    </a:srgbClr>
+                  </a:outerShdw>
+                </a:effectLst>
+                <a:latin typeface="微軟正黑體" pitchFamily="34" charset="-120"/>
+                <a:ea typeface="微軟正黑體" pitchFamily="34" charset="-120"/>
+              </a:rPr>
+              <a:t>萬物讚之聲</a:t>
+            </a:r>
+            <a:endParaRPr lang="zh-TW" altLang="en-US" sz="7200" b="1" i="1" dirty="0">
+              <a:solidFill>
+                <a:schemeClr val="bg1"/>
+              </a:solidFill>
+              <a:effectLst>
+                <a:glow rad="139700">
+                  <a:srgbClr val="339966"/>
+                </a:glow>
+                <a:outerShdw blurRad="38100" dist="38100" dir="2700000" algn="tl">
+                  <a:srgbClr val="000000">
+                    <a:alpha val="43137"/>
+                  </a:srgbClr>
+                </a:outerShdw>
+              </a:effectLst>
+              <a:latin typeface="微軟正黑體" pitchFamily="34" charset="-120"/>
+              <a:ea typeface="微軟正黑體" pitchFamily="34" charset="-120"/>
+            </a:endParaRPr>
+          </a:p>
+        </p:txBody>
+      </p:sp>
+    </p:spTree>
+    <p:extLst>
+      <p:ext uri="{BB962C8B-B14F-4D97-AF65-F5344CB8AC3E}">
+        <p14:creationId xmlns:p14="http://schemas.microsoft.com/office/powerpoint/2010/main" val="585165821"/>
+      </p:ext>
+    </p:extLst>
+  </p:cSld>
+  <p:clrMapOvr>
+    <a:masterClrMapping/>
+  </p:clrMapOvr>
+</p:sld>
+</file>
+
+<file path=ppt/slides/slide12.xml><?xml version="1.0" encoding="utf-8"?>
+<p:sld xmlns:a="http://schemas.openxmlformats.org/drawingml/2006/main" xmlns:r="http://schemas.openxmlformats.org/officeDocument/2006/relationships" xmlns:p="http://schemas.openxmlformats.org/presentationml/2006/main">
+  <p:cSld>
+    <p:spTree>
+      <p:nvGrpSpPr>
+        <p:cNvPr id="1" name=""/>
+        <p:cNvGrpSpPr/>
+        <p:nvPr/>
+      </p:nvGrpSpPr>
+      <p:grpSpPr>
+        <a:xfrm>
+          <a:off x="0" y="0"/>
+          <a:ext cx="0" cy="0"/>
+          <a:chOff x="0" y="0"/>
+          <a:chExt cx="0" cy="0"/>
+        </a:xfrm>
+      </p:grpSpPr>
+      <p:sp>
+        <p:nvSpPr>
+          <p:cNvPr id="5" name="內容版面配置區 4"/>
+          <p:cNvSpPr>
+            <a:spLocks noGrp="1"/>
+          </p:cNvSpPr>
+          <p:nvPr>
+            <p:ph idx="1"/>
+          </p:nvPr>
+        </p:nvSpPr>
+        <p:spPr>
+          <a:xfrm>
+            <a:off x="0" y="2084854"/>
+            <a:ext cx="12192000" cy="2404863"/>
+          </a:xfrm>
+        </p:spPr>
+        <p:txBody>
+          <a:bodyPr anchor="ctr">
+            <a:normAutofit/>
+          </a:bodyPr>
+          <a:lstStyle/>
+          <a:p>
+            <a:pPr algn="ctr">
+              <a:buNone/>
+            </a:pPr>
+            <a:r>
+              <a:rPr lang="zh-TW" altLang="en-US" sz="6400" b="1" dirty="0">
+                <a:solidFill>
+                  <a:schemeClr val="bg1"/>
+                </a:solidFill>
+                <a:effectLst>
+                  <a:glow rad="139700">
+                    <a:srgbClr val="339966"/>
+                  </a:glow>
+                </a:effectLst>
+                <a:latin typeface="微軟正黑體" pitchFamily="34" charset="-120"/>
+                <a:ea typeface="微軟正黑體" pitchFamily="34" charset="-120"/>
+              </a:rPr>
+              <a:t>山擊掌  水高唱</a:t>
+            </a:r>
+            <a:r>
+              <a:rPr lang="en-US" altLang="zh-TW" sz="6400" b="1" dirty="0">
+                <a:solidFill>
+                  <a:schemeClr val="bg1"/>
+                </a:solidFill>
+                <a:effectLst>
+                  <a:glow rad="139700">
+                    <a:srgbClr val="339966"/>
+                  </a:glow>
+                </a:effectLst>
+                <a:latin typeface="微軟正黑體" pitchFamily="34" charset="-120"/>
+                <a:ea typeface="微軟正黑體" pitchFamily="34" charset="-120"/>
+              </a:rPr>
+              <a:t>  </a:t>
+            </a:r>
+            <a:r>
+              <a:rPr lang="zh-TW" altLang="en-US" sz="6400" b="1" dirty="0">
+                <a:solidFill>
+                  <a:schemeClr val="bg1"/>
+                </a:solidFill>
+                <a:effectLst>
+                  <a:glow rad="139700">
+                    <a:srgbClr val="339966"/>
+                  </a:glow>
+                </a:effectLst>
+                <a:latin typeface="微軟正黑體" pitchFamily="34" charset="-120"/>
+                <a:ea typeface="微軟正黑體" pitchFamily="34" charset="-120"/>
+              </a:rPr>
+              <a:t>眾星也和應</a:t>
+            </a:r>
+            <a:endParaRPr lang="en-US" altLang="zh-TW" sz="6400" b="1" dirty="0">
+              <a:solidFill>
+                <a:schemeClr val="bg1"/>
+              </a:solidFill>
+              <a:effectLst>
+                <a:glow rad="139700">
+                  <a:srgbClr val="339966"/>
+                </a:glow>
+              </a:effectLst>
+              <a:latin typeface="微軟正黑體" pitchFamily="34" charset="-120"/>
+              <a:ea typeface="微軟正黑體" pitchFamily="34" charset="-120"/>
+            </a:endParaRPr>
+          </a:p>
+          <a:p>
+            <a:pPr algn="ctr">
+              <a:buNone/>
+            </a:pPr>
+            <a:r>
+              <a:rPr lang="zh-TW" altLang="en-US" sz="6400" b="1" dirty="0">
+                <a:solidFill>
+                  <a:schemeClr val="bg1"/>
+                </a:solidFill>
+                <a:effectLst>
+                  <a:glow rad="139700">
+                    <a:srgbClr val="339966"/>
+                  </a:glow>
+                </a:effectLst>
+                <a:latin typeface="微軟正黑體" pitchFamily="34" charset="-120"/>
+                <a:ea typeface="微軟正黑體" pitchFamily="34" charset="-120"/>
+              </a:rPr>
+              <a:t>風輕吹  吹起讚之聲</a:t>
+            </a:r>
+            <a:endParaRPr lang="en-US" altLang="zh-TW" sz="6400" b="1" dirty="0">
+              <a:solidFill>
+                <a:schemeClr val="bg1"/>
+              </a:solidFill>
+              <a:effectLst>
+                <a:glow rad="139700">
+                  <a:srgbClr val="339966"/>
+                </a:glow>
+              </a:effectLst>
+              <a:latin typeface="微軟正黑體" pitchFamily="34" charset="-120"/>
+              <a:ea typeface="微軟正黑體" pitchFamily="34" charset="-120"/>
+            </a:endParaRPr>
+          </a:p>
+        </p:txBody>
+      </p:sp>
+      <p:sp>
+        <p:nvSpPr>
+          <p:cNvPr id="2" name="TextBox 1">
+            <a:extLst>
+              <a:ext uri="{FF2B5EF4-FFF2-40B4-BE49-F238E27FC236}">
+                <a16:creationId xmlns:a16="http://schemas.microsoft.com/office/drawing/2014/main" id="{378725AE-D86F-D33A-D58F-984D35767F04}"/>
+              </a:ext>
+            </a:extLst>
+          </p:cNvPr>
+          <p:cNvSpPr txBox="1"/>
+          <p:nvPr/>
+        </p:nvSpPr>
+        <p:spPr>
+          <a:xfrm>
+            <a:off x="3639" y="5157194"/>
+            <a:ext cx="12192000" cy="584775"/>
+          </a:xfrm>
+          <a:prstGeom prst="rect">
+            <a:avLst/>
+          </a:prstGeom>
+          <a:noFill/>
+        </p:spPr>
+        <p:txBody>
+          <a:bodyPr wrap="square" rtlCol="0">
+            <a:spAutoFit/>
+          </a:bodyPr>
+          <a:lstStyle/>
+          <a:p>
+            <a:pPr algn="ctr"/>
+            <a:r>
+              <a:rPr lang="en-US" sz="3200" b="1" dirty="0">
+                <a:solidFill>
+                  <a:schemeClr val="bg1"/>
+                </a:solidFill>
+                <a:effectLst>
+                  <a:glow rad="139700">
+                    <a:srgbClr val="339966"/>
+                  </a:glow>
+                </a:effectLst>
                 <a:latin typeface="Microsoft JhengHei" panose="020B0604030504040204" pitchFamily="34" charset="-120"/>
                 <a:ea typeface="Microsoft JhengHei" panose="020B0604030504040204" pitchFamily="34" charset="-120"/>
               </a:rPr>
-              <a:t>眾</a:t>
-            </a:r>
-            <a:r>
-              <a:rPr lang="zh-TW" altLang="en-US" sz="6000" b="1" dirty="0">
-                <a:solidFill>
-                  <a:srgbClr val="000066"/>
-                </a:solidFill>
+              <a:t>( </a:t>
+            </a:r>
+            <a:r>
+              <a:rPr lang="zh-CN" altLang="en-US" sz="3200" b="1" dirty="0">
+                <a:solidFill>
+                  <a:schemeClr val="bg1"/>
+                </a:solidFill>
+                <a:effectLst>
+                  <a:glow rad="139700">
+                    <a:srgbClr val="339966"/>
+                  </a:glow>
+                </a:effectLst>
                 <a:latin typeface="Microsoft JhengHei" panose="020B0604030504040204" pitchFamily="34" charset="-120"/>
                 <a:ea typeface="Microsoft JhengHei" panose="020B0604030504040204" pitchFamily="34" charset="-120"/>
               </a:rPr>
-              <a:t>星也和</a:t>
-            </a:r>
-            <a:r>
-              <a:rPr lang="zh-TW" altLang="en-US" sz="6000" b="1" dirty="0">
-                <a:solidFill>
-                  <a:srgbClr val="000066"/>
-                </a:solidFill>
+              <a:t>正歌</a:t>
+            </a:r>
+            <a:r>
+              <a:rPr lang="en-US" sz="3200" b="1" dirty="0">
+                <a:solidFill>
+                  <a:schemeClr val="bg1"/>
+                </a:solidFill>
+                <a:effectLst>
+                  <a:glow rad="139700">
+                    <a:srgbClr val="339966"/>
+                  </a:glow>
+                </a:effectLst>
                 <a:latin typeface="Microsoft JhengHei" panose="020B0604030504040204" pitchFamily="34" charset="-120"/>
                 <a:ea typeface="Microsoft JhengHei" panose="020B0604030504040204" pitchFamily="34" charset="-120"/>
               </a:rPr>
-              <a:t>應</a:t>
-            </a:r>
-            <a:endParaRPr lang="en-US" altLang="zh-TW" sz="6000" b="1" dirty="0">
+              <a:t> )</a:t>
+            </a:r>
+            <a:endParaRPr lang="vi-VN" sz="3200" b="1" dirty="0">
               <a:solidFill>
-                <a:srgbClr val="000066"/>
+                <a:schemeClr val="bg1"/>
               </a:solidFill>
-              <a:latin typeface="Microsoft JhengHei" panose="020B0604030504040204" pitchFamily="34" charset="-120"/>
+              <a:effectLst>
+                <a:glow rad="139700">
+                  <a:srgbClr val="339966"/>
+                </a:glow>
+              </a:effectLst>
               <a:ea typeface="Microsoft JhengHei" panose="020B0604030504040204" pitchFamily="34" charset="-120"/>
             </a:endParaRPr>
           </a:p>
+        </p:txBody>
+      </p:sp>
+    </p:spTree>
+    <p:extLst>
+      <p:ext uri="{BB962C8B-B14F-4D97-AF65-F5344CB8AC3E}">
+        <p14:creationId xmlns:p14="http://schemas.microsoft.com/office/powerpoint/2010/main" val="2678266065"/>
+      </p:ext>
+    </p:extLst>
+  </p:cSld>
+  <p:clrMapOvr>
+    <a:masterClrMapping/>
+  </p:clrMapOvr>
+</p:sld>
+</file>
+
+<file path=ppt/slides/slide13.xml><?xml version="1.0" encoding="utf-8"?>
+<p:sld xmlns:a="http://schemas.openxmlformats.org/drawingml/2006/main" xmlns:r="http://schemas.openxmlformats.org/officeDocument/2006/relationships" xmlns:p="http://schemas.openxmlformats.org/presentationml/2006/main">
+  <p:cSld>
+    <p:spTree>
+      <p:nvGrpSpPr>
+        <p:cNvPr id="1" name=""/>
+        <p:cNvGrpSpPr/>
+        <p:nvPr/>
+      </p:nvGrpSpPr>
+      <p:grpSpPr>
+        <a:xfrm>
+          <a:off x="0" y="0"/>
+          <a:ext cx="0" cy="0"/>
+          <a:chOff x="0" y="0"/>
+          <a:chExt cx="0" cy="0"/>
+        </a:xfrm>
+      </p:grpSpPr>
+      <p:sp>
+        <p:nvSpPr>
+          <p:cNvPr id="5" name="內容版面配置區 4"/>
+          <p:cNvSpPr>
+            <a:spLocks noGrp="1"/>
+          </p:cNvSpPr>
+          <p:nvPr>
+            <p:ph idx="1"/>
+          </p:nvPr>
+        </p:nvSpPr>
+        <p:spPr>
+          <a:xfrm>
+            <a:off x="0" y="2084854"/>
+            <a:ext cx="12192000" cy="2404863"/>
+          </a:xfrm>
+        </p:spPr>
+        <p:txBody>
+          <a:bodyPr anchor="ctr">
+            <a:normAutofit/>
+          </a:bodyPr>
+          <a:lstStyle/>
           <a:p>
             <a:pPr algn="ctr">
               <a:buNone/>
             </a:pPr>
             <a:r>
-              <a:rPr lang="zh-TW" altLang="en-US" sz="6000" b="1" dirty="0">
-                <a:solidFill>
-                  <a:srgbClr val="000066"/>
-                </a:solidFill>
+              <a:rPr lang="zh-TW" altLang="en-US" sz="6400" b="1" dirty="0">
+                <a:solidFill>
+                  <a:schemeClr val="bg1"/>
+                </a:solidFill>
+                <a:effectLst>
+                  <a:glow rad="139700">
+                    <a:srgbClr val="339966"/>
+                  </a:glow>
+                </a:effectLst>
+                <a:latin typeface="微軟正黑體" pitchFamily="34" charset="-120"/>
+                <a:ea typeface="微軟正黑體" pitchFamily="34" charset="-120"/>
+              </a:rPr>
+              <a:t>花擺腰  草偷笑  要興奮做証</a:t>
+            </a:r>
+            <a:endParaRPr lang="en-US" altLang="zh-TW" sz="6400" b="1" dirty="0">
+              <a:solidFill>
+                <a:schemeClr val="bg1"/>
+              </a:solidFill>
+              <a:effectLst>
+                <a:glow rad="139700">
+                  <a:srgbClr val="339966"/>
+                </a:glow>
+              </a:effectLst>
+              <a:latin typeface="微軟正黑體" pitchFamily="34" charset="-120"/>
+              <a:ea typeface="微軟正黑體" pitchFamily="34" charset="-120"/>
+            </a:endParaRPr>
+          </a:p>
+          <a:p>
+            <a:pPr algn="ctr">
+              <a:buNone/>
+            </a:pPr>
+            <a:r>
+              <a:rPr lang="zh-TW" altLang="en-US" sz="6400" b="1" dirty="0">
+                <a:solidFill>
+                  <a:schemeClr val="bg1"/>
+                </a:solidFill>
+                <a:effectLst>
+                  <a:glow rad="139700">
+                    <a:srgbClr val="339966"/>
+                  </a:glow>
+                </a:effectLst>
+                <a:latin typeface="微軟正黑體" pitchFamily="34" charset="-120"/>
+                <a:ea typeface="微軟正黑體" pitchFamily="34" charset="-120"/>
+              </a:rPr>
+              <a:t>頌唱主基督已經得勝</a:t>
+            </a:r>
+            <a:endParaRPr lang="en-US" altLang="zh-TW" sz="6400" b="1" dirty="0">
+              <a:solidFill>
+                <a:schemeClr val="bg1"/>
+              </a:solidFill>
+              <a:effectLst>
+                <a:glow rad="139700">
+                  <a:srgbClr val="339966"/>
+                </a:glow>
+              </a:effectLst>
+              <a:latin typeface="微軟正黑體" pitchFamily="34" charset="-120"/>
+              <a:ea typeface="微軟正黑體" pitchFamily="34" charset="-120"/>
+            </a:endParaRPr>
+          </a:p>
+        </p:txBody>
+      </p:sp>
+      <p:sp>
+        <p:nvSpPr>
+          <p:cNvPr id="2" name="TextBox 1">
+            <a:extLst>
+              <a:ext uri="{FF2B5EF4-FFF2-40B4-BE49-F238E27FC236}">
+                <a16:creationId xmlns:a16="http://schemas.microsoft.com/office/drawing/2014/main" id="{378725AE-D86F-D33A-D58F-984D35767F04}"/>
+              </a:ext>
+            </a:extLst>
+          </p:cNvPr>
+          <p:cNvSpPr txBox="1"/>
+          <p:nvPr/>
+        </p:nvSpPr>
+        <p:spPr>
+          <a:xfrm>
+            <a:off x="3639" y="5157194"/>
+            <a:ext cx="12192000" cy="584775"/>
+          </a:xfrm>
+          <a:prstGeom prst="rect">
+            <a:avLst/>
+          </a:prstGeom>
+          <a:noFill/>
+        </p:spPr>
+        <p:txBody>
+          <a:bodyPr wrap="square" rtlCol="0">
+            <a:spAutoFit/>
+          </a:bodyPr>
+          <a:lstStyle/>
+          <a:p>
+            <a:pPr algn="ctr"/>
+            <a:r>
+              <a:rPr lang="en-US" sz="3200" b="1" dirty="0">
+                <a:solidFill>
+                  <a:schemeClr val="bg1"/>
+                </a:solidFill>
+                <a:effectLst>
+                  <a:glow rad="139700">
+                    <a:srgbClr val="339966"/>
+                  </a:glow>
+                </a:effectLst>
                 <a:latin typeface="Microsoft JhengHei" panose="020B0604030504040204" pitchFamily="34" charset="-120"/>
                 <a:ea typeface="Microsoft JhengHei" panose="020B0604030504040204" pitchFamily="34" charset="-120"/>
               </a:rPr>
-              <a:t>風</a:t>
-            </a:r>
-            <a:r>
-              <a:rPr lang="zh-TW" altLang="en-US" sz="6000" b="1" dirty="0">
-                <a:solidFill>
-                  <a:srgbClr val="000066"/>
-                </a:solidFill>
+              <a:t>( </a:t>
+            </a:r>
+            <a:r>
+              <a:rPr lang="zh-CN" altLang="en-US" sz="3200" b="1" dirty="0">
+                <a:solidFill>
+                  <a:schemeClr val="bg1"/>
+                </a:solidFill>
+                <a:effectLst>
+                  <a:glow rad="139700">
+                    <a:srgbClr val="339966"/>
+                  </a:glow>
+                </a:effectLst>
                 <a:latin typeface="Microsoft JhengHei" panose="020B0604030504040204" pitchFamily="34" charset="-120"/>
                 <a:ea typeface="Microsoft JhengHei" panose="020B0604030504040204" pitchFamily="34" charset="-120"/>
               </a:rPr>
-              <a:t>輕</a:t>
-            </a:r>
-            <a:r>
-              <a:rPr lang="zh-TW" altLang="en-US" sz="6000" b="1" dirty="0">
-                <a:solidFill>
-                  <a:srgbClr val="000066"/>
-                </a:solidFill>
+              <a:t>正歌</a:t>
+            </a:r>
+            <a:r>
+              <a:rPr lang="en-US" sz="3200" b="1" dirty="0">
+                <a:solidFill>
+                  <a:schemeClr val="bg1"/>
+                </a:solidFill>
+                <a:effectLst>
+                  <a:glow rad="139700">
+                    <a:srgbClr val="339966"/>
+                  </a:glow>
+                </a:effectLst>
                 <a:latin typeface="Microsoft JhengHei" panose="020B0604030504040204" pitchFamily="34" charset="-120"/>
                 <a:ea typeface="Microsoft JhengHei" panose="020B0604030504040204" pitchFamily="34" charset="-120"/>
               </a:rPr>
-              <a:t>吹  吹</a:t>
-            </a:r>
-            <a:r>
-              <a:rPr lang="zh-TW" altLang="en-US" sz="6000" b="1" dirty="0">
-                <a:solidFill>
-                  <a:srgbClr val="000066"/>
-                </a:solidFill>
+              <a:t> )</a:t>
+            </a:r>
+            <a:endParaRPr lang="vi-VN" sz="3200" b="1" dirty="0">
+              <a:solidFill>
+                <a:schemeClr val="bg1"/>
+              </a:solidFill>
+              <a:effectLst>
+                <a:glow rad="139700">
+                  <a:srgbClr val="339966"/>
+                </a:glow>
+              </a:effectLst>
+              <a:ea typeface="Microsoft JhengHei" panose="020B0604030504040204" pitchFamily="34" charset="-120"/>
+            </a:endParaRPr>
+          </a:p>
+        </p:txBody>
+      </p:sp>
+    </p:spTree>
+    <p:extLst>
+      <p:ext uri="{BB962C8B-B14F-4D97-AF65-F5344CB8AC3E}">
+        <p14:creationId xmlns:p14="http://schemas.microsoft.com/office/powerpoint/2010/main" val="3904854695"/>
+      </p:ext>
+    </p:extLst>
+  </p:cSld>
+  <p:clrMapOvr>
+    <a:masterClrMapping/>
+  </p:clrMapOvr>
+</p:sld>
+</file>
+
+<file path=ppt/slides/slide14.xml><?xml version="1.0" encoding="utf-8"?>
+<p:sld xmlns:a="http://schemas.openxmlformats.org/drawingml/2006/main" xmlns:r="http://schemas.openxmlformats.org/officeDocument/2006/relationships" xmlns:p="http://schemas.openxmlformats.org/presentationml/2006/main">
+  <p:cSld>
+    <p:spTree>
+      <p:nvGrpSpPr>
+        <p:cNvPr id="1" name=""/>
+        <p:cNvGrpSpPr/>
+        <p:nvPr/>
+      </p:nvGrpSpPr>
+      <p:grpSpPr>
+        <a:xfrm>
+          <a:off x="0" y="0"/>
+          <a:ext cx="0" cy="0"/>
+          <a:chOff x="0" y="0"/>
+          <a:chExt cx="0" cy="0"/>
+        </a:xfrm>
+      </p:grpSpPr>
+      <p:sp>
+        <p:nvSpPr>
+          <p:cNvPr id="5" name="內容版面配置區 4"/>
+          <p:cNvSpPr>
+            <a:spLocks noGrp="1"/>
+          </p:cNvSpPr>
+          <p:nvPr>
+            <p:ph idx="1"/>
+          </p:nvPr>
+        </p:nvSpPr>
+        <p:spPr>
+          <a:xfrm>
+            <a:off x="0" y="2084854"/>
+            <a:ext cx="12192000" cy="2404863"/>
+          </a:xfrm>
+        </p:spPr>
+        <p:txBody>
+          <a:bodyPr anchor="ctr">
+            <a:normAutofit/>
+          </a:bodyPr>
+          <a:lstStyle/>
+          <a:p>
+            <a:pPr algn="ctr">
+              <a:buNone/>
+            </a:pPr>
+            <a:r>
+              <a:rPr lang="zh-TW" altLang="en-US" sz="6400" b="1" dirty="0">
+                <a:solidFill>
+                  <a:schemeClr val="bg1"/>
+                </a:solidFill>
+                <a:effectLst>
+                  <a:glow rad="139700">
+                    <a:srgbClr val="339966"/>
+                  </a:glow>
+                </a:effectLst>
+                <a:latin typeface="微軟正黑體" pitchFamily="34" charset="-120"/>
+                <a:ea typeface="微軟正黑體" pitchFamily="34" charset="-120"/>
+              </a:rPr>
+              <a:t>永活耶穌  尊貴崇高</a:t>
+            </a:r>
+            <a:endParaRPr lang="en-US" altLang="zh-TW" sz="6400" b="1" dirty="0">
+              <a:solidFill>
+                <a:schemeClr val="bg1"/>
+              </a:solidFill>
+              <a:effectLst>
+                <a:glow rad="139700">
+                  <a:srgbClr val="339966"/>
+                </a:glow>
+              </a:effectLst>
+              <a:latin typeface="微軟正黑體" pitchFamily="34" charset="-120"/>
+              <a:ea typeface="微軟正黑體" pitchFamily="34" charset="-120"/>
+            </a:endParaRPr>
+          </a:p>
+          <a:p>
+            <a:pPr algn="ctr">
+              <a:buNone/>
+            </a:pPr>
+            <a:r>
+              <a:rPr lang="zh-TW" altLang="en-US" sz="6400" b="1" dirty="0">
+                <a:solidFill>
+                  <a:schemeClr val="bg1"/>
+                </a:solidFill>
+                <a:effectLst>
+                  <a:glow rad="139700">
+                    <a:srgbClr val="339966"/>
+                  </a:glow>
+                </a:effectLst>
+                <a:latin typeface="微軟正黑體" pitchFamily="34" charset="-120"/>
+                <a:ea typeface="微軟正黑體" pitchFamily="34" charset="-120"/>
+              </a:rPr>
+              <a:t>謳歌讚美祂至美至榮</a:t>
+            </a:r>
+            <a:endParaRPr lang="en-US" altLang="zh-TW" sz="6400" b="1" dirty="0">
+              <a:solidFill>
+                <a:schemeClr val="bg1"/>
+              </a:solidFill>
+              <a:effectLst>
+                <a:glow rad="139700">
+                  <a:srgbClr val="339966"/>
+                </a:glow>
+              </a:effectLst>
+              <a:latin typeface="微軟正黑體" pitchFamily="34" charset="-120"/>
+              <a:ea typeface="微軟正黑體" pitchFamily="34" charset="-120"/>
+            </a:endParaRPr>
+          </a:p>
+        </p:txBody>
+      </p:sp>
+      <p:sp>
+        <p:nvSpPr>
+          <p:cNvPr id="2" name="TextBox 1">
+            <a:extLst>
+              <a:ext uri="{FF2B5EF4-FFF2-40B4-BE49-F238E27FC236}">
+                <a16:creationId xmlns:a16="http://schemas.microsoft.com/office/drawing/2014/main" id="{378725AE-D86F-D33A-D58F-984D35767F04}"/>
+              </a:ext>
+            </a:extLst>
+          </p:cNvPr>
+          <p:cNvSpPr txBox="1"/>
+          <p:nvPr/>
+        </p:nvSpPr>
+        <p:spPr>
+          <a:xfrm>
+            <a:off x="3639" y="5157194"/>
+            <a:ext cx="12192000" cy="584775"/>
+          </a:xfrm>
+          <a:prstGeom prst="rect">
+            <a:avLst/>
+          </a:prstGeom>
+          <a:noFill/>
+        </p:spPr>
+        <p:txBody>
+          <a:bodyPr wrap="square" rtlCol="0">
+            <a:spAutoFit/>
+          </a:bodyPr>
+          <a:lstStyle/>
+          <a:p>
+            <a:pPr algn="ctr"/>
+            <a:r>
+              <a:rPr lang="en-US" sz="3200" b="1" dirty="0">
+                <a:solidFill>
+                  <a:schemeClr val="bg1"/>
+                </a:solidFill>
+                <a:effectLst>
+                  <a:glow rad="139700">
+                    <a:srgbClr val="339966"/>
+                  </a:glow>
+                </a:effectLst>
                 <a:latin typeface="Microsoft JhengHei" panose="020B0604030504040204" pitchFamily="34" charset="-120"/>
                 <a:ea typeface="Microsoft JhengHei" panose="020B0604030504040204" pitchFamily="34" charset="-120"/>
               </a:rPr>
-              <a:t>起讚之</a:t>
-            </a:r>
-            <a:r>
-              <a:rPr lang="zh-TW" altLang="en-US" sz="6000" b="1" dirty="0">
-                <a:solidFill>
-                  <a:srgbClr val="000066"/>
-                </a:solidFill>
+              <a:t>( </a:t>
+            </a:r>
+            <a:r>
+              <a:rPr lang="zh-CN" altLang="en-US" sz="3200" b="1" dirty="0">
+                <a:solidFill>
+                  <a:schemeClr val="bg1"/>
+                </a:solidFill>
+                <a:effectLst>
+                  <a:glow rad="139700">
+                    <a:srgbClr val="339966"/>
+                  </a:glow>
+                </a:effectLst>
                 <a:latin typeface="Microsoft JhengHei" panose="020B0604030504040204" pitchFamily="34" charset="-120"/>
                 <a:ea typeface="Microsoft JhengHei" panose="020B0604030504040204" pitchFamily="34" charset="-120"/>
               </a:rPr>
-              <a:t>聲</a:t>
-            </a:r>
-            <a:endParaRPr lang="en-US" altLang="zh-TW" sz="6000" b="1" dirty="0">
+              <a:t>副歌</a:t>
+            </a:r>
+            <a:r>
+              <a:rPr lang="en-US" sz="3200" b="1" dirty="0">
+                <a:solidFill>
+                  <a:schemeClr val="bg1"/>
+                </a:solidFill>
+                <a:effectLst>
+                  <a:glow rad="139700">
+                    <a:srgbClr val="339966"/>
+                  </a:glow>
+                </a:effectLst>
+                <a:latin typeface="Microsoft JhengHei" panose="020B0604030504040204" pitchFamily="34" charset="-120"/>
+                <a:ea typeface="Microsoft JhengHei" panose="020B0604030504040204" pitchFamily="34" charset="-120"/>
+              </a:rPr>
+              <a:t> )</a:t>
+            </a:r>
+            <a:endParaRPr lang="vi-VN" sz="3200" b="1" dirty="0">
               <a:solidFill>
-                <a:srgbClr val="000066"/>
+                <a:schemeClr val="bg1"/>
               </a:solidFill>
-              <a:latin typeface="Microsoft JhengHei" panose="020B0604030504040204" pitchFamily="34" charset="-120"/>
+              <a:effectLst>
+                <a:glow rad="139700">
+                  <a:srgbClr val="339966"/>
+                </a:glow>
+              </a:effectLst>
               <a:ea typeface="Microsoft JhengHei" panose="020B0604030504040204" pitchFamily="34" charset="-120"/>
             </a:endParaRPr>
           </a:p>
+        </p:txBody>
+      </p:sp>
+    </p:spTree>
+    <p:extLst>
+      <p:ext uri="{BB962C8B-B14F-4D97-AF65-F5344CB8AC3E}">
+        <p14:creationId xmlns:p14="http://schemas.microsoft.com/office/powerpoint/2010/main" val="536821582"/>
+      </p:ext>
+    </p:extLst>
+  </p:cSld>
+  <p:clrMapOvr>
+    <a:masterClrMapping/>
+  </p:clrMapOvr>
+</p:sld>
+</file>
+
+<file path=ppt/slides/slide15.xml><?xml version="1.0" encoding="utf-8"?>
+<p:sld xmlns:a="http://schemas.openxmlformats.org/drawingml/2006/main" xmlns:r="http://schemas.openxmlformats.org/officeDocument/2006/relationships" xmlns:p="http://schemas.openxmlformats.org/presentationml/2006/main">
+  <p:cSld>
+    <p:spTree>
+      <p:nvGrpSpPr>
+        <p:cNvPr id="1" name=""/>
+        <p:cNvGrpSpPr/>
+        <p:nvPr/>
+      </p:nvGrpSpPr>
+      <p:grpSpPr>
+        <a:xfrm>
+          <a:off x="0" y="0"/>
+          <a:ext cx="0" cy="0"/>
+          <a:chOff x="0" y="0"/>
+          <a:chExt cx="0" cy="0"/>
+        </a:xfrm>
+      </p:grpSpPr>
+      <p:sp>
+        <p:nvSpPr>
+          <p:cNvPr id="5" name="內容版面配置區 4"/>
+          <p:cNvSpPr>
+            <a:spLocks noGrp="1"/>
+          </p:cNvSpPr>
+          <p:nvPr>
+            <p:ph idx="1"/>
+          </p:nvPr>
+        </p:nvSpPr>
+        <p:spPr>
+          <a:xfrm>
+            <a:off x="0" y="2084854"/>
+            <a:ext cx="12192000" cy="2404863"/>
+          </a:xfrm>
+        </p:spPr>
+        <p:txBody>
+          <a:bodyPr anchor="ctr">
+            <a:normAutofit/>
+          </a:bodyPr>
+          <a:lstStyle/>
           <a:p>
             <a:pPr algn="ctr">
               <a:buNone/>
             </a:pPr>
             <a:r>
-              <a:rPr lang="zh-TW" altLang="en-US" sz="6000" b="1" dirty="0">
-                <a:solidFill>
-                  <a:srgbClr val="000066"/>
-                </a:solidFill>
+              <a:rPr lang="zh-TW" altLang="en-US" sz="6400" b="1" dirty="0">
+                <a:solidFill>
+                  <a:schemeClr val="bg1"/>
+                </a:solidFill>
+                <a:effectLst>
+                  <a:glow rad="139700">
+                    <a:srgbClr val="339966"/>
+                  </a:glow>
+                </a:effectLst>
+                <a:latin typeface="微軟正黑體" pitchFamily="34" charset="-120"/>
+                <a:ea typeface="微軟正黑體" pitchFamily="34" charset="-120"/>
+              </a:rPr>
+              <a:t>遍地同慶  普世同聲</a:t>
+            </a:r>
+            <a:endParaRPr lang="en-US" altLang="zh-TW" sz="6400" b="1" dirty="0">
+              <a:solidFill>
+                <a:schemeClr val="bg1"/>
+              </a:solidFill>
+              <a:effectLst>
+                <a:glow rad="139700">
+                  <a:srgbClr val="339966"/>
+                </a:glow>
+              </a:effectLst>
+              <a:latin typeface="微軟正黑體" pitchFamily="34" charset="-120"/>
+              <a:ea typeface="微軟正黑體" pitchFamily="34" charset="-120"/>
+            </a:endParaRPr>
+          </a:p>
+          <a:p>
+            <a:pPr algn="ctr">
+              <a:buNone/>
+            </a:pPr>
+            <a:r>
+              <a:rPr lang="zh-TW" altLang="en-US" sz="6400" b="1" dirty="0">
+                <a:solidFill>
+                  <a:schemeClr val="bg1"/>
+                </a:solidFill>
+                <a:effectLst>
+                  <a:glow rad="139700">
+                    <a:srgbClr val="339966"/>
+                  </a:glow>
+                </a:effectLst>
+                <a:latin typeface="微軟正黑體" pitchFamily="34" charset="-120"/>
+                <a:ea typeface="微軟正黑體" pitchFamily="34" charset="-120"/>
+              </a:rPr>
+              <a:t>歌聲句句動聽</a:t>
+            </a:r>
+            <a:endParaRPr lang="en-US" altLang="zh-TW" sz="6400" b="1" dirty="0">
+              <a:solidFill>
+                <a:schemeClr val="bg1"/>
+              </a:solidFill>
+              <a:effectLst>
+                <a:glow rad="139700">
+                  <a:srgbClr val="339966"/>
+                </a:glow>
+              </a:effectLst>
+              <a:latin typeface="微軟正黑體" pitchFamily="34" charset="-120"/>
+              <a:ea typeface="微軟正黑體" pitchFamily="34" charset="-120"/>
+            </a:endParaRPr>
+          </a:p>
+        </p:txBody>
+      </p:sp>
+      <p:sp>
+        <p:nvSpPr>
+          <p:cNvPr id="2" name="TextBox 1">
+            <a:extLst>
+              <a:ext uri="{FF2B5EF4-FFF2-40B4-BE49-F238E27FC236}">
+                <a16:creationId xmlns:a16="http://schemas.microsoft.com/office/drawing/2014/main" id="{378725AE-D86F-D33A-D58F-984D35767F04}"/>
+              </a:ext>
+            </a:extLst>
+          </p:cNvPr>
+          <p:cNvSpPr txBox="1"/>
+          <p:nvPr/>
+        </p:nvSpPr>
+        <p:spPr>
+          <a:xfrm>
+            <a:off x="3639" y="5157194"/>
+            <a:ext cx="12192000" cy="584775"/>
+          </a:xfrm>
+          <a:prstGeom prst="rect">
+            <a:avLst/>
+          </a:prstGeom>
+          <a:noFill/>
+        </p:spPr>
+        <p:txBody>
+          <a:bodyPr wrap="square" rtlCol="0">
+            <a:spAutoFit/>
+          </a:bodyPr>
+          <a:lstStyle/>
+          <a:p>
+            <a:pPr algn="ctr"/>
+            <a:r>
+              <a:rPr lang="en-US" sz="3200" b="1" dirty="0">
+                <a:solidFill>
+                  <a:schemeClr val="bg1"/>
+                </a:solidFill>
+                <a:effectLst>
+                  <a:glow rad="139700">
+                    <a:srgbClr val="339966"/>
+                  </a:glow>
+                </a:effectLst>
                 <a:latin typeface="Microsoft JhengHei" panose="020B0604030504040204" pitchFamily="34" charset="-120"/>
                 <a:ea typeface="Microsoft JhengHei" panose="020B0604030504040204" pitchFamily="34" charset="-120"/>
               </a:rPr>
-              <a:t>花</a:t>
-            </a:r>
-            <a:r>
-              <a:rPr lang="zh-TW" altLang="en-US" sz="6000" b="1" dirty="0">
-                <a:solidFill>
-                  <a:srgbClr val="000066"/>
-                </a:solidFill>
+              <a:t>( </a:t>
+            </a:r>
+            <a:r>
+              <a:rPr lang="zh-CN" altLang="en-US" sz="3200" b="1" dirty="0">
+                <a:solidFill>
+                  <a:schemeClr val="bg1"/>
+                </a:solidFill>
+                <a:effectLst>
+                  <a:glow rad="139700">
+                    <a:srgbClr val="339966"/>
+                  </a:glow>
+                </a:effectLst>
                 <a:latin typeface="Microsoft JhengHei" panose="020B0604030504040204" pitchFamily="34" charset="-120"/>
                 <a:ea typeface="Microsoft JhengHei" panose="020B0604030504040204" pitchFamily="34" charset="-120"/>
               </a:rPr>
-              <a:t>擺</a:t>
-            </a:r>
-            <a:r>
-              <a:rPr lang="zh-TW" altLang="en-US" sz="6000" b="1" dirty="0">
-                <a:solidFill>
-                  <a:srgbClr val="000066"/>
-                </a:solidFill>
+              <a:t>副歌</a:t>
+            </a:r>
+            <a:r>
+              <a:rPr lang="en-US" sz="3200" b="1" dirty="0">
+                <a:solidFill>
+                  <a:schemeClr val="bg1"/>
+                </a:solidFill>
+                <a:effectLst>
+                  <a:glow rad="139700">
+                    <a:srgbClr val="339966"/>
+                  </a:glow>
+                </a:effectLst>
                 <a:latin typeface="Microsoft JhengHei" panose="020B0604030504040204" pitchFamily="34" charset="-120"/>
                 <a:ea typeface="Microsoft JhengHei" panose="020B0604030504040204" pitchFamily="34" charset="-120"/>
               </a:rPr>
-              <a:t>腰  草</a:t>
-            </a:r>
-            <a:r>
-              <a:rPr lang="zh-TW" altLang="en-US" sz="6000" b="1" dirty="0">
-                <a:solidFill>
-                  <a:srgbClr val="000066"/>
-                </a:solidFill>
+              <a:t> )</a:t>
+            </a:r>
+            <a:endParaRPr lang="vi-VN" sz="3200" b="1" dirty="0">
+              <a:solidFill>
+                <a:schemeClr val="bg1"/>
+              </a:solidFill>
+              <a:effectLst>
+                <a:glow rad="139700">
+                  <a:srgbClr val="339966"/>
+                </a:glow>
+              </a:effectLst>
+              <a:ea typeface="Microsoft JhengHei" panose="020B0604030504040204" pitchFamily="34" charset="-120"/>
+            </a:endParaRPr>
+          </a:p>
+        </p:txBody>
+      </p:sp>
+    </p:spTree>
+    <p:extLst>
+      <p:ext uri="{BB962C8B-B14F-4D97-AF65-F5344CB8AC3E}">
+        <p14:creationId xmlns:p14="http://schemas.microsoft.com/office/powerpoint/2010/main" val="2574155225"/>
+      </p:ext>
+    </p:extLst>
+  </p:cSld>
+  <p:clrMapOvr>
+    <a:masterClrMapping/>
+  </p:clrMapOvr>
+</p:sld>
+</file>
+
+<file path=ppt/slides/slide16.xml><?xml version="1.0" encoding="utf-8"?>
+<p:sld xmlns:a="http://schemas.openxmlformats.org/drawingml/2006/main" xmlns:r="http://schemas.openxmlformats.org/officeDocument/2006/relationships" xmlns:p="http://schemas.openxmlformats.org/presentationml/2006/main">
+  <p:cSld>
+    <p:spTree>
+      <p:nvGrpSpPr>
+        <p:cNvPr id="1" name=""/>
+        <p:cNvGrpSpPr/>
+        <p:nvPr/>
+      </p:nvGrpSpPr>
+      <p:grpSpPr>
+        <a:xfrm>
+          <a:off x="0" y="0"/>
+          <a:ext cx="0" cy="0"/>
+          <a:chOff x="0" y="0"/>
+          <a:chExt cx="0" cy="0"/>
+        </a:xfrm>
+      </p:grpSpPr>
+      <p:sp>
+        <p:nvSpPr>
+          <p:cNvPr id="5" name="內容版面配置區 4"/>
+          <p:cNvSpPr>
+            <a:spLocks noGrp="1"/>
+          </p:cNvSpPr>
+          <p:nvPr>
+            <p:ph idx="1"/>
+          </p:nvPr>
+        </p:nvSpPr>
+        <p:spPr>
+          <a:xfrm>
+            <a:off x="0" y="2084854"/>
+            <a:ext cx="12192000" cy="2404863"/>
+          </a:xfrm>
+        </p:spPr>
+        <p:txBody>
+          <a:bodyPr anchor="ctr">
+            <a:normAutofit/>
+          </a:bodyPr>
+          <a:lstStyle/>
+          <a:p>
+            <a:pPr algn="ctr">
+              <a:buNone/>
+            </a:pPr>
+            <a:r>
+              <a:rPr lang="zh-TW" altLang="en-US" sz="6400" b="1" dirty="0">
+                <a:solidFill>
+                  <a:schemeClr val="bg1"/>
+                </a:solidFill>
+                <a:effectLst>
+                  <a:glow rad="139700">
+                    <a:srgbClr val="339966"/>
+                  </a:glow>
+                </a:effectLst>
+                <a:latin typeface="微軟正黑體" pitchFamily="34" charset="-120"/>
+                <a:ea typeface="微軟正黑體" pitchFamily="34" charset="-120"/>
+              </a:rPr>
+              <a:t>永活耶穌  尊貴崇高</a:t>
+            </a:r>
+            <a:endParaRPr lang="en-US" altLang="zh-TW" sz="6400" b="1" dirty="0">
+              <a:solidFill>
+                <a:schemeClr val="bg1"/>
+              </a:solidFill>
+              <a:effectLst>
+                <a:glow rad="139700">
+                  <a:srgbClr val="339966"/>
+                </a:glow>
+              </a:effectLst>
+              <a:latin typeface="微軟正黑體" pitchFamily="34" charset="-120"/>
+              <a:ea typeface="微軟正黑體" pitchFamily="34" charset="-120"/>
+            </a:endParaRPr>
+          </a:p>
+          <a:p>
+            <a:pPr algn="ctr">
+              <a:buNone/>
+            </a:pPr>
+            <a:r>
+              <a:rPr lang="zh-TW" altLang="en-US" sz="6400" b="1" dirty="0">
+                <a:solidFill>
+                  <a:schemeClr val="bg1"/>
+                </a:solidFill>
+                <a:effectLst>
+                  <a:glow rad="139700">
+                    <a:srgbClr val="339966"/>
+                  </a:glow>
+                </a:effectLst>
+                <a:latin typeface="微軟正黑體" pitchFamily="34" charset="-120"/>
+                <a:ea typeface="微軟正黑體" pitchFamily="34" charset="-120"/>
+              </a:rPr>
+              <a:t>謳歌讚美祂至美至榮</a:t>
+            </a:r>
+            <a:endParaRPr lang="en-US" altLang="zh-TW" sz="6400" b="1" dirty="0">
+              <a:solidFill>
+                <a:schemeClr val="bg1"/>
+              </a:solidFill>
+              <a:effectLst>
+                <a:glow rad="139700">
+                  <a:srgbClr val="339966"/>
+                </a:glow>
+              </a:effectLst>
+              <a:latin typeface="微軟正黑體" pitchFamily="34" charset="-120"/>
+              <a:ea typeface="微軟正黑體" pitchFamily="34" charset="-120"/>
+            </a:endParaRPr>
+          </a:p>
+        </p:txBody>
+      </p:sp>
+      <p:sp>
+        <p:nvSpPr>
+          <p:cNvPr id="2" name="TextBox 1">
+            <a:extLst>
+              <a:ext uri="{FF2B5EF4-FFF2-40B4-BE49-F238E27FC236}">
+                <a16:creationId xmlns:a16="http://schemas.microsoft.com/office/drawing/2014/main" id="{378725AE-D86F-D33A-D58F-984D35767F04}"/>
+              </a:ext>
+            </a:extLst>
+          </p:cNvPr>
+          <p:cNvSpPr txBox="1"/>
+          <p:nvPr/>
+        </p:nvSpPr>
+        <p:spPr>
+          <a:xfrm>
+            <a:off x="3639" y="5157194"/>
+            <a:ext cx="12192000" cy="584775"/>
+          </a:xfrm>
+          <a:prstGeom prst="rect">
+            <a:avLst/>
+          </a:prstGeom>
+          <a:noFill/>
+        </p:spPr>
+        <p:txBody>
+          <a:bodyPr wrap="square" rtlCol="0">
+            <a:spAutoFit/>
+          </a:bodyPr>
+          <a:lstStyle/>
+          <a:p>
+            <a:pPr algn="ctr"/>
+            <a:r>
+              <a:rPr lang="en-US" sz="3200" b="1" dirty="0">
+                <a:solidFill>
+                  <a:schemeClr val="bg1"/>
+                </a:solidFill>
+                <a:effectLst>
+                  <a:glow rad="139700">
+                    <a:srgbClr val="339966"/>
+                  </a:glow>
+                </a:effectLst>
                 <a:latin typeface="Microsoft JhengHei" panose="020B0604030504040204" pitchFamily="34" charset="-120"/>
                 <a:ea typeface="Microsoft JhengHei" panose="020B0604030504040204" pitchFamily="34" charset="-120"/>
               </a:rPr>
-              <a:t>偷</a:t>
-            </a:r>
-            <a:r>
-              <a:rPr lang="zh-TW" altLang="en-US" sz="6000" b="1" dirty="0">
-                <a:solidFill>
-                  <a:srgbClr val="000066"/>
-                </a:solidFill>
+              <a:t>( </a:t>
+            </a:r>
+            <a:r>
+              <a:rPr lang="zh-CN" altLang="en-US" sz="3200" b="1" dirty="0">
+                <a:solidFill>
+                  <a:schemeClr val="bg1"/>
+                </a:solidFill>
+                <a:effectLst>
+                  <a:glow rad="139700">
+                    <a:srgbClr val="339966"/>
+                  </a:glow>
+                </a:effectLst>
                 <a:latin typeface="Microsoft JhengHei" panose="020B0604030504040204" pitchFamily="34" charset="-120"/>
                 <a:ea typeface="Microsoft JhengHei" panose="020B0604030504040204" pitchFamily="34" charset="-120"/>
               </a:rPr>
-              <a:t>笑</a:t>
-            </a:r>
-            <a:r>
-              <a:rPr lang="en-US" altLang="zh-TW" sz="6000" b="1" dirty="0">
-                <a:solidFill>
-                  <a:srgbClr val="000066"/>
-                </a:solidFill>
+              <a:t>副歌</a:t>
+            </a:r>
+            <a:r>
+              <a:rPr lang="en-US" sz="3200" b="1" dirty="0">
+                <a:solidFill>
+                  <a:schemeClr val="bg1"/>
+                </a:solidFill>
+                <a:effectLst>
+                  <a:glow rad="139700">
+                    <a:srgbClr val="339966"/>
+                  </a:glow>
+                </a:effectLst>
                 <a:latin typeface="Microsoft JhengHei" panose="020B0604030504040204" pitchFamily="34" charset="-120"/>
                 <a:ea typeface="Microsoft JhengHei" panose="020B0604030504040204" pitchFamily="34" charset="-120"/>
               </a:rPr>
-              <a:t> </a:t>
-            </a:r>
-            <a:r>
-              <a:rPr lang="en-US" altLang="zh-TW" sz="6000" b="1" dirty="0">
-                <a:solidFill>
-                  <a:srgbClr val="000066"/>
-                </a:solidFill>
+              <a:t> )</a:t>
+            </a:r>
+            <a:endParaRPr lang="vi-VN" sz="3200" b="1" dirty="0">
+              <a:solidFill>
+                <a:schemeClr val="bg1"/>
+              </a:solidFill>
+              <a:effectLst>
+                <a:glow rad="139700">
+                  <a:srgbClr val="339966"/>
+                </a:glow>
+              </a:effectLst>
+              <a:ea typeface="Microsoft JhengHei" panose="020B0604030504040204" pitchFamily="34" charset="-120"/>
+            </a:endParaRPr>
+          </a:p>
+        </p:txBody>
+      </p:sp>
+    </p:spTree>
+    <p:extLst>
+      <p:ext uri="{BB962C8B-B14F-4D97-AF65-F5344CB8AC3E}">
+        <p14:creationId xmlns:p14="http://schemas.microsoft.com/office/powerpoint/2010/main" val="2263143118"/>
+      </p:ext>
+    </p:extLst>
+  </p:cSld>
+  <p:clrMapOvr>
+    <a:masterClrMapping/>
+  </p:clrMapOvr>
+</p:sld>
+</file>
+
+<file path=ppt/slides/slide17.xml><?xml version="1.0" encoding="utf-8"?>
+<p:sld xmlns:a="http://schemas.openxmlformats.org/drawingml/2006/main" xmlns:r="http://schemas.openxmlformats.org/officeDocument/2006/relationships" xmlns:p="http://schemas.openxmlformats.org/presentationml/2006/main">
+  <p:cSld>
+    <p:spTree>
+      <p:nvGrpSpPr>
+        <p:cNvPr id="1" name=""/>
+        <p:cNvGrpSpPr/>
+        <p:nvPr/>
+      </p:nvGrpSpPr>
+      <p:grpSpPr>
+        <a:xfrm>
+          <a:off x="0" y="0"/>
+          <a:ext cx="0" cy="0"/>
+          <a:chOff x="0" y="0"/>
+          <a:chExt cx="0" cy="0"/>
+        </a:xfrm>
+      </p:grpSpPr>
+      <p:sp>
+        <p:nvSpPr>
+          <p:cNvPr id="5" name="內容版面配置區 4"/>
+          <p:cNvSpPr>
+            <a:spLocks noGrp="1"/>
+          </p:cNvSpPr>
+          <p:nvPr>
+            <p:ph idx="1"/>
+          </p:nvPr>
+        </p:nvSpPr>
+        <p:spPr>
+          <a:xfrm>
+            <a:off x="0" y="2084854"/>
+            <a:ext cx="12192000" cy="2404863"/>
+          </a:xfrm>
+        </p:spPr>
+        <p:txBody>
+          <a:bodyPr anchor="ctr">
+            <a:normAutofit/>
+          </a:bodyPr>
+          <a:lstStyle/>
+          <a:p>
+            <a:pPr algn="ctr">
+              <a:buNone/>
+            </a:pPr>
+            <a:r>
+              <a:rPr lang="zh-TW" altLang="en-US" sz="6400" b="1" dirty="0">
+                <a:solidFill>
+                  <a:schemeClr val="bg1"/>
+                </a:solidFill>
+                <a:effectLst>
+                  <a:glow rad="139700">
+                    <a:srgbClr val="339966"/>
+                  </a:glow>
+                </a:effectLst>
+                <a:latin typeface="微軟正黑體" pitchFamily="34" charset="-120"/>
+                <a:ea typeface="微軟正黑體" pitchFamily="34" charset="-120"/>
+              </a:rPr>
+              <a:t>遍地同慶  普世同聲</a:t>
+            </a:r>
+            <a:endParaRPr lang="en-US" altLang="zh-TW" sz="6400" b="1" dirty="0">
+              <a:solidFill>
+                <a:schemeClr val="bg1"/>
+              </a:solidFill>
+              <a:effectLst>
+                <a:glow rad="139700">
+                  <a:srgbClr val="339966"/>
+                </a:glow>
+              </a:effectLst>
+              <a:latin typeface="微軟正黑體" pitchFamily="34" charset="-120"/>
+              <a:ea typeface="微軟正黑體" pitchFamily="34" charset="-120"/>
+            </a:endParaRPr>
+          </a:p>
+          <a:p>
+            <a:pPr algn="ctr">
+              <a:buNone/>
+            </a:pPr>
+            <a:r>
+              <a:rPr lang="zh-TW" altLang="en-US" sz="6400" b="1" dirty="0">
+                <a:solidFill>
+                  <a:schemeClr val="bg1"/>
+                </a:solidFill>
+                <a:effectLst>
+                  <a:glow rad="139700">
+                    <a:srgbClr val="339966"/>
+                  </a:glow>
+                </a:effectLst>
+                <a:latin typeface="微軟正黑體" pitchFamily="34" charset="-120"/>
+                <a:ea typeface="微軟正黑體" pitchFamily="34" charset="-120"/>
+              </a:rPr>
+              <a:t>歌聲句句動聽</a:t>
+            </a:r>
+            <a:endParaRPr lang="en-US" altLang="zh-TW" sz="6400" b="1" dirty="0">
+              <a:solidFill>
+                <a:schemeClr val="bg1"/>
+              </a:solidFill>
+              <a:effectLst>
+                <a:glow rad="139700">
+                  <a:srgbClr val="339966"/>
+                </a:glow>
+              </a:effectLst>
+              <a:latin typeface="微軟正黑體" pitchFamily="34" charset="-120"/>
+              <a:ea typeface="微軟正黑體" pitchFamily="34" charset="-120"/>
+            </a:endParaRPr>
+          </a:p>
+        </p:txBody>
+      </p:sp>
+      <p:sp>
+        <p:nvSpPr>
+          <p:cNvPr id="2" name="TextBox 1">
+            <a:extLst>
+              <a:ext uri="{FF2B5EF4-FFF2-40B4-BE49-F238E27FC236}">
+                <a16:creationId xmlns:a16="http://schemas.microsoft.com/office/drawing/2014/main" id="{378725AE-D86F-D33A-D58F-984D35767F04}"/>
+              </a:ext>
+            </a:extLst>
+          </p:cNvPr>
+          <p:cNvSpPr txBox="1"/>
+          <p:nvPr/>
+        </p:nvSpPr>
+        <p:spPr>
+          <a:xfrm>
+            <a:off x="3639" y="5157194"/>
+            <a:ext cx="12192000" cy="584775"/>
+          </a:xfrm>
+          <a:prstGeom prst="rect">
+            <a:avLst/>
+          </a:prstGeom>
+          <a:noFill/>
+        </p:spPr>
+        <p:txBody>
+          <a:bodyPr wrap="square" rtlCol="0">
+            <a:spAutoFit/>
+          </a:bodyPr>
+          <a:lstStyle/>
+          <a:p>
+            <a:pPr algn="ctr"/>
+            <a:r>
+              <a:rPr lang="en-US" sz="3200" b="1" dirty="0">
+                <a:solidFill>
+                  <a:schemeClr val="bg1"/>
+                </a:solidFill>
+                <a:effectLst>
+                  <a:glow rad="139700">
+                    <a:srgbClr val="339966"/>
+                  </a:glow>
+                </a:effectLst>
                 <a:latin typeface="Microsoft JhengHei" panose="020B0604030504040204" pitchFamily="34" charset="-120"/>
                 <a:ea typeface="Microsoft JhengHei" panose="020B0604030504040204" pitchFamily="34" charset="-120"/>
               </a:rPr>
-              <a:t> </a:t>
-            </a:r>
-            <a:r>
-              <a:rPr lang="zh-TW" altLang="en-US" sz="6000" b="1" dirty="0">
-                <a:solidFill>
-                  <a:srgbClr val="000066"/>
-                </a:solidFill>
+              <a:t>( </a:t>
+            </a:r>
+            <a:r>
+              <a:rPr lang="zh-CN" altLang="en-US" sz="3200" b="1" dirty="0">
+                <a:solidFill>
+                  <a:schemeClr val="bg1"/>
+                </a:solidFill>
+                <a:effectLst>
+                  <a:glow rad="139700">
+                    <a:srgbClr val="339966"/>
+                  </a:glow>
+                </a:effectLst>
                 <a:latin typeface="Microsoft JhengHei" panose="020B0604030504040204" pitchFamily="34" charset="-120"/>
                 <a:ea typeface="Microsoft JhengHei" panose="020B0604030504040204" pitchFamily="34" charset="-120"/>
               </a:rPr>
-              <a:t>要</a:t>
-            </a:r>
-            <a:r>
-              <a:rPr lang="zh-TW" altLang="en-US" sz="6000" b="1" dirty="0">
-                <a:solidFill>
-                  <a:srgbClr val="000066"/>
-                </a:solidFill>
+              <a:t>結尾</a:t>
+            </a:r>
+            <a:r>
+              <a:rPr lang="en-US" sz="3200" b="1" dirty="0">
+                <a:solidFill>
+                  <a:schemeClr val="bg1"/>
+                </a:solidFill>
+                <a:effectLst>
+                  <a:glow rad="139700">
+                    <a:srgbClr val="339966"/>
+                  </a:glow>
+                </a:effectLst>
                 <a:latin typeface="Microsoft JhengHei" panose="020B0604030504040204" pitchFamily="34" charset="-120"/>
                 <a:ea typeface="Microsoft JhengHei" panose="020B0604030504040204" pitchFamily="34" charset="-120"/>
               </a:rPr>
-              <a:t>興奮做</a:t>
-            </a:r>
-            <a:r>
-              <a:rPr lang="zh-TW" altLang="en-US" sz="6000" b="1" dirty="0">
-                <a:solidFill>
-                  <a:srgbClr val="000066"/>
-                </a:solidFill>
-                <a:latin typeface="Microsoft JhengHei" panose="020B0604030504040204" pitchFamily="34" charset="-120"/>
-                <a:ea typeface="Microsoft JhengHei" panose="020B0604030504040204" pitchFamily="34" charset="-120"/>
-              </a:rPr>
-              <a:t>証</a:t>
-            </a:r>
-            <a:endParaRPr lang="en-US" altLang="zh-TW" sz="6000" b="1" dirty="0">
+              <a:t> )</a:t>
+            </a:r>
+            <a:endParaRPr lang="vi-VN" sz="3200" b="1" dirty="0">
               <a:solidFill>
-                <a:srgbClr val="000066"/>
+                <a:schemeClr val="bg1"/>
               </a:solidFill>
-              <a:latin typeface="Microsoft JhengHei" panose="020B0604030504040204" pitchFamily="34" charset="-120"/>
+              <a:effectLst>
+                <a:glow rad="139700">
+                  <a:srgbClr val="339966"/>
+                </a:glow>
+              </a:effectLst>
               <a:ea typeface="Microsoft JhengHei" panose="020B0604030504040204" pitchFamily="34" charset="-120"/>
             </a:endParaRPr>
           </a:p>
-          <a:p>
-            <a:pPr algn="ctr">
-              <a:buNone/>
-            </a:pPr>
-            <a:r>
-              <a:rPr lang="zh-TW" altLang="en-US" sz="6000" b="1" dirty="0">
-                <a:solidFill>
-                  <a:srgbClr val="000066"/>
-                </a:solidFill>
-                <a:latin typeface="Microsoft JhengHei" panose="020B0604030504040204" pitchFamily="34" charset="-120"/>
-                <a:ea typeface="Microsoft JhengHei" panose="020B0604030504040204" pitchFamily="34" charset="-120"/>
-              </a:rPr>
-              <a:t>頌</a:t>
-            </a:r>
-            <a:r>
-              <a:rPr lang="zh-TW" altLang="en-US" sz="6000" b="1" dirty="0">
-                <a:solidFill>
-                  <a:srgbClr val="000066"/>
-                </a:solidFill>
-                <a:latin typeface="Microsoft JhengHei" panose="020B0604030504040204" pitchFamily="34" charset="-120"/>
-                <a:ea typeface="Microsoft JhengHei" panose="020B0604030504040204" pitchFamily="34" charset="-120"/>
-              </a:rPr>
-              <a:t>唱主基督已經得勝</a:t>
-            </a:r>
-          </a:p>
         </p:txBody>
       </p:sp>
     </p:spTree>
+    <p:extLst>
+      <p:ext uri="{BB962C8B-B14F-4D97-AF65-F5344CB8AC3E}">
+        <p14:creationId xmlns:p14="http://schemas.microsoft.com/office/powerpoint/2010/main" val="2114627699"/>
+      </p:ext>
+    </p:extLst>
   </p:cSld>
   <p:clrMapOvr>
     <a:masterClrMapping/>
@@ -3472,34 +4774,239 @@
       </p:grpSpPr>
       <p:sp>
         <p:nvSpPr>
-          <p:cNvPr id="4" name="標題 3"/>
-          <p:cNvSpPr>
-            <a:spLocks noGrp="1"/>
-          </p:cNvSpPr>
-          <p:nvPr>
-            <p:ph type="title"/>
-          </p:nvPr>
-        </p:nvSpPr>
-        <p:spPr/>
-        <p:txBody>
-          <a:bodyPr>
+          <p:cNvPr id="5" name="內容版面配置區 4"/>
+          <p:cNvSpPr>
+            <a:spLocks noGrp="1"/>
+          </p:cNvSpPr>
+          <p:nvPr>
+            <p:ph idx="1"/>
+          </p:nvPr>
+        </p:nvSpPr>
+        <p:spPr>
+          <a:xfrm>
+            <a:off x="0" y="2084854"/>
+            <a:ext cx="12192000" cy="2404863"/>
+          </a:xfrm>
+        </p:spPr>
+        <p:txBody>
+          <a:bodyPr anchor="ctr">
             <a:normAutofit/>
           </a:bodyPr>
           <a:lstStyle/>
           <a:p>
-            <a:r>
-              <a:rPr lang="zh-TW" altLang="en-US" sz="4800" b="1" dirty="0">
-                <a:solidFill>
-                  <a:srgbClr val="000066"/>
-                </a:solidFill>
+            <a:pPr algn="ctr">
+              <a:buNone/>
+            </a:pPr>
+            <a:r>
+              <a:rPr lang="zh-TW" altLang="en-US" sz="6400" b="1" dirty="0">
+                <a:solidFill>
+                  <a:schemeClr val="bg1"/>
+                </a:solidFill>
+                <a:effectLst>
+                  <a:glow rad="139700">
+                    <a:srgbClr val="339966"/>
+                  </a:glow>
+                </a:effectLst>
+                <a:latin typeface="微軟正黑體" pitchFamily="34" charset="-120"/>
+                <a:ea typeface="微軟正黑體" pitchFamily="34" charset="-120"/>
+              </a:rPr>
+              <a:t>山擊掌  水高唱</a:t>
+            </a:r>
+            <a:r>
+              <a:rPr lang="en-US" altLang="zh-TW" sz="6400" b="1" dirty="0">
+                <a:solidFill>
+                  <a:schemeClr val="bg1"/>
+                </a:solidFill>
+                <a:effectLst>
+                  <a:glow rad="139700">
+                    <a:srgbClr val="339966"/>
+                  </a:glow>
+                </a:effectLst>
+                <a:latin typeface="微軟正黑體" pitchFamily="34" charset="-120"/>
+                <a:ea typeface="微軟正黑體" pitchFamily="34" charset="-120"/>
+              </a:rPr>
+              <a:t>  </a:t>
+            </a:r>
+            <a:r>
+              <a:rPr lang="zh-TW" altLang="en-US" sz="6400" b="1" dirty="0">
+                <a:solidFill>
+                  <a:schemeClr val="bg1"/>
+                </a:solidFill>
+                <a:effectLst>
+                  <a:glow rad="139700">
+                    <a:srgbClr val="339966"/>
+                  </a:glow>
+                </a:effectLst>
+                <a:latin typeface="微軟正黑體" pitchFamily="34" charset="-120"/>
+                <a:ea typeface="微軟正黑體" pitchFamily="34" charset="-120"/>
+              </a:rPr>
+              <a:t>眾星也和應</a:t>
+            </a:r>
+            <a:endParaRPr lang="en-US" altLang="zh-TW" sz="6400" b="1" dirty="0">
+              <a:solidFill>
+                <a:schemeClr val="bg1"/>
+              </a:solidFill>
+              <a:effectLst>
+                <a:glow rad="139700">
+                  <a:srgbClr val="339966"/>
+                </a:glow>
+              </a:effectLst>
+              <a:latin typeface="微軟正黑體" pitchFamily="34" charset="-120"/>
+              <a:ea typeface="微軟正黑體" pitchFamily="34" charset="-120"/>
+            </a:endParaRPr>
+          </a:p>
+          <a:p>
+            <a:pPr algn="ctr">
+              <a:buNone/>
+            </a:pPr>
+            <a:r>
+              <a:rPr lang="zh-TW" altLang="en-US" sz="6400" b="1" dirty="0">
+                <a:solidFill>
+                  <a:schemeClr val="bg1"/>
+                </a:solidFill>
+                <a:effectLst>
+                  <a:glow rad="139700">
+                    <a:srgbClr val="339966"/>
+                  </a:glow>
+                </a:effectLst>
+                <a:latin typeface="微軟正黑體" pitchFamily="34" charset="-120"/>
+                <a:ea typeface="微軟正黑體" pitchFamily="34" charset="-120"/>
+              </a:rPr>
+              <a:t>風輕吹  吹起讚之聲</a:t>
+            </a:r>
+            <a:endParaRPr lang="en-US" altLang="zh-TW" sz="6400" b="1" dirty="0">
+              <a:solidFill>
+                <a:schemeClr val="bg1"/>
+              </a:solidFill>
+              <a:effectLst>
+                <a:glow rad="139700">
+                  <a:srgbClr val="339966"/>
+                </a:glow>
+              </a:effectLst>
+              <a:latin typeface="微軟正黑體" pitchFamily="34" charset="-120"/>
+              <a:ea typeface="微軟正黑體" pitchFamily="34" charset="-120"/>
+            </a:endParaRPr>
+          </a:p>
+        </p:txBody>
+      </p:sp>
+      <p:sp>
+        <p:nvSpPr>
+          <p:cNvPr id="2" name="TextBox 1">
+            <a:extLst>
+              <a:ext uri="{FF2B5EF4-FFF2-40B4-BE49-F238E27FC236}">
+                <a16:creationId xmlns:a16="http://schemas.microsoft.com/office/drawing/2014/main" id="{378725AE-D86F-D33A-D58F-984D35767F04}"/>
+              </a:ext>
+            </a:extLst>
+          </p:cNvPr>
+          <p:cNvSpPr txBox="1"/>
+          <p:nvPr/>
+        </p:nvSpPr>
+        <p:spPr>
+          <a:xfrm>
+            <a:off x="3639" y="5157194"/>
+            <a:ext cx="12192000" cy="584775"/>
+          </a:xfrm>
+          <a:prstGeom prst="rect">
+            <a:avLst/>
+          </a:prstGeom>
+          <a:noFill/>
+        </p:spPr>
+        <p:txBody>
+          <a:bodyPr wrap="square" rtlCol="0">
+            <a:spAutoFit/>
+          </a:bodyPr>
+          <a:lstStyle/>
+          <a:p>
+            <a:pPr algn="ctr"/>
+            <a:r>
+              <a:rPr lang="en-US" sz="3200" b="1" dirty="0">
+                <a:solidFill>
+                  <a:schemeClr val="bg1"/>
+                </a:solidFill>
+                <a:effectLst>
+                  <a:glow rad="139700">
+                    <a:srgbClr val="339966"/>
+                  </a:glow>
+                </a:effectLst>
                 <a:latin typeface="Microsoft JhengHei" panose="020B0604030504040204" pitchFamily="34" charset="-120"/>
                 <a:ea typeface="Microsoft JhengHei" panose="020B0604030504040204" pitchFamily="34" charset="-120"/>
               </a:rPr>
-              <a:t>萬物讚之聲</a:t>
-            </a:r>
-          </a:p>
-        </p:txBody>
-      </p:sp>
+              <a:t>( </a:t>
+            </a:r>
+            <a:r>
+              <a:rPr lang="zh-CN" altLang="en-US" sz="3200" b="1" dirty="0">
+                <a:solidFill>
+                  <a:schemeClr val="bg1"/>
+                </a:solidFill>
+                <a:effectLst>
+                  <a:glow rad="139700">
+                    <a:srgbClr val="339966"/>
+                  </a:glow>
+                </a:effectLst>
+                <a:latin typeface="Microsoft JhengHei" panose="020B0604030504040204" pitchFamily="34" charset="-120"/>
+                <a:ea typeface="Microsoft JhengHei" panose="020B0604030504040204" pitchFamily="34" charset="-120"/>
+              </a:rPr>
+              <a:t>正歌</a:t>
+            </a:r>
+            <a:r>
+              <a:rPr lang="en-US" sz="3200" b="1" dirty="0">
+                <a:solidFill>
+                  <a:schemeClr val="bg1"/>
+                </a:solidFill>
+                <a:effectLst>
+                  <a:glow rad="139700">
+                    <a:srgbClr val="339966"/>
+                  </a:glow>
+                </a:effectLst>
+                <a:latin typeface="Microsoft JhengHei" panose="020B0604030504040204" pitchFamily="34" charset="-120"/>
+                <a:ea typeface="Microsoft JhengHei" panose="020B0604030504040204" pitchFamily="34" charset="-120"/>
+              </a:rPr>
+              <a:t> )</a:t>
+            </a:r>
+            <a:endParaRPr lang="vi-VN" sz="3200" b="1" dirty="0">
+              <a:solidFill>
+                <a:schemeClr val="bg1"/>
+              </a:solidFill>
+              <a:effectLst>
+                <a:glow rad="139700">
+                  <a:srgbClr val="339966"/>
+                </a:glow>
+              </a:effectLst>
+              <a:ea typeface="Microsoft JhengHei" panose="020B0604030504040204" pitchFamily="34" charset="-120"/>
+            </a:endParaRPr>
+          </a:p>
+        </p:txBody>
+      </p:sp>
+    </p:spTree>
+    <p:extLst>
+      <p:ext uri="{BB962C8B-B14F-4D97-AF65-F5344CB8AC3E}">
+        <p14:creationId xmlns:p14="http://schemas.microsoft.com/office/powerpoint/2010/main" val="2376400309"/>
+      </p:ext>
+    </p:extLst>
+  </p:cSld>
+  <p:clrMapOvr>
+    <a:masterClrMapping/>
+  </p:clrMapOvr>
+</p:sld>
+</file>
+
+<file path=ppt/slides/slide3.xml><?xml version="1.0" encoding="utf-8"?>
+<p:sld xmlns:a="http://schemas.openxmlformats.org/drawingml/2006/main" xmlns:r="http://schemas.openxmlformats.org/officeDocument/2006/relationships" xmlns:p="http://schemas.openxmlformats.org/presentationml/2006/main">
+  <p:cSld>
+    <p:spTree>
+      <p:nvGrpSpPr>
+        <p:cNvPr id="1" name=""/>
+        <p:cNvGrpSpPr/>
+        <p:nvPr/>
+      </p:nvGrpSpPr>
+      <p:grpSpPr>
+        <a:xfrm>
+          <a:off x="0" y="0"/>
+          <a:ext cx="0" cy="0"/>
+          <a:chOff x="0" y="0"/>
+          <a:chExt cx="0" cy="0"/>
+        </a:xfrm>
+      </p:grpSpPr>
       <p:sp>
         <p:nvSpPr>
           <p:cNvPr id="5" name="內容版面配置區 4"/>
@@ -3512,8 +5019,623 @@
         </p:nvSpPr>
         <p:spPr>
           <a:xfrm>
-            <a:off x="1524000" y="1600201"/>
-            <a:ext cx="9144000" cy="4525963"/>
+            <a:off x="0" y="2084854"/>
+            <a:ext cx="12192000" cy="2404863"/>
+          </a:xfrm>
+        </p:spPr>
+        <p:txBody>
+          <a:bodyPr anchor="ctr">
+            <a:normAutofit/>
+          </a:bodyPr>
+          <a:lstStyle/>
+          <a:p>
+            <a:pPr algn="ctr">
+              <a:buNone/>
+            </a:pPr>
+            <a:r>
+              <a:rPr lang="zh-TW" altLang="en-US" sz="6400" b="1" dirty="0">
+                <a:solidFill>
+                  <a:schemeClr val="bg1"/>
+                </a:solidFill>
+                <a:effectLst>
+                  <a:glow rad="139700">
+                    <a:srgbClr val="339966"/>
+                  </a:glow>
+                </a:effectLst>
+                <a:latin typeface="微軟正黑體" pitchFamily="34" charset="-120"/>
+                <a:ea typeface="微軟正黑體" pitchFamily="34" charset="-120"/>
+              </a:rPr>
+              <a:t>花擺腰  草偷笑  要興奮做証</a:t>
+            </a:r>
+            <a:endParaRPr lang="en-US" altLang="zh-TW" sz="6400" b="1" dirty="0">
+              <a:solidFill>
+                <a:schemeClr val="bg1"/>
+              </a:solidFill>
+              <a:effectLst>
+                <a:glow rad="139700">
+                  <a:srgbClr val="339966"/>
+                </a:glow>
+              </a:effectLst>
+              <a:latin typeface="微軟正黑體" pitchFamily="34" charset="-120"/>
+              <a:ea typeface="微軟正黑體" pitchFamily="34" charset="-120"/>
+            </a:endParaRPr>
+          </a:p>
+          <a:p>
+            <a:pPr algn="ctr">
+              <a:buNone/>
+            </a:pPr>
+            <a:r>
+              <a:rPr lang="zh-TW" altLang="en-US" sz="6400" b="1" dirty="0">
+                <a:solidFill>
+                  <a:schemeClr val="bg1"/>
+                </a:solidFill>
+                <a:effectLst>
+                  <a:glow rad="139700">
+                    <a:srgbClr val="339966"/>
+                  </a:glow>
+                </a:effectLst>
+                <a:latin typeface="微軟正黑體" pitchFamily="34" charset="-120"/>
+                <a:ea typeface="微軟正黑體" pitchFamily="34" charset="-120"/>
+              </a:rPr>
+              <a:t>頌唱主基督已經得勝</a:t>
+            </a:r>
+            <a:endParaRPr lang="en-US" altLang="zh-TW" sz="6400" b="1" dirty="0">
+              <a:solidFill>
+                <a:schemeClr val="bg1"/>
+              </a:solidFill>
+              <a:effectLst>
+                <a:glow rad="139700">
+                  <a:srgbClr val="339966"/>
+                </a:glow>
+              </a:effectLst>
+              <a:latin typeface="微軟正黑體" pitchFamily="34" charset="-120"/>
+              <a:ea typeface="微軟正黑體" pitchFamily="34" charset="-120"/>
+            </a:endParaRPr>
+          </a:p>
+        </p:txBody>
+      </p:sp>
+      <p:sp>
+        <p:nvSpPr>
+          <p:cNvPr id="2" name="TextBox 1">
+            <a:extLst>
+              <a:ext uri="{FF2B5EF4-FFF2-40B4-BE49-F238E27FC236}">
+                <a16:creationId xmlns:a16="http://schemas.microsoft.com/office/drawing/2014/main" id="{378725AE-D86F-D33A-D58F-984D35767F04}"/>
+              </a:ext>
+            </a:extLst>
+          </p:cNvPr>
+          <p:cNvSpPr txBox="1"/>
+          <p:nvPr/>
+        </p:nvSpPr>
+        <p:spPr>
+          <a:xfrm>
+            <a:off x="3639" y="5157194"/>
+            <a:ext cx="12192000" cy="584775"/>
+          </a:xfrm>
+          <a:prstGeom prst="rect">
+            <a:avLst/>
+          </a:prstGeom>
+          <a:noFill/>
+        </p:spPr>
+        <p:txBody>
+          <a:bodyPr wrap="square" rtlCol="0">
+            <a:spAutoFit/>
+          </a:bodyPr>
+          <a:lstStyle/>
+          <a:p>
+            <a:pPr algn="ctr"/>
+            <a:r>
+              <a:rPr lang="en-US" sz="3200" b="1" dirty="0">
+                <a:solidFill>
+                  <a:schemeClr val="bg1"/>
+                </a:solidFill>
+                <a:effectLst>
+                  <a:glow rad="139700">
+                    <a:srgbClr val="339966"/>
+                  </a:glow>
+                </a:effectLst>
+                <a:latin typeface="Microsoft JhengHei" panose="020B0604030504040204" pitchFamily="34" charset="-120"/>
+                <a:ea typeface="Microsoft JhengHei" panose="020B0604030504040204" pitchFamily="34" charset="-120"/>
+              </a:rPr>
+              <a:t>( </a:t>
+            </a:r>
+            <a:r>
+              <a:rPr lang="zh-CN" altLang="en-US" sz="3200" b="1" dirty="0">
+                <a:solidFill>
+                  <a:schemeClr val="bg1"/>
+                </a:solidFill>
+                <a:effectLst>
+                  <a:glow rad="139700">
+                    <a:srgbClr val="339966"/>
+                  </a:glow>
+                </a:effectLst>
+                <a:latin typeface="Microsoft JhengHei" panose="020B0604030504040204" pitchFamily="34" charset="-120"/>
+                <a:ea typeface="Microsoft JhengHei" panose="020B0604030504040204" pitchFamily="34" charset="-120"/>
+              </a:rPr>
+              <a:t>正歌</a:t>
+            </a:r>
+            <a:r>
+              <a:rPr lang="en-US" sz="3200" b="1" dirty="0">
+                <a:solidFill>
+                  <a:schemeClr val="bg1"/>
+                </a:solidFill>
+                <a:effectLst>
+                  <a:glow rad="139700">
+                    <a:srgbClr val="339966"/>
+                  </a:glow>
+                </a:effectLst>
+                <a:latin typeface="Microsoft JhengHei" panose="020B0604030504040204" pitchFamily="34" charset="-120"/>
+                <a:ea typeface="Microsoft JhengHei" panose="020B0604030504040204" pitchFamily="34" charset="-120"/>
+              </a:rPr>
+              <a:t> )</a:t>
+            </a:r>
+            <a:endParaRPr lang="vi-VN" sz="3200" b="1" dirty="0">
+              <a:solidFill>
+                <a:schemeClr val="bg1"/>
+              </a:solidFill>
+              <a:effectLst>
+                <a:glow rad="139700">
+                  <a:srgbClr val="339966"/>
+                </a:glow>
+              </a:effectLst>
+              <a:ea typeface="Microsoft JhengHei" panose="020B0604030504040204" pitchFamily="34" charset="-120"/>
+            </a:endParaRPr>
+          </a:p>
+        </p:txBody>
+      </p:sp>
+    </p:spTree>
+    <p:extLst>
+      <p:ext uri="{BB962C8B-B14F-4D97-AF65-F5344CB8AC3E}">
+        <p14:creationId xmlns:p14="http://schemas.microsoft.com/office/powerpoint/2010/main" val="2448273808"/>
+      </p:ext>
+    </p:extLst>
+  </p:cSld>
+  <p:clrMapOvr>
+    <a:masterClrMapping/>
+  </p:clrMapOvr>
+</p:sld>
+</file>
+
+<file path=ppt/slides/slide4.xml><?xml version="1.0" encoding="utf-8"?>
+<p:sld xmlns:a="http://schemas.openxmlformats.org/drawingml/2006/main" xmlns:r="http://schemas.openxmlformats.org/officeDocument/2006/relationships" xmlns:p="http://schemas.openxmlformats.org/presentationml/2006/main">
+  <p:cSld>
+    <p:spTree>
+      <p:nvGrpSpPr>
+        <p:cNvPr id="1" name=""/>
+        <p:cNvGrpSpPr/>
+        <p:nvPr/>
+      </p:nvGrpSpPr>
+      <p:grpSpPr>
+        <a:xfrm>
+          <a:off x="0" y="0"/>
+          <a:ext cx="0" cy="0"/>
+          <a:chOff x="0" y="0"/>
+          <a:chExt cx="0" cy="0"/>
+        </a:xfrm>
+      </p:grpSpPr>
+      <p:sp>
+        <p:nvSpPr>
+          <p:cNvPr id="5" name="內容版面配置區 4"/>
+          <p:cNvSpPr>
+            <a:spLocks noGrp="1"/>
+          </p:cNvSpPr>
+          <p:nvPr>
+            <p:ph idx="1"/>
+          </p:nvPr>
+        </p:nvSpPr>
+        <p:spPr>
+          <a:xfrm>
+            <a:off x="0" y="2084854"/>
+            <a:ext cx="12192000" cy="2404863"/>
+          </a:xfrm>
+        </p:spPr>
+        <p:txBody>
+          <a:bodyPr anchor="ctr">
+            <a:normAutofit/>
+          </a:bodyPr>
+          <a:lstStyle/>
+          <a:p>
+            <a:pPr algn="ctr">
+              <a:buNone/>
+            </a:pPr>
+            <a:r>
+              <a:rPr lang="zh-TW" altLang="en-US" sz="6400" b="1" dirty="0">
+                <a:solidFill>
+                  <a:schemeClr val="bg1"/>
+                </a:solidFill>
+                <a:effectLst>
+                  <a:glow rad="139700">
+                    <a:srgbClr val="339966"/>
+                  </a:glow>
+                </a:effectLst>
+                <a:latin typeface="微軟正黑體" pitchFamily="34" charset="-120"/>
+                <a:ea typeface="微軟正黑體" pitchFamily="34" charset="-120"/>
+              </a:rPr>
+              <a:t>永活耶穌  尊貴崇高</a:t>
+            </a:r>
+            <a:endParaRPr lang="en-US" altLang="zh-TW" sz="6400" b="1" dirty="0">
+              <a:solidFill>
+                <a:schemeClr val="bg1"/>
+              </a:solidFill>
+              <a:effectLst>
+                <a:glow rad="139700">
+                  <a:srgbClr val="339966"/>
+                </a:glow>
+              </a:effectLst>
+              <a:latin typeface="微軟正黑體" pitchFamily="34" charset="-120"/>
+              <a:ea typeface="微軟正黑體" pitchFamily="34" charset="-120"/>
+            </a:endParaRPr>
+          </a:p>
+          <a:p>
+            <a:pPr algn="ctr">
+              <a:buNone/>
+            </a:pPr>
+            <a:r>
+              <a:rPr lang="zh-TW" altLang="en-US" sz="6400" b="1" dirty="0">
+                <a:solidFill>
+                  <a:schemeClr val="bg1"/>
+                </a:solidFill>
+                <a:effectLst>
+                  <a:glow rad="139700">
+                    <a:srgbClr val="339966"/>
+                  </a:glow>
+                </a:effectLst>
+                <a:latin typeface="微軟正黑體" pitchFamily="34" charset="-120"/>
+                <a:ea typeface="微軟正黑體" pitchFamily="34" charset="-120"/>
+              </a:rPr>
+              <a:t>謳歌讚美祂至美至榮</a:t>
+            </a:r>
+            <a:endParaRPr lang="en-US" altLang="zh-TW" sz="6400" b="1" dirty="0">
+              <a:solidFill>
+                <a:schemeClr val="bg1"/>
+              </a:solidFill>
+              <a:effectLst>
+                <a:glow rad="139700">
+                  <a:srgbClr val="339966"/>
+                </a:glow>
+              </a:effectLst>
+              <a:latin typeface="微軟正黑體" pitchFamily="34" charset="-120"/>
+              <a:ea typeface="微軟正黑體" pitchFamily="34" charset="-120"/>
+            </a:endParaRPr>
+          </a:p>
+        </p:txBody>
+      </p:sp>
+      <p:sp>
+        <p:nvSpPr>
+          <p:cNvPr id="2" name="TextBox 1">
+            <a:extLst>
+              <a:ext uri="{FF2B5EF4-FFF2-40B4-BE49-F238E27FC236}">
+                <a16:creationId xmlns:a16="http://schemas.microsoft.com/office/drawing/2014/main" id="{378725AE-D86F-D33A-D58F-984D35767F04}"/>
+              </a:ext>
+            </a:extLst>
+          </p:cNvPr>
+          <p:cNvSpPr txBox="1"/>
+          <p:nvPr/>
+        </p:nvSpPr>
+        <p:spPr>
+          <a:xfrm>
+            <a:off x="3639" y="5157194"/>
+            <a:ext cx="12192000" cy="584775"/>
+          </a:xfrm>
+          <a:prstGeom prst="rect">
+            <a:avLst/>
+          </a:prstGeom>
+          <a:noFill/>
+        </p:spPr>
+        <p:txBody>
+          <a:bodyPr wrap="square" rtlCol="0">
+            <a:spAutoFit/>
+          </a:bodyPr>
+          <a:lstStyle/>
+          <a:p>
+            <a:pPr algn="ctr"/>
+            <a:r>
+              <a:rPr lang="en-US" sz="3200" b="1" dirty="0">
+                <a:solidFill>
+                  <a:schemeClr val="bg1"/>
+                </a:solidFill>
+                <a:effectLst>
+                  <a:glow rad="139700">
+                    <a:srgbClr val="339966"/>
+                  </a:glow>
+                </a:effectLst>
+                <a:latin typeface="Microsoft JhengHei" panose="020B0604030504040204" pitchFamily="34" charset="-120"/>
+                <a:ea typeface="Microsoft JhengHei" panose="020B0604030504040204" pitchFamily="34" charset="-120"/>
+              </a:rPr>
+              <a:t>( </a:t>
+            </a:r>
+            <a:r>
+              <a:rPr lang="zh-CN" altLang="en-US" sz="3200" b="1" dirty="0">
+                <a:solidFill>
+                  <a:schemeClr val="bg1"/>
+                </a:solidFill>
+                <a:effectLst>
+                  <a:glow rad="139700">
+                    <a:srgbClr val="339966"/>
+                  </a:glow>
+                </a:effectLst>
+                <a:latin typeface="Microsoft JhengHei" panose="020B0604030504040204" pitchFamily="34" charset="-120"/>
+                <a:ea typeface="Microsoft JhengHei" panose="020B0604030504040204" pitchFamily="34" charset="-120"/>
+              </a:rPr>
+              <a:t>副歌</a:t>
+            </a:r>
+            <a:r>
+              <a:rPr lang="en-US" sz="3200" b="1" dirty="0">
+                <a:solidFill>
+                  <a:schemeClr val="bg1"/>
+                </a:solidFill>
+                <a:effectLst>
+                  <a:glow rad="139700">
+                    <a:srgbClr val="339966"/>
+                  </a:glow>
+                </a:effectLst>
+                <a:latin typeface="Microsoft JhengHei" panose="020B0604030504040204" pitchFamily="34" charset="-120"/>
+                <a:ea typeface="Microsoft JhengHei" panose="020B0604030504040204" pitchFamily="34" charset="-120"/>
+              </a:rPr>
+              <a:t> )</a:t>
+            </a:r>
+            <a:endParaRPr lang="vi-VN" sz="3200" b="1" dirty="0">
+              <a:solidFill>
+                <a:schemeClr val="bg1"/>
+              </a:solidFill>
+              <a:effectLst>
+                <a:glow rad="139700">
+                  <a:srgbClr val="339966"/>
+                </a:glow>
+              </a:effectLst>
+              <a:ea typeface="Microsoft JhengHei" panose="020B0604030504040204" pitchFamily="34" charset="-120"/>
+            </a:endParaRPr>
+          </a:p>
+        </p:txBody>
+      </p:sp>
+    </p:spTree>
+    <p:extLst>
+      <p:ext uri="{BB962C8B-B14F-4D97-AF65-F5344CB8AC3E}">
+        <p14:creationId xmlns:p14="http://schemas.microsoft.com/office/powerpoint/2010/main" val="2406595524"/>
+      </p:ext>
+    </p:extLst>
+  </p:cSld>
+  <p:clrMapOvr>
+    <a:masterClrMapping/>
+  </p:clrMapOvr>
+</p:sld>
+</file>
+
+<file path=ppt/slides/slide5.xml><?xml version="1.0" encoding="utf-8"?>
+<p:sld xmlns:a="http://schemas.openxmlformats.org/drawingml/2006/main" xmlns:r="http://schemas.openxmlformats.org/officeDocument/2006/relationships" xmlns:p="http://schemas.openxmlformats.org/presentationml/2006/main">
+  <p:cSld>
+    <p:spTree>
+      <p:nvGrpSpPr>
+        <p:cNvPr id="1" name=""/>
+        <p:cNvGrpSpPr/>
+        <p:nvPr/>
+      </p:nvGrpSpPr>
+      <p:grpSpPr>
+        <a:xfrm>
+          <a:off x="0" y="0"/>
+          <a:ext cx="0" cy="0"/>
+          <a:chOff x="0" y="0"/>
+          <a:chExt cx="0" cy="0"/>
+        </a:xfrm>
+      </p:grpSpPr>
+      <p:sp>
+        <p:nvSpPr>
+          <p:cNvPr id="5" name="內容版面配置區 4"/>
+          <p:cNvSpPr>
+            <a:spLocks noGrp="1"/>
+          </p:cNvSpPr>
+          <p:nvPr>
+            <p:ph idx="1"/>
+          </p:nvPr>
+        </p:nvSpPr>
+        <p:spPr>
+          <a:xfrm>
+            <a:off x="0" y="2084854"/>
+            <a:ext cx="12192000" cy="2404863"/>
+          </a:xfrm>
+        </p:spPr>
+        <p:txBody>
+          <a:bodyPr anchor="ctr">
+            <a:normAutofit/>
+          </a:bodyPr>
+          <a:lstStyle/>
+          <a:p>
+            <a:pPr algn="ctr">
+              <a:buNone/>
+            </a:pPr>
+            <a:r>
+              <a:rPr lang="zh-TW" altLang="en-US" sz="6400" b="1" dirty="0">
+                <a:solidFill>
+                  <a:schemeClr val="bg1"/>
+                </a:solidFill>
+                <a:effectLst>
+                  <a:glow rad="139700">
+                    <a:srgbClr val="339966"/>
+                  </a:glow>
+                </a:effectLst>
+                <a:latin typeface="微軟正黑體" pitchFamily="34" charset="-120"/>
+                <a:ea typeface="微軟正黑體" pitchFamily="34" charset="-120"/>
+              </a:rPr>
+              <a:t>遍地同慶  普世同聲</a:t>
+            </a:r>
+            <a:endParaRPr lang="en-US" altLang="zh-TW" sz="6400" b="1" dirty="0">
+              <a:solidFill>
+                <a:schemeClr val="bg1"/>
+              </a:solidFill>
+              <a:effectLst>
+                <a:glow rad="139700">
+                  <a:srgbClr val="339966"/>
+                </a:glow>
+              </a:effectLst>
+              <a:latin typeface="微軟正黑體" pitchFamily="34" charset="-120"/>
+              <a:ea typeface="微軟正黑體" pitchFamily="34" charset="-120"/>
+            </a:endParaRPr>
+          </a:p>
+          <a:p>
+            <a:pPr algn="ctr">
+              <a:buNone/>
+            </a:pPr>
+            <a:r>
+              <a:rPr lang="zh-TW" altLang="en-US" sz="6400" b="1" dirty="0">
+                <a:solidFill>
+                  <a:schemeClr val="bg1"/>
+                </a:solidFill>
+                <a:effectLst>
+                  <a:glow rad="139700">
+                    <a:srgbClr val="339966"/>
+                  </a:glow>
+                </a:effectLst>
+                <a:latin typeface="微軟正黑體" pitchFamily="34" charset="-120"/>
+                <a:ea typeface="微軟正黑體" pitchFamily="34" charset="-120"/>
+              </a:rPr>
+              <a:t>歌聲句句動聽</a:t>
+            </a:r>
+            <a:endParaRPr lang="en-US" altLang="zh-TW" sz="6400" b="1" dirty="0">
+              <a:solidFill>
+                <a:schemeClr val="bg1"/>
+              </a:solidFill>
+              <a:effectLst>
+                <a:glow rad="139700">
+                  <a:srgbClr val="339966"/>
+                </a:glow>
+              </a:effectLst>
+              <a:latin typeface="微軟正黑體" pitchFamily="34" charset="-120"/>
+              <a:ea typeface="微軟正黑體" pitchFamily="34" charset="-120"/>
+            </a:endParaRPr>
+          </a:p>
+        </p:txBody>
+      </p:sp>
+      <p:sp>
+        <p:nvSpPr>
+          <p:cNvPr id="2" name="TextBox 1">
+            <a:extLst>
+              <a:ext uri="{FF2B5EF4-FFF2-40B4-BE49-F238E27FC236}">
+                <a16:creationId xmlns:a16="http://schemas.microsoft.com/office/drawing/2014/main" id="{378725AE-D86F-D33A-D58F-984D35767F04}"/>
+              </a:ext>
+            </a:extLst>
+          </p:cNvPr>
+          <p:cNvSpPr txBox="1"/>
+          <p:nvPr/>
+        </p:nvSpPr>
+        <p:spPr>
+          <a:xfrm>
+            <a:off x="3639" y="5157194"/>
+            <a:ext cx="12192000" cy="584775"/>
+          </a:xfrm>
+          <a:prstGeom prst="rect">
+            <a:avLst/>
+          </a:prstGeom>
+          <a:noFill/>
+        </p:spPr>
+        <p:txBody>
+          <a:bodyPr wrap="square" rtlCol="0">
+            <a:spAutoFit/>
+          </a:bodyPr>
+          <a:lstStyle/>
+          <a:p>
+            <a:pPr algn="ctr"/>
+            <a:r>
+              <a:rPr lang="en-US" sz="3200" b="1" dirty="0">
+                <a:solidFill>
+                  <a:schemeClr val="bg1"/>
+                </a:solidFill>
+                <a:effectLst>
+                  <a:glow rad="139700">
+                    <a:srgbClr val="339966"/>
+                  </a:glow>
+                </a:effectLst>
+                <a:latin typeface="Microsoft JhengHei" panose="020B0604030504040204" pitchFamily="34" charset="-120"/>
+                <a:ea typeface="Microsoft JhengHei" panose="020B0604030504040204" pitchFamily="34" charset="-120"/>
+              </a:rPr>
+              <a:t>( </a:t>
+            </a:r>
+            <a:r>
+              <a:rPr lang="zh-CN" altLang="en-US" sz="3200" b="1" dirty="0">
+                <a:solidFill>
+                  <a:schemeClr val="bg1"/>
+                </a:solidFill>
+                <a:effectLst>
+                  <a:glow rad="139700">
+                    <a:srgbClr val="339966"/>
+                  </a:glow>
+                </a:effectLst>
+                <a:latin typeface="Microsoft JhengHei" panose="020B0604030504040204" pitchFamily="34" charset="-120"/>
+                <a:ea typeface="Microsoft JhengHei" panose="020B0604030504040204" pitchFamily="34" charset="-120"/>
+              </a:rPr>
+              <a:t>副歌</a:t>
+            </a:r>
+            <a:r>
+              <a:rPr lang="en-US" sz="3200" b="1" dirty="0">
+                <a:solidFill>
+                  <a:schemeClr val="bg1"/>
+                </a:solidFill>
+                <a:effectLst>
+                  <a:glow rad="139700">
+                    <a:srgbClr val="339966"/>
+                  </a:glow>
+                </a:effectLst>
+                <a:latin typeface="Microsoft JhengHei" panose="020B0604030504040204" pitchFamily="34" charset="-120"/>
+                <a:ea typeface="Microsoft JhengHei" panose="020B0604030504040204" pitchFamily="34" charset="-120"/>
+              </a:rPr>
+              <a:t> )</a:t>
+            </a:r>
+            <a:endParaRPr lang="vi-VN" sz="3200" b="1" dirty="0">
+              <a:solidFill>
+                <a:schemeClr val="bg1"/>
+              </a:solidFill>
+              <a:effectLst>
+                <a:glow rad="139700">
+                  <a:srgbClr val="339966"/>
+                </a:glow>
+              </a:effectLst>
+              <a:ea typeface="Microsoft JhengHei" panose="020B0604030504040204" pitchFamily="34" charset="-120"/>
+            </a:endParaRPr>
+          </a:p>
+        </p:txBody>
+      </p:sp>
+    </p:spTree>
+    <p:extLst>
+      <p:ext uri="{BB962C8B-B14F-4D97-AF65-F5344CB8AC3E}">
+        <p14:creationId xmlns:p14="http://schemas.microsoft.com/office/powerpoint/2010/main" val="3417813313"/>
+      </p:ext>
+    </p:extLst>
+  </p:cSld>
+  <p:clrMapOvr>
+    <a:masterClrMapping/>
+  </p:clrMapOvr>
+</p:sld>
+</file>
+
+<file path=ppt/slides/slide6.xml><?xml version="1.0" encoding="utf-8"?>
+<p:sld xmlns:a="http://schemas.openxmlformats.org/drawingml/2006/main" xmlns:r="http://schemas.openxmlformats.org/officeDocument/2006/relationships" xmlns:p="http://schemas.openxmlformats.org/presentationml/2006/main">
+  <p:cSld>
+    <p:spTree>
+      <p:nvGrpSpPr>
+        <p:cNvPr id="1" name=""/>
+        <p:cNvGrpSpPr/>
+        <p:nvPr/>
+      </p:nvGrpSpPr>
+      <p:grpSpPr>
+        <a:xfrm>
+          <a:off x="0" y="0"/>
+          <a:ext cx="0" cy="0"/>
+          <a:chOff x="0" y="0"/>
+          <a:chExt cx="0" cy="0"/>
+        </a:xfrm>
+      </p:grpSpPr>
+      <p:sp>
+        <p:nvSpPr>
+          <p:cNvPr id="4" name="標題 3"/>
+          <p:cNvSpPr>
+            <a:spLocks noGrp="1"/>
+          </p:cNvSpPr>
+          <p:nvPr>
+            <p:ph type="title"/>
+          </p:nvPr>
+        </p:nvSpPr>
+        <p:spPr>
+          <a:xfrm>
+            <a:off x="0" y="2756925"/>
+            <a:ext cx="12192000" cy="1143000"/>
           </a:xfrm>
         </p:spPr>
         <p:txBody>
@@ -3522,89 +5644,697 @@
           </a:bodyPr>
           <a:lstStyle/>
           <a:p>
+            <a:r>
+              <a:rPr lang="zh-CN" altLang="en-US" sz="7200" b="1" i="1" dirty="0">
+                <a:solidFill>
+                  <a:schemeClr val="bg1"/>
+                </a:solidFill>
+                <a:effectLst>
+                  <a:glow rad="139700">
+                    <a:srgbClr val="339966"/>
+                  </a:glow>
+                  <a:outerShdw blurRad="38100" dist="38100" dir="2700000" algn="tl">
+                    <a:srgbClr val="000000">
+                      <a:alpha val="43137"/>
+                    </a:srgbClr>
+                  </a:outerShdw>
+                </a:effectLst>
+                <a:latin typeface="微軟正黑體" pitchFamily="34" charset="-120"/>
+                <a:ea typeface="微軟正黑體" pitchFamily="34" charset="-120"/>
+              </a:rPr>
+              <a:t>萬物讚之聲</a:t>
+            </a:r>
+            <a:endParaRPr lang="zh-TW" altLang="en-US" sz="7200" b="1" i="1" dirty="0">
+              <a:solidFill>
+                <a:schemeClr val="bg1"/>
+              </a:solidFill>
+              <a:effectLst>
+                <a:glow rad="139700">
+                  <a:srgbClr val="339966"/>
+                </a:glow>
+                <a:outerShdw blurRad="38100" dist="38100" dir="2700000" algn="tl">
+                  <a:srgbClr val="000000">
+                    <a:alpha val="43137"/>
+                  </a:srgbClr>
+                </a:outerShdw>
+              </a:effectLst>
+              <a:latin typeface="微軟正黑體" pitchFamily="34" charset="-120"/>
+              <a:ea typeface="微軟正黑體" pitchFamily="34" charset="-120"/>
+            </a:endParaRPr>
+          </a:p>
+        </p:txBody>
+      </p:sp>
+    </p:spTree>
+    <p:extLst>
+      <p:ext uri="{BB962C8B-B14F-4D97-AF65-F5344CB8AC3E}">
+        <p14:creationId xmlns:p14="http://schemas.microsoft.com/office/powerpoint/2010/main" val="619269295"/>
+      </p:ext>
+    </p:extLst>
+  </p:cSld>
+  <p:clrMapOvr>
+    <a:masterClrMapping/>
+  </p:clrMapOvr>
+</p:sld>
+</file>
+
+<file path=ppt/slides/slide7.xml><?xml version="1.0" encoding="utf-8"?>
+<p:sld xmlns:a="http://schemas.openxmlformats.org/drawingml/2006/main" xmlns:r="http://schemas.openxmlformats.org/officeDocument/2006/relationships" xmlns:p="http://schemas.openxmlformats.org/presentationml/2006/main">
+  <p:cSld>
+    <p:spTree>
+      <p:nvGrpSpPr>
+        <p:cNvPr id="1" name=""/>
+        <p:cNvGrpSpPr/>
+        <p:nvPr/>
+      </p:nvGrpSpPr>
+      <p:grpSpPr>
+        <a:xfrm>
+          <a:off x="0" y="0"/>
+          <a:ext cx="0" cy="0"/>
+          <a:chOff x="0" y="0"/>
+          <a:chExt cx="0" cy="0"/>
+        </a:xfrm>
+      </p:grpSpPr>
+      <p:sp>
+        <p:nvSpPr>
+          <p:cNvPr id="5" name="內容版面配置區 4"/>
+          <p:cNvSpPr>
+            <a:spLocks noGrp="1"/>
+          </p:cNvSpPr>
+          <p:nvPr>
+            <p:ph idx="1"/>
+          </p:nvPr>
+        </p:nvSpPr>
+        <p:spPr>
+          <a:xfrm>
+            <a:off x="0" y="2084854"/>
+            <a:ext cx="12192000" cy="2404863"/>
+          </a:xfrm>
+        </p:spPr>
+        <p:txBody>
+          <a:bodyPr anchor="ctr">
+            <a:normAutofit/>
+          </a:bodyPr>
+          <a:lstStyle/>
+          <a:p>
             <a:pPr algn="ctr">
               <a:buNone/>
             </a:pPr>
             <a:r>
-              <a:rPr lang="zh-TW" altLang="en-US" sz="6000" b="1" dirty="0">
-                <a:solidFill>
-                  <a:srgbClr val="000066"/>
-                </a:solidFill>
+              <a:rPr lang="zh-TW" altLang="en-US" sz="6400" b="1" dirty="0">
+                <a:solidFill>
+                  <a:schemeClr val="bg1"/>
+                </a:solidFill>
+                <a:effectLst>
+                  <a:glow rad="139700">
+                    <a:srgbClr val="339966"/>
+                  </a:glow>
+                </a:effectLst>
+                <a:latin typeface="微軟正黑體" pitchFamily="34" charset="-120"/>
+                <a:ea typeface="微軟正黑體" pitchFamily="34" charset="-120"/>
+              </a:rPr>
+              <a:t>山擊掌  水高唱</a:t>
+            </a:r>
+            <a:r>
+              <a:rPr lang="en-US" altLang="zh-TW" sz="6400" b="1" dirty="0">
+                <a:solidFill>
+                  <a:schemeClr val="bg1"/>
+                </a:solidFill>
+                <a:effectLst>
+                  <a:glow rad="139700">
+                    <a:srgbClr val="339966"/>
+                  </a:glow>
+                </a:effectLst>
+                <a:latin typeface="微軟正黑體" pitchFamily="34" charset="-120"/>
+                <a:ea typeface="微軟正黑體" pitchFamily="34" charset="-120"/>
+              </a:rPr>
+              <a:t>  </a:t>
+            </a:r>
+            <a:r>
+              <a:rPr lang="zh-TW" altLang="en-US" sz="6400" b="1" dirty="0">
+                <a:solidFill>
+                  <a:schemeClr val="bg1"/>
+                </a:solidFill>
+                <a:effectLst>
+                  <a:glow rad="139700">
+                    <a:srgbClr val="339966"/>
+                  </a:glow>
+                </a:effectLst>
+                <a:latin typeface="微軟正黑體" pitchFamily="34" charset="-120"/>
+                <a:ea typeface="微軟正黑體" pitchFamily="34" charset="-120"/>
+              </a:rPr>
+              <a:t>眾星也和應</a:t>
+            </a:r>
+            <a:endParaRPr lang="en-US" altLang="zh-TW" sz="6400" b="1" dirty="0">
+              <a:solidFill>
+                <a:schemeClr val="bg1"/>
+              </a:solidFill>
+              <a:effectLst>
+                <a:glow rad="139700">
+                  <a:srgbClr val="339966"/>
+                </a:glow>
+              </a:effectLst>
+              <a:latin typeface="微軟正黑體" pitchFamily="34" charset="-120"/>
+              <a:ea typeface="微軟正黑體" pitchFamily="34" charset="-120"/>
+            </a:endParaRPr>
+          </a:p>
+          <a:p>
+            <a:pPr algn="ctr">
+              <a:buNone/>
+            </a:pPr>
+            <a:r>
+              <a:rPr lang="zh-TW" altLang="en-US" sz="6400" b="1" dirty="0">
+                <a:solidFill>
+                  <a:schemeClr val="bg1"/>
+                </a:solidFill>
+                <a:effectLst>
+                  <a:glow rad="139700">
+                    <a:srgbClr val="339966"/>
+                  </a:glow>
+                </a:effectLst>
+                <a:latin typeface="微軟正黑體" pitchFamily="34" charset="-120"/>
+                <a:ea typeface="微軟正黑體" pitchFamily="34" charset="-120"/>
+              </a:rPr>
+              <a:t>風輕吹  吹起讚之聲</a:t>
+            </a:r>
+            <a:endParaRPr lang="en-US" altLang="zh-TW" sz="6400" b="1" dirty="0">
+              <a:solidFill>
+                <a:schemeClr val="bg1"/>
+              </a:solidFill>
+              <a:effectLst>
+                <a:glow rad="139700">
+                  <a:srgbClr val="339966"/>
+                </a:glow>
+              </a:effectLst>
+              <a:latin typeface="微軟正黑體" pitchFamily="34" charset="-120"/>
+              <a:ea typeface="微軟正黑體" pitchFamily="34" charset="-120"/>
+            </a:endParaRPr>
+          </a:p>
+        </p:txBody>
+      </p:sp>
+      <p:sp>
+        <p:nvSpPr>
+          <p:cNvPr id="2" name="TextBox 1">
+            <a:extLst>
+              <a:ext uri="{FF2B5EF4-FFF2-40B4-BE49-F238E27FC236}">
+                <a16:creationId xmlns:a16="http://schemas.microsoft.com/office/drawing/2014/main" id="{378725AE-D86F-D33A-D58F-984D35767F04}"/>
+              </a:ext>
+            </a:extLst>
+          </p:cNvPr>
+          <p:cNvSpPr txBox="1"/>
+          <p:nvPr/>
+        </p:nvSpPr>
+        <p:spPr>
+          <a:xfrm>
+            <a:off x="3639" y="5157194"/>
+            <a:ext cx="12192000" cy="584775"/>
+          </a:xfrm>
+          <a:prstGeom prst="rect">
+            <a:avLst/>
+          </a:prstGeom>
+          <a:noFill/>
+        </p:spPr>
+        <p:txBody>
+          <a:bodyPr wrap="square" rtlCol="0">
+            <a:spAutoFit/>
+          </a:bodyPr>
+          <a:lstStyle/>
+          <a:p>
+            <a:pPr algn="ctr"/>
+            <a:r>
+              <a:rPr lang="en-US" sz="3200" b="1" dirty="0">
+                <a:solidFill>
+                  <a:schemeClr val="bg1"/>
+                </a:solidFill>
+                <a:effectLst>
+                  <a:glow rad="139700">
+                    <a:srgbClr val="339966"/>
+                  </a:glow>
+                </a:effectLst>
                 <a:latin typeface="Microsoft JhengHei" panose="020B0604030504040204" pitchFamily="34" charset="-120"/>
                 <a:ea typeface="Microsoft JhengHei" panose="020B0604030504040204" pitchFamily="34" charset="-120"/>
               </a:rPr>
-              <a:t>永活耶穌  尊貴崇高</a:t>
-            </a:r>
-            <a:endParaRPr lang="en-US" altLang="zh-TW" sz="6000" b="1" dirty="0">
+              <a:t>( </a:t>
+            </a:r>
+            <a:r>
+              <a:rPr lang="zh-CN" altLang="en-US" sz="3200" b="1" dirty="0">
+                <a:solidFill>
+                  <a:schemeClr val="bg1"/>
+                </a:solidFill>
+                <a:effectLst>
+                  <a:glow rad="139700">
+                    <a:srgbClr val="339966"/>
+                  </a:glow>
+                </a:effectLst>
+                <a:latin typeface="Microsoft JhengHei" panose="020B0604030504040204" pitchFamily="34" charset="-120"/>
+                <a:ea typeface="Microsoft JhengHei" panose="020B0604030504040204" pitchFamily="34" charset="-120"/>
+              </a:rPr>
+              <a:t>正歌</a:t>
+            </a:r>
+            <a:r>
+              <a:rPr lang="en-US" sz="3200" b="1" dirty="0">
+                <a:solidFill>
+                  <a:schemeClr val="bg1"/>
+                </a:solidFill>
+                <a:effectLst>
+                  <a:glow rad="139700">
+                    <a:srgbClr val="339966"/>
+                  </a:glow>
+                </a:effectLst>
+                <a:latin typeface="Microsoft JhengHei" panose="020B0604030504040204" pitchFamily="34" charset="-120"/>
+                <a:ea typeface="Microsoft JhengHei" panose="020B0604030504040204" pitchFamily="34" charset="-120"/>
+              </a:rPr>
+              <a:t> )</a:t>
+            </a:r>
+            <a:endParaRPr lang="vi-VN" sz="3200" b="1" dirty="0">
               <a:solidFill>
-                <a:srgbClr val="000066"/>
+                <a:schemeClr val="bg1"/>
               </a:solidFill>
-              <a:latin typeface="Microsoft JhengHei" panose="020B0604030504040204" pitchFamily="34" charset="-120"/>
+              <a:effectLst>
+                <a:glow rad="139700">
+                  <a:srgbClr val="339966"/>
+                </a:glow>
+              </a:effectLst>
               <a:ea typeface="Microsoft JhengHei" panose="020B0604030504040204" pitchFamily="34" charset="-120"/>
             </a:endParaRPr>
           </a:p>
+        </p:txBody>
+      </p:sp>
+    </p:spTree>
+    <p:extLst>
+      <p:ext uri="{BB962C8B-B14F-4D97-AF65-F5344CB8AC3E}">
+        <p14:creationId xmlns:p14="http://schemas.microsoft.com/office/powerpoint/2010/main" val="3699958506"/>
+      </p:ext>
+    </p:extLst>
+  </p:cSld>
+  <p:clrMapOvr>
+    <a:masterClrMapping/>
+  </p:clrMapOvr>
+</p:sld>
+</file>
+
+<file path=ppt/slides/slide8.xml><?xml version="1.0" encoding="utf-8"?>
+<p:sld xmlns:a="http://schemas.openxmlformats.org/drawingml/2006/main" xmlns:r="http://schemas.openxmlformats.org/officeDocument/2006/relationships" xmlns:p="http://schemas.openxmlformats.org/presentationml/2006/main">
+  <p:cSld>
+    <p:spTree>
+      <p:nvGrpSpPr>
+        <p:cNvPr id="1" name=""/>
+        <p:cNvGrpSpPr/>
+        <p:nvPr/>
+      </p:nvGrpSpPr>
+      <p:grpSpPr>
+        <a:xfrm>
+          <a:off x="0" y="0"/>
+          <a:ext cx="0" cy="0"/>
+          <a:chOff x="0" y="0"/>
+          <a:chExt cx="0" cy="0"/>
+        </a:xfrm>
+      </p:grpSpPr>
+      <p:sp>
+        <p:nvSpPr>
+          <p:cNvPr id="5" name="內容版面配置區 4"/>
+          <p:cNvSpPr>
+            <a:spLocks noGrp="1"/>
+          </p:cNvSpPr>
+          <p:nvPr>
+            <p:ph idx="1"/>
+          </p:nvPr>
+        </p:nvSpPr>
+        <p:spPr>
+          <a:xfrm>
+            <a:off x="0" y="2084854"/>
+            <a:ext cx="12192000" cy="2404863"/>
+          </a:xfrm>
+        </p:spPr>
+        <p:txBody>
+          <a:bodyPr anchor="ctr">
+            <a:normAutofit/>
+          </a:bodyPr>
+          <a:lstStyle/>
           <a:p>
             <a:pPr algn="ctr">
               <a:buNone/>
             </a:pPr>
             <a:r>
-              <a:rPr lang="zh-TW" altLang="en-US" sz="6000" b="1" dirty="0">
-                <a:solidFill>
-                  <a:srgbClr val="000066"/>
-                </a:solidFill>
+              <a:rPr lang="zh-TW" altLang="en-US" sz="6400" b="1" dirty="0">
+                <a:solidFill>
+                  <a:schemeClr val="bg1"/>
+                </a:solidFill>
+                <a:effectLst>
+                  <a:glow rad="139700">
+                    <a:srgbClr val="339966"/>
+                  </a:glow>
+                </a:effectLst>
+                <a:latin typeface="微軟正黑體" pitchFamily="34" charset="-120"/>
+                <a:ea typeface="微軟正黑體" pitchFamily="34" charset="-120"/>
+              </a:rPr>
+              <a:t>花擺腰  草偷笑  要興奮做証</a:t>
+            </a:r>
+            <a:endParaRPr lang="en-US" altLang="zh-TW" sz="6400" b="1" dirty="0">
+              <a:solidFill>
+                <a:schemeClr val="bg1"/>
+              </a:solidFill>
+              <a:effectLst>
+                <a:glow rad="139700">
+                  <a:srgbClr val="339966"/>
+                </a:glow>
+              </a:effectLst>
+              <a:latin typeface="微軟正黑體" pitchFamily="34" charset="-120"/>
+              <a:ea typeface="微軟正黑體" pitchFamily="34" charset="-120"/>
+            </a:endParaRPr>
+          </a:p>
+          <a:p>
+            <a:pPr algn="ctr">
+              <a:buNone/>
+            </a:pPr>
+            <a:r>
+              <a:rPr lang="zh-TW" altLang="en-US" sz="6400" b="1" dirty="0">
+                <a:solidFill>
+                  <a:schemeClr val="bg1"/>
+                </a:solidFill>
+                <a:effectLst>
+                  <a:glow rad="139700">
+                    <a:srgbClr val="339966"/>
+                  </a:glow>
+                </a:effectLst>
+                <a:latin typeface="微軟正黑體" pitchFamily="34" charset="-120"/>
+                <a:ea typeface="微軟正黑體" pitchFamily="34" charset="-120"/>
+              </a:rPr>
+              <a:t>頌唱主基督已經得勝</a:t>
+            </a:r>
+            <a:endParaRPr lang="en-US" altLang="zh-TW" sz="6400" b="1" dirty="0">
+              <a:solidFill>
+                <a:schemeClr val="bg1"/>
+              </a:solidFill>
+              <a:effectLst>
+                <a:glow rad="139700">
+                  <a:srgbClr val="339966"/>
+                </a:glow>
+              </a:effectLst>
+              <a:latin typeface="微軟正黑體" pitchFamily="34" charset="-120"/>
+              <a:ea typeface="微軟正黑體" pitchFamily="34" charset="-120"/>
+            </a:endParaRPr>
+          </a:p>
+        </p:txBody>
+      </p:sp>
+      <p:sp>
+        <p:nvSpPr>
+          <p:cNvPr id="2" name="TextBox 1">
+            <a:extLst>
+              <a:ext uri="{FF2B5EF4-FFF2-40B4-BE49-F238E27FC236}">
+                <a16:creationId xmlns:a16="http://schemas.microsoft.com/office/drawing/2014/main" id="{378725AE-D86F-D33A-D58F-984D35767F04}"/>
+              </a:ext>
+            </a:extLst>
+          </p:cNvPr>
+          <p:cNvSpPr txBox="1"/>
+          <p:nvPr/>
+        </p:nvSpPr>
+        <p:spPr>
+          <a:xfrm>
+            <a:off x="3639" y="5157194"/>
+            <a:ext cx="12192000" cy="584775"/>
+          </a:xfrm>
+          <a:prstGeom prst="rect">
+            <a:avLst/>
+          </a:prstGeom>
+          <a:noFill/>
+        </p:spPr>
+        <p:txBody>
+          <a:bodyPr wrap="square" rtlCol="0">
+            <a:spAutoFit/>
+          </a:bodyPr>
+          <a:lstStyle/>
+          <a:p>
+            <a:pPr algn="ctr"/>
+            <a:r>
+              <a:rPr lang="en-US" sz="3200" b="1" dirty="0">
+                <a:solidFill>
+                  <a:schemeClr val="bg1"/>
+                </a:solidFill>
+                <a:effectLst>
+                  <a:glow rad="139700">
+                    <a:srgbClr val="339966"/>
+                  </a:glow>
+                </a:effectLst>
                 <a:latin typeface="Microsoft JhengHei" panose="020B0604030504040204" pitchFamily="34" charset="-120"/>
                 <a:ea typeface="Microsoft JhengHei" panose="020B0604030504040204" pitchFamily="34" charset="-120"/>
               </a:rPr>
-              <a:t>謳歌讚美祂至美至榮</a:t>
-            </a:r>
-            <a:endParaRPr lang="en-US" altLang="zh-TW" sz="6000" b="1" dirty="0">
+              <a:t>( </a:t>
+            </a:r>
+            <a:r>
+              <a:rPr lang="zh-CN" altLang="en-US" sz="3200" b="1" dirty="0">
+                <a:solidFill>
+                  <a:schemeClr val="bg1"/>
+                </a:solidFill>
+                <a:effectLst>
+                  <a:glow rad="139700">
+                    <a:srgbClr val="339966"/>
+                  </a:glow>
+                </a:effectLst>
+                <a:latin typeface="Microsoft JhengHei" panose="020B0604030504040204" pitchFamily="34" charset="-120"/>
+                <a:ea typeface="Microsoft JhengHei" panose="020B0604030504040204" pitchFamily="34" charset="-120"/>
+              </a:rPr>
+              <a:t>正歌</a:t>
+            </a:r>
+            <a:r>
+              <a:rPr lang="en-US" sz="3200" b="1" dirty="0">
+                <a:solidFill>
+                  <a:schemeClr val="bg1"/>
+                </a:solidFill>
+                <a:effectLst>
+                  <a:glow rad="139700">
+                    <a:srgbClr val="339966"/>
+                  </a:glow>
+                </a:effectLst>
+                <a:latin typeface="Microsoft JhengHei" panose="020B0604030504040204" pitchFamily="34" charset="-120"/>
+                <a:ea typeface="Microsoft JhengHei" panose="020B0604030504040204" pitchFamily="34" charset="-120"/>
+              </a:rPr>
+              <a:t> )</a:t>
+            </a:r>
+            <a:endParaRPr lang="vi-VN" sz="3200" b="1" dirty="0">
               <a:solidFill>
-                <a:srgbClr val="000066"/>
+                <a:schemeClr val="bg1"/>
               </a:solidFill>
-              <a:latin typeface="Microsoft JhengHei" panose="020B0604030504040204" pitchFamily="34" charset="-120"/>
+              <a:effectLst>
+                <a:glow rad="139700">
+                  <a:srgbClr val="339966"/>
+                </a:glow>
+              </a:effectLst>
               <a:ea typeface="Microsoft JhengHei" panose="020B0604030504040204" pitchFamily="34" charset="-120"/>
             </a:endParaRPr>
           </a:p>
+        </p:txBody>
+      </p:sp>
+    </p:spTree>
+    <p:extLst>
+      <p:ext uri="{BB962C8B-B14F-4D97-AF65-F5344CB8AC3E}">
+        <p14:creationId xmlns:p14="http://schemas.microsoft.com/office/powerpoint/2010/main" val="3397634100"/>
+      </p:ext>
+    </p:extLst>
+  </p:cSld>
+  <p:clrMapOvr>
+    <a:masterClrMapping/>
+  </p:clrMapOvr>
+</p:sld>
+</file>
+
+<file path=ppt/slides/slide9.xml><?xml version="1.0" encoding="utf-8"?>
+<p:sld xmlns:a="http://schemas.openxmlformats.org/drawingml/2006/main" xmlns:r="http://schemas.openxmlformats.org/officeDocument/2006/relationships" xmlns:p="http://schemas.openxmlformats.org/presentationml/2006/main">
+  <p:cSld>
+    <p:spTree>
+      <p:nvGrpSpPr>
+        <p:cNvPr id="1" name=""/>
+        <p:cNvGrpSpPr/>
+        <p:nvPr/>
+      </p:nvGrpSpPr>
+      <p:grpSpPr>
+        <a:xfrm>
+          <a:off x="0" y="0"/>
+          <a:ext cx="0" cy="0"/>
+          <a:chOff x="0" y="0"/>
+          <a:chExt cx="0" cy="0"/>
+        </a:xfrm>
+      </p:grpSpPr>
+      <p:sp>
+        <p:nvSpPr>
+          <p:cNvPr id="5" name="內容版面配置區 4"/>
+          <p:cNvSpPr>
+            <a:spLocks noGrp="1"/>
+          </p:cNvSpPr>
+          <p:nvPr>
+            <p:ph idx="1"/>
+          </p:nvPr>
+        </p:nvSpPr>
+        <p:spPr>
+          <a:xfrm>
+            <a:off x="0" y="2084854"/>
+            <a:ext cx="12192000" cy="2404863"/>
+          </a:xfrm>
+        </p:spPr>
+        <p:txBody>
+          <a:bodyPr anchor="ctr">
+            <a:normAutofit/>
+          </a:bodyPr>
+          <a:lstStyle/>
           <a:p>
             <a:pPr algn="ctr">
               <a:buNone/>
             </a:pPr>
             <a:r>
-              <a:rPr lang="zh-TW" altLang="en-US" sz="6000" b="1" dirty="0">
-                <a:solidFill>
-                  <a:srgbClr val="000066"/>
-                </a:solidFill>
+              <a:rPr lang="zh-TW" altLang="en-US" sz="6400" b="1" dirty="0">
+                <a:solidFill>
+                  <a:schemeClr val="bg1"/>
+                </a:solidFill>
+                <a:effectLst>
+                  <a:glow rad="139700">
+                    <a:srgbClr val="339966"/>
+                  </a:glow>
+                </a:effectLst>
+                <a:latin typeface="微軟正黑體" pitchFamily="34" charset="-120"/>
+                <a:ea typeface="微軟正黑體" pitchFamily="34" charset="-120"/>
+              </a:rPr>
+              <a:t>永活耶穌  尊貴崇高</a:t>
+            </a:r>
+            <a:endParaRPr lang="en-US" altLang="zh-TW" sz="6400" b="1" dirty="0">
+              <a:solidFill>
+                <a:schemeClr val="bg1"/>
+              </a:solidFill>
+              <a:effectLst>
+                <a:glow rad="139700">
+                  <a:srgbClr val="339966"/>
+                </a:glow>
+              </a:effectLst>
+              <a:latin typeface="微軟正黑體" pitchFamily="34" charset="-120"/>
+              <a:ea typeface="微軟正黑體" pitchFamily="34" charset="-120"/>
+            </a:endParaRPr>
+          </a:p>
+          <a:p>
+            <a:pPr algn="ctr">
+              <a:buNone/>
+            </a:pPr>
+            <a:r>
+              <a:rPr lang="zh-TW" altLang="en-US" sz="6400" b="1" dirty="0">
+                <a:solidFill>
+                  <a:schemeClr val="bg1"/>
+                </a:solidFill>
+                <a:effectLst>
+                  <a:glow rad="139700">
+                    <a:srgbClr val="339966"/>
+                  </a:glow>
+                </a:effectLst>
+                <a:latin typeface="微軟正黑體" pitchFamily="34" charset="-120"/>
+                <a:ea typeface="微軟正黑體" pitchFamily="34" charset="-120"/>
+              </a:rPr>
+              <a:t>謳歌讚美祂至美至榮</a:t>
+            </a:r>
+            <a:endParaRPr lang="en-US" altLang="zh-TW" sz="6400" b="1" dirty="0">
+              <a:solidFill>
+                <a:schemeClr val="bg1"/>
+              </a:solidFill>
+              <a:effectLst>
+                <a:glow rad="139700">
+                  <a:srgbClr val="339966"/>
+                </a:glow>
+              </a:effectLst>
+              <a:latin typeface="微軟正黑體" pitchFamily="34" charset="-120"/>
+              <a:ea typeface="微軟正黑體" pitchFamily="34" charset="-120"/>
+            </a:endParaRPr>
+          </a:p>
+        </p:txBody>
+      </p:sp>
+      <p:sp>
+        <p:nvSpPr>
+          <p:cNvPr id="2" name="TextBox 1">
+            <a:extLst>
+              <a:ext uri="{FF2B5EF4-FFF2-40B4-BE49-F238E27FC236}">
+                <a16:creationId xmlns:a16="http://schemas.microsoft.com/office/drawing/2014/main" id="{378725AE-D86F-D33A-D58F-984D35767F04}"/>
+              </a:ext>
+            </a:extLst>
+          </p:cNvPr>
+          <p:cNvSpPr txBox="1"/>
+          <p:nvPr/>
+        </p:nvSpPr>
+        <p:spPr>
+          <a:xfrm>
+            <a:off x="3639" y="5157194"/>
+            <a:ext cx="12192000" cy="584775"/>
+          </a:xfrm>
+          <a:prstGeom prst="rect">
+            <a:avLst/>
+          </a:prstGeom>
+          <a:noFill/>
+        </p:spPr>
+        <p:txBody>
+          <a:bodyPr wrap="square" rtlCol="0">
+            <a:spAutoFit/>
+          </a:bodyPr>
+          <a:lstStyle/>
+          <a:p>
+            <a:pPr algn="ctr"/>
+            <a:r>
+              <a:rPr lang="en-US" sz="3200" b="1" dirty="0">
+                <a:solidFill>
+                  <a:schemeClr val="bg1"/>
+                </a:solidFill>
+                <a:effectLst>
+                  <a:glow rad="139700">
+                    <a:srgbClr val="339966"/>
+                  </a:glow>
+                </a:effectLst>
                 <a:latin typeface="Microsoft JhengHei" panose="020B0604030504040204" pitchFamily="34" charset="-120"/>
                 <a:ea typeface="Microsoft JhengHei" panose="020B0604030504040204" pitchFamily="34" charset="-120"/>
               </a:rPr>
-              <a:t>遍地同慶  普世同聲</a:t>
-            </a:r>
-            <a:endParaRPr lang="en-US" altLang="zh-TW" sz="6000" b="1" dirty="0">
+              <a:t>( </a:t>
+            </a:r>
+            <a:r>
+              <a:rPr lang="zh-CN" altLang="en-US" sz="3200" b="1" dirty="0">
+                <a:solidFill>
+                  <a:schemeClr val="bg1"/>
+                </a:solidFill>
+                <a:effectLst>
+                  <a:glow rad="139700">
+                    <a:srgbClr val="339966"/>
+                  </a:glow>
+                </a:effectLst>
+                <a:latin typeface="Microsoft JhengHei" panose="020B0604030504040204" pitchFamily="34" charset="-120"/>
+                <a:ea typeface="Microsoft JhengHei" panose="020B0604030504040204" pitchFamily="34" charset="-120"/>
+              </a:rPr>
+              <a:t>副歌</a:t>
+            </a:r>
+            <a:r>
+              <a:rPr lang="en-US" sz="3200" b="1" dirty="0">
+                <a:solidFill>
+                  <a:schemeClr val="bg1"/>
+                </a:solidFill>
+                <a:effectLst>
+                  <a:glow rad="139700">
+                    <a:srgbClr val="339966"/>
+                  </a:glow>
+                </a:effectLst>
+                <a:latin typeface="Microsoft JhengHei" panose="020B0604030504040204" pitchFamily="34" charset="-120"/>
+                <a:ea typeface="Microsoft JhengHei" panose="020B0604030504040204" pitchFamily="34" charset="-120"/>
+              </a:rPr>
+              <a:t> )</a:t>
+            </a:r>
+            <a:endParaRPr lang="vi-VN" sz="3200" b="1" dirty="0">
               <a:solidFill>
-                <a:srgbClr val="000066"/>
+                <a:schemeClr val="bg1"/>
               </a:solidFill>
-              <a:latin typeface="Microsoft JhengHei" panose="020B0604030504040204" pitchFamily="34" charset="-120"/>
+              <a:effectLst>
+                <a:glow rad="139700">
+                  <a:srgbClr val="339966"/>
+                </a:glow>
+              </a:effectLst>
               <a:ea typeface="Microsoft JhengHei" panose="020B0604030504040204" pitchFamily="34" charset="-120"/>
             </a:endParaRPr>
           </a:p>
-          <a:p>
-            <a:pPr algn="ctr">
-              <a:buNone/>
-            </a:pPr>
-            <a:r>
-              <a:rPr lang="zh-TW" altLang="en-US" sz="6000" b="1" dirty="0">
-                <a:solidFill>
-                  <a:srgbClr val="000066"/>
-                </a:solidFill>
-                <a:latin typeface="Microsoft JhengHei" panose="020B0604030504040204" pitchFamily="34" charset="-120"/>
-                <a:ea typeface="Microsoft JhengHei" panose="020B0604030504040204" pitchFamily="34" charset="-120"/>
-              </a:rPr>
-              <a:t>歌聲句句動聽</a:t>
-            </a:r>
-          </a:p>
         </p:txBody>
       </p:sp>
     </p:spTree>
+    <p:extLst>
+      <p:ext uri="{BB962C8B-B14F-4D97-AF65-F5344CB8AC3E}">
+        <p14:creationId xmlns:p14="http://schemas.microsoft.com/office/powerpoint/2010/main" val="2799033426"/>
+      </p:ext>
+    </p:extLst>
   </p:cSld>
   <p:clrMapOvr>
     <a:masterClrMapping/>
@@ -3894,7 +6624,7 @@
   <a:extraClrSchemeLst/>
   <a:extLst>
     <a:ext uri="{05A4C25C-085E-4340-85A3-A5531E510DB2}">
-      <thm15:themeFamily xmlns:thm15="http://schemas.microsoft.com/office/thememl/2012/main" name="Theme1" id="{50C947AA-E878-4387-BE9D-589F450EFB2D}" vid="{E1718405-23E7-4778-B443-999E460CE376}"/>
+      <thm15:themeFamily xmlns:thm15="http://schemas.microsoft.com/office/thememl/2012/main" name="Theme1" id="{124D0CB3-8EA6-4A1B-A2B3-C8AF54CED1ED}" vid="{99F5462B-3621-4A0E-85FE-64977290B836}"/>
     </a:ext>
   </a:extLst>
 </a:theme>
